--- a/docs/MeshPay_Presentation.pptx
+++ b/docs/MeshPay_Presentation.pptx
@@ -137,7 +137,7 @@
   <p:extLst>
     <p:ext uri="{521415D9-36F7-43E2-AB2F-B90AF26B5E84}">
       <p14:sectionLst xmlns:p14="http://schemas.microsoft.com/office/powerpoint/2010/main">
-        <p14:section name="Problems" id="{73b23258-18d2-3f02-8e47-3e564cc16bad}">
+        <p14:section name="Problems" id="{08c924c8-51d0-3f0a-c7f5-2da50f69c8ee}">
           <p14:sldIdLst>
             <p14:sldId id="257"/>
             <p14:sldId id="258"/>
@@ -147,7 +147,7 @@
             <p14:sldId id="262"/>
           </p14:sldIdLst>
         </p14:section>
-        <p14:section name="Mechanisms" id="{e3b4afca-f92d-85ab-c3b0-d36007ed3724}">
+        <p14:section name="Mechanisms" id="{858fce48-a29a-ca30-5301-9fd1ae14a2d6}">
           <p14:sldIdLst>
             <p14:sldId id="263"/>
             <p14:sldId id="264"/>
@@ -160,7 +160,7 @@
             <p14:sldId id="271"/>
           </p14:sldIdLst>
         </p14:section>
-        <p14:section name="Java concepts" id="{85934e89-6028-1c80-1ef0-d581435f3ce7}">
+        <p14:section name="Java concepts" id="{6cbf16fa-cb03-bd4c-44fa-8fc77147e09c}">
           <p14:sldIdLst>
             <p14:sldId id="272"/>
             <p14:sldId id="273"/>
@@ -174,7 +174,7 @@
             <p14:sldId id="281"/>
           </p14:sldIdLst>
         </p14:section>
-        <p14:section name="Wrap-up" id="{28cb39c4-cdd7-c41e-d6d8-0a3b6a004da0}">
+        <p14:section name="Wrap-up" id="{51215368-9083-8694-45aa-89ab04767a78}">
           <p14:sldIdLst>
             <p14:sldId id="282"/>
             <p14:sldId id="283"/>
@@ -1467,7 +1467,7 @@
           <a:p>
             <a:r>
               <a:rPr lang="en-US" dirty="0"/>
-              <a:t>Say: Be honest about this in the viva. We do not have a family tree of our own classes. Our design mostly builds things by combining objects. But we do use inheritance and polymorphism through the framework. The repositories extend JpaRepository, so they inherit save, find and delete without us writing them. And a Map variable holds a ConcurrentHashMap, which is polymorphism.</a:t>
+              <a:t>Say: Our domain classes are flat and mostly combine objects. But we do use inheritance: the three servlets extend HttpServlet and override doGet or doPost, and the repositories extend JpaRepository so they inherit save, find and delete. Polymorphism: Tomcat calls doGet through the HttpServlet type and our version runs, and a Map variable holds a ConcurrentHashMap.</a:t>
             </a:r>
             <a:endParaRPr lang="en-US" dirty="0"/>
           </a:p>
@@ -1643,7 +1643,7 @@
           <a:p>
             <a:r>
               <a:rPr lang="en-US" dirty="0"/>
-              <a:t>Say: Honest answer: our Java code does not read or write data files, because payments, balances and the ledger live in the database. But files still matter: application.properties holds settings that Spring reads at start-up, and dashboard.html is the page the server sends to the browser. If a setting is missing, the code has a default value, for example the 24-hour limit. If an examiner asks how we would add file handling, we would export the ledger to a CSV with try-with-resources and handle IOException.</a:t>
+              <a:t>Say: Our code now does real file handling with java.nio. LedgerFileService exports the ledger to a CSV file. It writes to a temporary file first and then renames it, so nobody ever sees a half-written file. It quotes commas, blocks spreadsheet formula tricks, and refuses file names like ../pom.xml. AuditLogService appends one line for every packet the server receives. Many threads write at once, so a lock keeps the lines apart, and the log rotates after 5 MB. If writing fails we log it and carry on, because an audit problem must never stop a payment.</a:t>
             </a:r>
             <a:endParaRPr lang="en-US" dirty="0"/>
           </a:p>
@@ -1995,7 +1995,7 @@
           <a:p>
             <a:r>
               <a:rPr lang="en-US" dirty="0"/>
-              <a:t>Say: JDBC is the standard bridge between Java and a database. Be honest: we do not write JDBC code by hand. We use Spring Data JPA, which uses Hibernate, which uses JDBC underneath. So every repository call turns into SQL and goes through JDBC automatically. Spring opens and closes connections for us, so there is no manual Connection or close in our code.</a:t>
+              <a:t>Say: JDBC is the standard bridge between Java and a database. We use it in two ways. Settlement writes go through Spring Data JPA, which uses JDBC underneath. And we also wrote our own JDBC class, LedgerJdbcDao, for reports and exports. It follows the classic steps: get a Connection from the DataSource, prepare a statement, run it, read the ResultSet, and close everything with try-with-resources. We always use question-mark parameters, so SQL injection cannot get in. SQLException is wrapped in our own unchecked exception. Because it only reads the tables Hibernate created, the same class works on H2 and on MySQL.</a:t>
             </a:r>
             <a:endParaRPr lang="en-US" dirty="0"/>
           </a:p>
@@ -2083,7 +2083,7 @@
           <a:p>
             <a:r>
               <a:rPr lang="en-US" dirty="0"/>
-              <a:t>Say: We need a database because balances and the ledger must be stored safely. We use H2 in memory because it needs no installation, which keeps the demo easy. We do not use MySQL in this project. The data disappears when the server stops. For a real system, the README suggests PostgreSQL or MySQL, and the change is mostly configuration. There are two tables: accounts and transactions. Accounts has a version column for optimistic locking, and transactions has a unique packetHash.</a:t>
+              <a:t>Say: We need a database because balances and the ledger must be stored safely. By default we use H2 in memory because it needs no installation, so the demo runs with one command; the data disappears when the server stops. For permanent storage we added a MySQL profile. docker compose starts MySQL, and you run Spring Boot with the mysql profile. Spring then uses the MySQL driver and a connection pool, and the tables are kept between restarts. Same code, different configuration. There are two tables: accounts has a version column for optimistic locking, and transactions has a unique packet hash. Note that the idempotency cache is still in memory, so after a restart the unique hash in the database is the safety net.</a:t>
             </a:r>
             <a:endParaRPr lang="en-US" dirty="0"/>
           </a:p>
@@ -2171,7 +2171,7 @@
           <a:p>
             <a:r>
               <a:rPr lang="en-US" dirty="0"/>
-              <a:t>Say: When a user or a bridge phone sends a request, something on the server must receive it, process it, and send back a response. That is the job of a servlet. Be honest: we do not write servlet classes. Spring Boot includes a web server, Tomcat, and a ready-made front-door servlet called DispatcherServlet. It receives every request and hands it to our controller method. So @PostMapping plays the role of doPost.</a:t>
+              <a:t>Say: A servlet is a Java class that receives a web request and writes a response. We now write our own. HealthServlet, LedgerExportServlet and AuditLogServlet all extend HttpServlet and override doGet or doPost. A Filter, RequestLogFilter, runs around them and adds a request ID header and logs the time taken. They are registered in ServletConfig under /servlet/*. The older API endpoints under /api still use Spring controllers, and behind them Spring's own DispatcherServlet does the routing. So both styles run on the same Tomcat server. Example: GET /servlet/export streams the ledger as a CSV download straight from JDBC.</a:t>
             </a:r>
             <a:endParaRPr lang="en-US" dirty="0"/>
           </a:p>
@@ -2435,7 +2435,7 @@
           <a:p>
             <a:r>
               <a:rPr lang="en-US" dirty="0"/>
-              <a:t>Say: These are the outcomes in simple terms: all four problems are solved, the system is secure, reliable, backed by a database, handles concurrency, has clean object-oriented design and error handling, and is tested.</a:t>
+              <a:t>Say: These are the outcomes in simple terms: all four problems are solved, the system is secure, reliable, backed by H2 or MySQL with JDBC, handles concurrency, writes CSV exports and an audit log, serves them through servlets, and is tested.</a:t>
             </a:r>
             <a:endParaRPr lang="en-US" dirty="0"/>
           </a:p>
@@ -4304,7 +4304,7 @@
       </p:sp>
       <p:sp>
         <p:nvSpPr>
-          <p:cNvPr id="10" name="chip H2 database"/>
+          <p:cNvPr id="10" name="chip H2 / MySQL"/>
           <p:cNvSpPr/>
           <p:nvPr/>
         </p:nvSpPr>
@@ -4357,7 +4357,7 @@
                 <a:ea typeface="Calibri" pitchFamily="34" charset="-122"/>
                 <a:cs typeface="Calibri" pitchFamily="34" charset="-120"/>
               </a:rPr>
-              <a:t>H2 database</a:t>
+              <a:t>H2 / MySQL</a:t>
             </a:r>
             <a:endParaRPr lang="en-US" sz="1400" dirty="0"/>
           </a:p>
@@ -12197,7 +12197,7 @@
                 <a:ea typeface="Calibri" pitchFamily="34" charset="-122"/>
                 <a:cs typeface="Calibri" pitchFamily="34" charset="-120"/>
               </a:rPr>
-              <a:t>A web page and 9 API endpoints (send, gossip, flush, balances, ledger…).</a:t>
+              <a:t>A web page, 9 API endpoints and servlets for CSV export, health and audit log.</a:t>
             </a:r>
             <a:endParaRPr lang="en-US" sz="1500" dirty="0"/>
           </a:p>
@@ -12324,7 +12324,7 @@
                 <a:ea typeface="Courier New" pitchFamily="34" charset="-122"/>
                 <a:cs typeface="Courier New" pitchFamily="34" charset="-120"/>
               </a:rPr>
-              <a:t>ApiController, dashboard.html, frontend</a:t>
+              <a:t>ApiController, servlet/ package</a:t>
             </a:r>
             <a:endParaRPr lang="en-US" sz="1300" dirty="0"/>
           </a:p>
@@ -12779,7 +12779,7 @@
                 <a:ea typeface="Calibri" pitchFamily="34" charset="-122"/>
                 <a:cs typeface="Calibri" pitchFamily="34" charset="-120"/>
               </a:rPr>
-              <a:t>4 automated tests, including a 3-thread race test; GitHub Actions on Linux and macOS.</a:t>
+              <a:t>18 automated tests: a 3-thread race test plus JDBC, servlet and file tests. Runs on GitHub Actions.</a:t>
             </a:r>
             <a:endParaRPr lang="en-US" sz="1500" dirty="0"/>
           </a:p>
@@ -12906,7 +12906,7 @@
                 <a:ea typeface="Courier New" pitchFamily="34" charset="-122"/>
                 <a:cs typeface="Courier New" pitchFamily="34" charset="-120"/>
               </a:rPr>
-              <a:t>IdempotencyConcurrencyTest, ci.yml</a:t>
+              <a:t>JdbcFilesServletsTest, ci.yml</a:t>
             </a:r>
             <a:endParaRPr lang="en-US" sz="1300" dirty="0"/>
           </a:p>
@@ -16085,7 +16085,7 @@
                 <a:ea typeface="Courier New" pitchFamily="34" charset="-122"/>
                 <a:cs typeface="Courier New" pitchFamily="34" charset="-120"/>
               </a:rPr>
-              <a:t>interface AccountRepository</a:t>
+              <a:t>class HealthServlet extends HttpServlet</a:t>
             </a:r>
             <a:endParaRPr lang="en-US" sz="1250" dirty="0"/>
           </a:p>
@@ -16102,7 +16102,7 @@
                 <a:ea typeface="Courier New" pitchFamily="34" charset="-122"/>
                 <a:cs typeface="Courier New" pitchFamily="34" charset="-120"/>
               </a:rPr>
-              <a:t>   extends JpaRepository&lt;Account, String&gt;</a:t>
+              <a:t>class LedgerExportServlet extends HttpServlet</a:t>
             </a:r>
             <a:endParaRPr lang="en-US" sz="1250" dirty="0"/>
           </a:p>
@@ -16119,7 +16119,7 @@
                 <a:ea typeface="Courier New" pitchFamily="34" charset="-122"/>
                 <a:cs typeface="Courier New" pitchFamily="34" charset="-120"/>
               </a:rPr>
-              <a:t>interface TransactionRepository</a:t>
+              <a:t>interface AccountRepository</a:t>
             </a:r>
             <a:endParaRPr lang="en-US" sz="1250" dirty="0"/>
           </a:p>
@@ -16136,7 +16136,7 @@
                 <a:ea typeface="Courier New" pitchFamily="34" charset="-122"/>
                 <a:cs typeface="Courier New" pitchFamily="34" charset="-120"/>
               </a:rPr>
-              <a:t>   extends JpaRepository&lt;Transaction, Long&gt;</a:t>
+              <a:t>   extends JpaRepository&lt;Account, String&gt;</a:t>
             </a:r>
             <a:endParaRPr lang="en-US" sz="1250" dirty="0"/>
           </a:p>
@@ -16175,7 +16175,7 @@
                 <a:ea typeface="Calibri" pitchFamily="34" charset="-122"/>
                 <a:cs typeface="Calibri" pitchFamily="34" charset="-120"/>
               </a:rPr>
-              <a:t>We get save(), findById(), findAll() and more without writing them.</a:t>
+              <a:t>Servlets: we override doGet() and doPost(). Repositories: save() and findById() come free.</a:t>
             </a:r>
             <a:endParaRPr lang="en-US" sz="1500" dirty="0"/>
           </a:p>
@@ -16422,7 +16422,7 @@
                 <a:ea typeface="Calibri" pitchFamily="34" charset="-122"/>
                 <a:cs typeface="Calibri" pitchFamily="34" charset="-120"/>
               </a:rPr>
-              <a:t>WebConfig overrides addCorsMappings(). Spring calls our version.</a:t>
+              <a:t>Tomcat calls doGet() on an HttpServlet variable. Our servlet's version runs.</a:t>
             </a:r>
             <a:endParaRPr lang="en-US" sz="1500" dirty="0"/>
           </a:p>
@@ -16504,7 +16504,7 @@
                 <a:ea typeface="Calibri" pitchFamily="34" charset="-122"/>
                 <a:cs typeface="Calibri" pitchFamily="34" charset="-120"/>
               </a:rPr>
-              <a:t>Viva-ready: we do not have our own parent-child class hierarchy. Our design prefers combining objects. We use inheritance through the repositories.</a:t>
+              <a:t>Viva-ready: our own inheritance is the 3 servlets extending HttpServlet. Domain classes stay flat and combine objects. Repositories inherit from JpaRepository.</a:t>
             </a:r>
             <a:endParaRPr lang="en-US" sz="1500" dirty="0"/>
           </a:p>
@@ -17953,7 +17953,7 @@
       </p:sp>
       <p:sp>
         <p:nvSpPr>
-          <p:cNvPr id="46" name="chip H2 database"/>
+          <p:cNvPr id="46" name="chip H2 / MySQL"/>
           <p:cNvSpPr/>
           <p:nvPr/>
         </p:nvSpPr>
@@ -18006,7 +18006,7 @@
                 <a:ea typeface="Calibri" pitchFamily="34" charset="-122"/>
                 <a:cs typeface="Calibri" pitchFamily="34" charset="-120"/>
               </a:rPr>
-              <a:t>H2 database</a:t>
+              <a:t>H2 / MySQL</a:t>
             </a:r>
             <a:endParaRPr lang="en-US" sz="1400" dirty="0"/>
           </a:p>
@@ -18075,7 +18075,7 @@
       </p:sp>
       <p:sp>
         <p:nvSpPr>
-          <p:cNvPr id="50" name="chip 4 automated tests"/>
+          <p:cNvPr id="50" name="chip 18 automated tests"/>
           <p:cNvSpPr/>
           <p:nvPr/>
         </p:nvSpPr>
@@ -18128,7 +18128,7 @@
                 <a:ea typeface="Calibri" pitchFamily="34" charset="-122"/>
                 <a:cs typeface="Calibri" pitchFamily="34" charset="-120"/>
               </a:rPr>
-              <a:t>4 automated tests</a:t>
+              <a:t>18 automated tests</a:t>
             </a:r>
             <a:endParaRPr lang="en-US" sz="1400" dirty="0"/>
           </a:p>
@@ -18239,7 +18239,7 @@
                   <a:schemeClr val="tx2"/>
                 </a:solidFill>
               </a:rPr>
-              <a:t>File handling: what our project does with files</a:t>
+              <a:t>File handling: writing files safely</a:t>
             </a:r>
             <a:endParaRPr lang="en-US" sz="3400" dirty="0"/>
           </a:p>
@@ -18247,118 +18247,18 @@
       </p:sp>
       <p:sp>
         <p:nvSpPr>
-          <p:cNvPr id="4" name="what code does"/>
+          <p:cNvPr id="4" name="csv export"/>
           <p:cNvSpPr/>
           <p:nvPr/>
         </p:nvSpPr>
         <p:spPr>
           <a:xfrm>
             <a:off x="457200" y="1280160"/>
-            <a:ext cx="5541264" cy="2057400"/>
+            <a:ext cx="5541264" cy="2011680"/>
           </a:xfrm>
           <a:prstGeom prst="roundRect">
             <a:avLst>
-              <a:gd name="adj" fmla="val 5333"/>
-            </a:avLst>
-          </a:prstGeom>
-          <a:solidFill>
-            <a:srgbClr val="FDF1DC"/>
-          </a:solidFill>
-          <a:ln/>
-        </p:spPr>
-      </p:sp>
-      <p:sp>
-        <p:nvSpPr>
-          <p:cNvPr id="5" name="Text 2"/>
-          <p:cNvSpPr txBox="1"/>
-          <p:nvPr/>
-        </p:nvSpPr>
-        <p:spPr>
-          <a:xfrm>
-            <a:off x="640080" y="1371600"/>
-            <a:ext cx="5120640" cy="365760"/>
-          </a:xfrm>
-          <a:prstGeom prst="rect">
-            <a:avLst/>
-          </a:prstGeom>
-          <a:noFill/>
-          <a:ln/>
-        </p:spPr>
-        <p:txBody>
-          <a:bodyPr wrap="square" lIns="0" tIns="0" rIns="0" bIns="0" rtlCol="0" anchor="t"/>
-          <a:lstStyle/>
-          <a:p>
-            <a:pPr algn="l" indent="0" marL="0">
-              <a:buNone/>
-            </a:pPr>
-            <a:r>
-              <a:rPr lang="en-US" sz="1800" b="1" dirty="0">
-                <a:solidFill>
-                  <a:schemeClr val="accent3"/>
-                </a:solidFill>
-                <a:latin typeface="Calibri" pitchFamily="34" charset="0"/>
-                <a:ea typeface="Calibri" pitchFamily="34" charset="-122"/>
-                <a:cs typeface="Calibri" pitchFamily="34" charset="-120"/>
-              </a:rPr>
-              <a:t>What our Java code does</a:t>
-            </a:r>
-            <a:endParaRPr lang="en-US" sz="1800" dirty="0"/>
-          </a:p>
-        </p:txBody>
-      </p:sp>
-      <p:sp>
-        <p:nvSpPr>
-          <p:cNvPr id="6" name="Text 3"/>
-          <p:cNvSpPr txBox="1"/>
-          <p:nvPr/>
-        </p:nvSpPr>
-        <p:spPr>
-          <a:xfrm>
-            <a:off x="640080" y="1783080"/>
-            <a:ext cx="5120640" cy="1463040"/>
-          </a:xfrm>
-          <a:prstGeom prst="rect">
-            <a:avLst/>
-          </a:prstGeom>
-          <a:noFill/>
-          <a:ln/>
-        </p:spPr>
-        <p:txBody>
-          <a:bodyPr wrap="square" lIns="0" tIns="0" rIns="0" bIns="0" rtlCol="0" anchor="t"/>
-          <a:lstStyle/>
-          <a:p>
-            <a:pPr algn="l" indent="0" marL="0">
-              <a:buNone/>
-            </a:pPr>
-            <a:r>
-              <a:rPr lang="en-US" sz="1600" dirty="0">
-                <a:solidFill>
-                  <a:schemeClr val="tx1"/>
-                </a:solidFill>
-                <a:latin typeface="Calibri" pitchFamily="34" charset="0"/>
-                <a:ea typeface="Calibri" pitchFamily="34" charset="-122"/>
-                <a:cs typeface="Calibri" pitchFamily="34" charset="-120"/>
-              </a:rPr>
-              <a:t>It does not read or write data files. Payments, balances and the ledger are stored in the database, not in files.</a:t>
-            </a:r>
-            <a:endParaRPr lang="en-US" sz="1600" dirty="0"/>
-          </a:p>
-        </p:txBody>
-      </p:sp>
-      <p:sp>
-        <p:nvSpPr>
-          <p:cNvPr id="7" name="files used"/>
-          <p:cNvSpPr/>
-          <p:nvPr/>
-        </p:nvSpPr>
-        <p:spPr>
-          <a:xfrm>
-            <a:off x="6190488" y="1280160"/>
-            <a:ext cx="5541264" cy="2057400"/>
-          </a:xfrm>
-          <a:prstGeom prst="roundRect">
-            <a:avLst>
-              <a:gd name="adj" fmla="val 5333"/>
+              <a:gd name="adj" fmla="val 5455"/>
             </a:avLst>
           </a:prstGeom>
           <a:solidFill>
@@ -18369,14 +18269,14 @@
       </p:sp>
       <p:sp>
         <p:nvSpPr>
-          <p:cNvPr id="8" name="Text 5"/>
+          <p:cNvPr id="5" name="Text 2"/>
           <p:cNvSpPr txBox="1"/>
           <p:nvPr/>
         </p:nvSpPr>
         <p:spPr>
           <a:xfrm>
-            <a:off x="6373368" y="1371600"/>
-            <a:ext cx="5120640" cy="365760"/>
+            <a:off x="640080" y="1353312"/>
+            <a:ext cx="5212080" cy="365760"/>
           </a:xfrm>
           <a:prstGeom prst="rect">
             <a:avLst/>
@@ -18394,13 +18294,13 @@
             <a:r>
               <a:rPr lang="en-US" sz="1800" b="1" dirty="0">
                 <a:solidFill>
-                  <a:schemeClr val="tx2"/>
-                </a:solidFill>
-                <a:latin typeface="Calibri" pitchFamily="34" charset="0"/>
-                <a:ea typeface="Calibri" pitchFamily="34" charset="-122"/>
-                <a:cs typeface="Calibri" pitchFamily="34" charset="-120"/>
-              </a:rPr>
-              <a:t>Files the project does use</a:t>
+                  <a:schemeClr val="accent4"/>
+                </a:solidFill>
+                <a:latin typeface="Calibri" pitchFamily="34" charset="0"/>
+                <a:ea typeface="Calibri" pitchFamily="34" charset="-122"/>
+                <a:cs typeface="Calibri" pitchFamily="34" charset="-120"/>
+              </a:rPr>
+              <a:t>CSV export  (LedgerFileService)</a:t>
             </a:r>
             <a:endParaRPr lang="en-US" sz="1800" dirty="0"/>
           </a:p>
@@ -18408,14 +18308,14 @@
       </p:sp>
       <p:sp>
         <p:nvSpPr>
-          <p:cNvPr id="9" name="Text 6"/>
+          <p:cNvPr id="6" name="Text 3"/>
           <p:cNvSpPr txBox="1"/>
           <p:nvPr/>
         </p:nvSpPr>
         <p:spPr>
           <a:xfrm>
-            <a:off x="6373368" y="1783080"/>
-            <a:ext cx="5120640" cy="1508760"/>
+            <a:off x="640080" y="1764792"/>
+            <a:ext cx="5212080" cy="1463040"/>
           </a:xfrm>
           <a:prstGeom prst="rect">
             <a:avLst/>
@@ -18427,236 +18327,407 @@
           <a:bodyPr wrap="square" lIns="0" tIns="0" rIns="0" bIns="0" rtlCol="0" anchor="t"/>
           <a:lstStyle/>
           <a:p>
-            <a:pPr algn="l" indent="0" marL="0">
+            <a:pPr algn="l" marL="342900" indent="-342900">
               <a:spcAft>
                 <a:spcPts val="300"/>
               </a:spcAft>
-              <a:buNone/>
-            </a:pPr>
-            <a:r>
-              <a:rPr lang="en-US" sz="1500" b="1" dirty="0">
+              <a:buSzPct val="100000"/>
+              <a:buChar char="•"/>
+            </a:pPr>
+            <a:r>
+              <a:rPr lang="en-US" sz="1450" dirty="0">
+                <a:solidFill>
+                  <a:schemeClr val="tx1"/>
+                </a:solidFill>
+                <a:latin typeface="Calibri" pitchFamily="34" charset="0"/>
+                <a:ea typeface="Calibri" pitchFamily="34" charset="-122"/>
+                <a:cs typeface="Calibri" pitchFamily="34" charset="-120"/>
+              </a:rPr>
+              <a:t>Saves data/exports/transactions-&lt;time&gt;.csv</a:t>
+            </a:r>
+            <a:endParaRPr lang="en-US" sz="1450" dirty="0"/>
+          </a:p>
+          <a:p>
+            <a:pPr algn="l" marL="342900" indent="-342900">
+              <a:spcAft>
+                <a:spcPts val="300"/>
+              </a:spcAft>
+              <a:buSzPct val="100000"/>
+              <a:buChar char="•"/>
+            </a:pPr>
+            <a:r>
+              <a:rPr lang="en-US" sz="1450" dirty="0">
+                <a:solidFill>
+                  <a:schemeClr val="tx1"/>
+                </a:solidFill>
+                <a:latin typeface="Calibri" pitchFamily="34" charset="0"/>
+                <a:ea typeface="Calibri" pitchFamily="34" charset="-122"/>
+                <a:cs typeface="Calibri" pitchFamily="34" charset="-120"/>
+              </a:rPr>
+              <a:t>Temp file first, then rename: never half-written</a:t>
+            </a:r>
+            <a:endParaRPr lang="en-US" sz="1450" dirty="0"/>
+          </a:p>
+          <a:p>
+            <a:pPr algn="l" marL="342900" indent="-342900">
+              <a:spcAft>
+                <a:spcPts val="300"/>
+              </a:spcAft>
+              <a:buSzPct val="100000"/>
+              <a:buChar char="•"/>
+            </a:pPr>
+            <a:r>
+              <a:rPr lang="en-US" sz="1450" dirty="0">
+                <a:solidFill>
+                  <a:schemeClr val="tx1"/>
+                </a:solidFill>
+                <a:latin typeface="Calibri" pitchFamily="34" charset="0"/>
+                <a:ea typeface="Calibri" pitchFamily="34" charset="-122"/>
+                <a:cs typeface="Calibri" pitchFamily="34" charset="-120"/>
+              </a:rPr>
+              <a:t>Quotes commas; blocks =, +, -, @ formula tricks</a:t>
+            </a:r>
+            <a:endParaRPr lang="en-US" sz="1450" dirty="0"/>
+          </a:p>
+          <a:p>
+            <a:pPr algn="l" marL="342900" indent="-342900">
+              <a:spcAft>
+                <a:spcPts val="300"/>
+              </a:spcAft>
+              <a:buSzPct val="100000"/>
+              <a:buChar char="•"/>
+            </a:pPr>
+            <a:r>
+              <a:rPr lang="en-US" sz="1450" dirty="0">
+                <a:solidFill>
+                  <a:schemeClr val="tx1"/>
+                </a:solidFill>
+                <a:latin typeface="Calibri" pitchFamily="34" charset="0"/>
+                <a:ea typeface="Calibri" pitchFamily="34" charset="-122"/>
+                <a:cs typeface="Calibri" pitchFamily="34" charset="-120"/>
+              </a:rPr>
+              <a:t>Refuses unsafe names such as ../pom.xml</a:t>
+            </a:r>
+            <a:endParaRPr lang="en-US" sz="1450" dirty="0"/>
+          </a:p>
+        </p:txBody>
+      </p:sp>
+      <p:sp>
+        <p:nvSpPr>
+          <p:cNvPr id="7" name="audit log"/>
+          <p:cNvSpPr/>
+          <p:nvPr/>
+        </p:nvSpPr>
+        <p:spPr>
+          <a:xfrm>
+            <a:off x="6190488" y="1280160"/>
+            <a:ext cx="5541264" cy="2011680"/>
+          </a:xfrm>
+          <a:prstGeom prst="roundRect">
+            <a:avLst>
+              <a:gd name="adj" fmla="val 5455"/>
+            </a:avLst>
+          </a:prstGeom>
+          <a:solidFill>
+            <a:schemeClr val="bg2"/>
+          </a:solidFill>
+          <a:ln/>
+        </p:spPr>
+      </p:sp>
+      <p:sp>
+        <p:nvSpPr>
+          <p:cNvPr id="8" name="Text 5"/>
+          <p:cNvSpPr txBox="1"/>
+          <p:nvPr/>
+        </p:nvSpPr>
+        <p:spPr>
+          <a:xfrm>
+            <a:off x="6373368" y="1353312"/>
+            <a:ext cx="5212080" cy="365760"/>
+          </a:xfrm>
+          <a:prstGeom prst="rect">
+            <a:avLst/>
+          </a:prstGeom>
+          <a:noFill/>
+          <a:ln/>
+        </p:spPr>
+        <p:txBody>
+          <a:bodyPr wrap="square" lIns="0" tIns="0" rIns="0" bIns="0" rtlCol="0" anchor="t"/>
+          <a:lstStyle/>
+          <a:p>
+            <a:pPr algn="l" indent="0" marL="0">
+              <a:buNone/>
+            </a:pPr>
+            <a:r>
+              <a:rPr lang="en-US" sz="1800" b="1" dirty="0">
                 <a:solidFill>
                   <a:schemeClr val="accent4"/>
+                </a:solidFill>
+                <a:latin typeface="Calibri" pitchFamily="34" charset="0"/>
+                <a:ea typeface="Calibri" pitchFamily="34" charset="-122"/>
+                <a:cs typeface="Calibri" pitchFamily="34" charset="-120"/>
+              </a:rPr>
+              <a:t>Audit log  (AuditLogService)</a:t>
+            </a:r>
+            <a:endParaRPr lang="en-US" sz="1800" dirty="0"/>
+          </a:p>
+        </p:txBody>
+      </p:sp>
+      <p:sp>
+        <p:nvSpPr>
+          <p:cNvPr id="9" name="Text 6"/>
+          <p:cNvSpPr txBox="1"/>
+          <p:nvPr/>
+        </p:nvSpPr>
+        <p:spPr>
+          <a:xfrm>
+            <a:off x="6373368" y="1764792"/>
+            <a:ext cx="5212080" cy="1463040"/>
+          </a:xfrm>
+          <a:prstGeom prst="rect">
+            <a:avLst/>
+          </a:prstGeom>
+          <a:noFill/>
+          <a:ln/>
+        </p:spPr>
+        <p:txBody>
+          <a:bodyPr wrap="square" lIns="0" tIns="0" rIns="0" bIns="0" rtlCol="0" anchor="t"/>
+          <a:lstStyle/>
+          <a:p>
+            <a:pPr algn="l" marL="342900" indent="-342900">
+              <a:spcAft>
+                <a:spcPts val="300"/>
+              </a:spcAft>
+              <a:buSzPct val="100000"/>
+              <a:buChar char="•"/>
+            </a:pPr>
+            <a:r>
+              <a:rPr lang="en-US" sz="1450" dirty="0">
+                <a:solidFill>
+                  <a:schemeClr val="tx1"/>
+                </a:solidFill>
+                <a:latin typeface="Calibri" pitchFamily="34" charset="0"/>
+                <a:ea typeface="Calibri" pitchFamily="34" charset="-122"/>
+                <a:cs typeface="Calibri" pitchFamily="34" charset="-120"/>
+              </a:rPr>
+              <a:t>One line per packet in ingest-audit.log</a:t>
+            </a:r>
+            <a:endParaRPr lang="en-US" sz="1450" dirty="0"/>
+          </a:p>
+          <a:p>
+            <a:pPr algn="l" marL="342900" indent="-342900">
+              <a:spcAft>
+                <a:spcPts val="300"/>
+              </a:spcAft>
+              <a:buSzPct val="100000"/>
+              <a:buChar char="•"/>
+            </a:pPr>
+            <a:r>
+              <a:rPr lang="en-US" sz="1450" dirty="0">
+                <a:solidFill>
+                  <a:schemeClr val="tx1"/>
+                </a:solidFill>
+                <a:latin typeface="Calibri" pitchFamily="34" charset="0"/>
+                <a:ea typeface="Calibri" pitchFamily="34" charset="-122"/>
+                <a:cs typeface="Calibri" pitchFamily="34" charset="-120"/>
+              </a:rPr>
+              <a:t>A lock keeps lines from many threads apart</a:t>
+            </a:r>
+            <a:endParaRPr lang="en-US" sz="1450" dirty="0"/>
+          </a:p>
+          <a:p>
+            <a:pPr algn="l" marL="342900" indent="-342900">
+              <a:spcAft>
+                <a:spcPts val="300"/>
+              </a:spcAft>
+              <a:buSzPct val="100000"/>
+              <a:buChar char="•"/>
+            </a:pPr>
+            <a:r>
+              <a:rPr lang="en-US" sz="1450" dirty="0">
+                <a:solidFill>
+                  <a:schemeClr val="tx1"/>
+                </a:solidFill>
+                <a:latin typeface="Calibri" pitchFamily="34" charset="0"/>
+                <a:ea typeface="Calibri" pitchFamily="34" charset="-122"/>
+                <a:cs typeface="Calibri" pitchFamily="34" charset="-120"/>
+              </a:rPr>
+              <a:t>A new file is started once it passes 5 MB</a:t>
+            </a:r>
+            <a:endParaRPr lang="en-US" sz="1450" dirty="0"/>
+          </a:p>
+          <a:p>
+            <a:pPr algn="l" marL="342900" indent="-342900">
+              <a:spcAft>
+                <a:spcPts val="300"/>
+              </a:spcAft>
+              <a:buSzPct val="100000"/>
+              <a:buChar char="•"/>
+            </a:pPr>
+            <a:r>
+              <a:rPr lang="en-US" sz="1450" dirty="0">
+                <a:solidFill>
+                  <a:schemeClr val="tx1"/>
+                </a:solidFill>
+                <a:latin typeface="Calibri" pitchFamily="34" charset="0"/>
+                <a:ea typeface="Calibri" pitchFamily="34" charset="-122"/>
+                <a:cs typeface="Calibri" pitchFamily="34" charset="-120"/>
+              </a:rPr>
+              <a:t>If writing fails, the payment still settles</a:t>
+            </a:r>
+            <a:endParaRPr lang="en-US" sz="1450" dirty="0"/>
+          </a:p>
+        </p:txBody>
+      </p:sp>
+      <p:sp>
+        <p:nvSpPr>
+          <p:cNvPr id="10" name="Text 7"/>
+          <p:cNvSpPr txBox="1"/>
+          <p:nvPr/>
+        </p:nvSpPr>
+        <p:spPr>
+          <a:xfrm>
+            <a:off x="457200" y="3429000"/>
+            <a:ext cx="5486400" cy="365760"/>
+          </a:xfrm>
+          <a:prstGeom prst="rect">
+            <a:avLst/>
+          </a:prstGeom>
+          <a:noFill/>
+          <a:ln/>
+        </p:spPr>
+        <p:txBody>
+          <a:bodyPr wrap="square" lIns="0" tIns="0" rIns="0" bIns="0" rtlCol="0" anchor="t"/>
+          <a:lstStyle/>
+          <a:p>
+            <a:pPr algn="l" indent="0" marL="0">
+              <a:buNone/>
+            </a:pPr>
+            <a:r>
+              <a:rPr lang="en-US" sz="1800" b="1" dirty="0">
+                <a:solidFill>
+                  <a:schemeClr val="tx2"/>
+                </a:solidFill>
+                <a:latin typeface="Calibri" pitchFamily="34" charset="0"/>
+                <a:ea typeface="Calibri" pitchFamily="34" charset="-122"/>
+                <a:cs typeface="Calibri" pitchFamily="34" charset="-120"/>
+              </a:rPr>
+              <a:t>How a safe write looks in code</a:t>
+            </a:r>
+            <a:endParaRPr lang="en-US" sz="1800" dirty="0"/>
+          </a:p>
+        </p:txBody>
+      </p:sp>
+      <p:sp>
+        <p:nvSpPr>
+          <p:cNvPr id="11" name="code block"/>
+          <p:cNvSpPr/>
+          <p:nvPr/>
+        </p:nvSpPr>
+        <p:spPr>
+          <a:xfrm>
+            <a:off x="457200" y="3840480"/>
+            <a:ext cx="5541264" cy="1600200"/>
+          </a:xfrm>
+          <a:prstGeom prst="roundRect">
+            <a:avLst>
+              <a:gd name="adj" fmla="val 5714"/>
+            </a:avLst>
+          </a:prstGeom>
+          <a:solidFill>
+            <a:schemeClr val="tx1"/>
+          </a:solidFill>
+          <a:ln/>
+        </p:spPr>
+      </p:sp>
+      <p:sp>
+        <p:nvSpPr>
+          <p:cNvPr id="12" name="Text 9"/>
+          <p:cNvSpPr txBox="1"/>
+          <p:nvPr/>
+        </p:nvSpPr>
+        <p:spPr>
+          <a:xfrm>
+            <a:off x="640080" y="3977640"/>
+            <a:ext cx="5175504" cy="1325880"/>
+          </a:xfrm>
+          <a:prstGeom prst="rect">
+            <a:avLst/>
+          </a:prstGeom>
+          <a:noFill/>
+          <a:ln/>
+        </p:spPr>
+        <p:txBody>
+          <a:bodyPr wrap="square" lIns="0" tIns="0" rIns="0" bIns="0" rtlCol="0" anchor="ctr"/>
+          <a:lstStyle/>
+          <a:p>
+            <a:pPr algn="l" indent="0" marL="0">
+              <a:buNone/>
+            </a:pPr>
+            <a:r>
+              <a:rPr lang="en-US" sz="1250" dirty="0">
+                <a:solidFill>
+                  <a:schemeClr val="bg1"/>
                 </a:solidFill>
                 <a:latin typeface="Courier New" pitchFamily="34" charset="0"/>
                 <a:ea typeface="Courier New" pitchFamily="34" charset="-122"/>
                 <a:cs typeface="Courier New" pitchFamily="34" charset="-120"/>
               </a:rPr>
-              <a:t>application.properties</a:t>
-            </a:r>
+              <a:t>try (BufferedWriter w =</a:t>
+            </a:r>
+            <a:endParaRPr lang="en-US" sz="1250" dirty="0"/>
+          </a:p>
+          <a:p>
             <a:pPr algn="l" indent="0" marL="0">
-              <a:spcAft>
-                <a:spcPts val="300"/>
-              </a:spcAft>
-              <a:buNone/>
-            </a:pPr>
-            <a:r>
-              <a:rPr lang="en-US" sz="1500" dirty="0">
-                <a:solidFill>
-                  <a:schemeClr val="tx1"/>
-                </a:solidFill>
-                <a:latin typeface="Calibri" pitchFamily="34" charset="0"/>
-                <a:ea typeface="Calibri" pitchFamily="34" charset="-122"/>
-                <a:cs typeface="Calibri" pitchFamily="34" charset="-120"/>
-              </a:rPr>
-              <a:t>  settings read at start-up</a:t>
-            </a:r>
-            <a:endParaRPr lang="en-US" sz="1500" dirty="0"/>
-          </a:p>
-          <a:p>
-            <a:pPr algn="l" indent="0" marL="0">
-              <a:spcAft>
-                <a:spcPts val="300"/>
-              </a:spcAft>
-              <a:buNone/>
-            </a:pPr>
-            <a:r>
-              <a:rPr lang="en-US" sz="1500" b="1" dirty="0">
-                <a:solidFill>
-                  <a:schemeClr val="accent4"/>
+              <a:buNone/>
+            </a:pPr>
+            <a:r>
+              <a:rPr lang="en-US" sz="1250" dirty="0">
+                <a:solidFill>
+                  <a:schemeClr val="bg1"/>
                 </a:solidFill>
                 <a:latin typeface="Courier New" pitchFamily="34" charset="0"/>
                 <a:ea typeface="Courier New" pitchFamily="34" charset="-122"/>
                 <a:cs typeface="Courier New" pitchFamily="34" charset="-120"/>
               </a:rPr>
-              <a:t>dashboard.html</a:t>
-            </a:r>
+              <a:t>       Files.newBufferedWriter(temp)) {</a:t>
+            </a:r>
+            <a:endParaRPr lang="en-US" sz="1250" dirty="0"/>
+          </a:p>
+          <a:p>
             <a:pPr algn="l" indent="0" marL="0">
-              <a:spcAft>
-                <a:spcPts val="300"/>
-              </a:spcAft>
-              <a:buNone/>
-            </a:pPr>
-            <a:r>
-              <a:rPr lang="en-US" sz="1500" dirty="0">
-                <a:solidFill>
-                  <a:schemeClr val="tx1"/>
-                </a:solidFill>
-                <a:latin typeface="Calibri" pitchFamily="34" charset="0"/>
-                <a:ea typeface="Calibri" pitchFamily="34" charset="-122"/>
-                <a:cs typeface="Calibri" pitchFamily="34" charset="-120"/>
-              </a:rPr>
-              <a:t>  page served at /</a:t>
-            </a:r>
-            <a:endParaRPr lang="en-US" sz="1500" dirty="0"/>
-          </a:p>
-          <a:p>
-            <a:pPr algn="l" indent="0" marL="0">
-              <a:spcAft>
-                <a:spcPts val="300"/>
-              </a:spcAft>
-              <a:buNone/>
-            </a:pPr>
-            <a:r>
-              <a:rPr lang="en-US" sz="1500" b="1" dirty="0">
-                <a:solidFill>
-                  <a:schemeClr val="accent4"/>
+              <a:buNone/>
+            </a:pPr>
+            <a:r>
+              <a:rPr lang="en-US" sz="1250" dirty="0">
+                <a:solidFill>
+                  <a:schemeClr val="bg1"/>
                 </a:solidFill>
                 <a:latin typeface="Courier New" pitchFamily="34" charset="0"/>
                 <a:ea typeface="Courier New" pitchFamily="34" charset="-122"/>
                 <a:cs typeface="Courier New" pitchFamily="34" charset="-120"/>
               </a:rPr>
-              <a:t>pom.xml</a:t>
-            </a:r>
+              <a:t>   writeCsv(w);          // file closes by itself</a:t>
+            </a:r>
+            <a:endParaRPr lang="en-US" sz="1250" dirty="0"/>
+          </a:p>
+          <a:p>
             <a:pPr algn="l" indent="0" marL="0">
-              <a:spcAft>
-                <a:spcPts val="300"/>
-              </a:spcAft>
-              <a:buNone/>
-            </a:pPr>
-            <a:r>
-              <a:rPr lang="en-US" sz="1500" dirty="0">
-                <a:solidFill>
-                  <a:schemeClr val="tx1"/>
-                </a:solidFill>
-                <a:latin typeface="Calibri" pitchFamily="34" charset="0"/>
-                <a:ea typeface="Calibri" pitchFamily="34" charset="-122"/>
-                <a:cs typeface="Calibri" pitchFamily="34" charset="-120"/>
-              </a:rPr>
-              <a:t>  build and libraries</a:t>
-            </a:r>
-            <a:endParaRPr lang="en-US" sz="1500" dirty="0"/>
-          </a:p>
-          <a:p>
-            <a:pPr algn="l" indent="0" marL="0">
-              <a:spcAft>
-                <a:spcPts val="300"/>
-              </a:spcAft>
-              <a:buNone/>
-            </a:pPr>
-            <a:r>
-              <a:rPr lang="en-US" sz="1500" b="1" dirty="0">
-                <a:solidFill>
-                  <a:schemeClr val="accent4"/>
+              <a:buNone/>
+            </a:pPr>
+            <a:r>
+              <a:rPr lang="en-US" sz="1250" dirty="0">
+                <a:solidFill>
+                  <a:schemeClr val="bg1"/>
                 </a:solidFill>
                 <a:latin typeface="Courier New" pitchFamily="34" charset="0"/>
                 <a:ea typeface="Courier New" pitchFamily="34" charset="-122"/>
                 <a:cs typeface="Courier New" pitchFamily="34" charset="-120"/>
               </a:rPr>
-              <a:t>ci.yml</a:t>
-            </a:r>
-            <a:pPr algn="l" indent="0" marL="0">
-              <a:spcAft>
-                <a:spcPts val="300"/>
-              </a:spcAft>
-              <a:buNone/>
-            </a:pPr>
-            <a:r>
-              <a:rPr lang="en-US" sz="1500" dirty="0">
-                <a:solidFill>
-                  <a:schemeClr val="tx1"/>
-                </a:solidFill>
-                <a:latin typeface="Calibri" pitchFamily="34" charset="0"/>
-                <a:ea typeface="Calibri" pitchFamily="34" charset="-122"/>
-                <a:cs typeface="Calibri" pitchFamily="34" charset="-120"/>
-              </a:rPr>
-              <a:t>  automatic build and test</a:t>
-            </a:r>
-            <a:endParaRPr lang="en-US" sz="1500" dirty="0"/>
-          </a:p>
-        </p:txBody>
-      </p:sp>
-      <p:sp>
-        <p:nvSpPr>
-          <p:cNvPr id="10" name="Text 7"/>
-          <p:cNvSpPr txBox="1"/>
-          <p:nvPr/>
-        </p:nvSpPr>
-        <p:spPr>
-          <a:xfrm>
-            <a:off x="457200" y="3520440"/>
-            <a:ext cx="5486400" cy="365760"/>
-          </a:xfrm>
-          <a:prstGeom prst="rect">
-            <a:avLst/>
-          </a:prstGeom>
-          <a:noFill/>
-          <a:ln/>
-        </p:spPr>
-        <p:txBody>
-          <a:bodyPr wrap="square" lIns="0" tIns="0" rIns="0" bIns="0" rtlCol="0" anchor="t"/>
-          <a:lstStyle/>
-          <a:p>
-            <a:pPr algn="l" indent="0" marL="0">
-              <a:buNone/>
-            </a:pPr>
-            <a:r>
-              <a:rPr lang="en-US" sz="1800" b="1" dirty="0">
-                <a:solidFill>
-                  <a:schemeClr val="tx2"/>
-                </a:solidFill>
-                <a:latin typeface="Calibri" pitchFamily="34" charset="0"/>
-                <a:ea typeface="Calibri" pitchFamily="34" charset="-122"/>
-                <a:cs typeface="Calibri" pitchFamily="34" charset="-120"/>
-              </a:rPr>
-              <a:t>What is in application.properties</a:t>
-            </a:r>
-            <a:endParaRPr lang="en-US" sz="1800" dirty="0"/>
-          </a:p>
-        </p:txBody>
-      </p:sp>
-      <p:sp>
-        <p:nvSpPr>
-          <p:cNvPr id="11" name="code block"/>
-          <p:cNvSpPr/>
-          <p:nvPr/>
-        </p:nvSpPr>
-        <p:spPr>
-          <a:xfrm>
-            <a:off x="457200" y="3931920"/>
-            <a:ext cx="5541264" cy="1417320"/>
-          </a:xfrm>
-          <a:prstGeom prst="roundRect">
-            <a:avLst>
-              <a:gd name="adj" fmla="val 6452"/>
-            </a:avLst>
-          </a:prstGeom>
-          <a:solidFill>
-            <a:schemeClr val="tx1"/>
-          </a:solidFill>
-          <a:ln/>
-        </p:spPr>
-      </p:sp>
-      <p:sp>
-        <p:nvSpPr>
-          <p:cNvPr id="12" name="Text 9"/>
-          <p:cNvSpPr txBox="1"/>
-          <p:nvPr/>
-        </p:nvSpPr>
-        <p:spPr>
-          <a:xfrm>
-            <a:off x="640080" y="4069080"/>
-            <a:ext cx="5175504" cy="1143000"/>
-          </a:xfrm>
-          <a:prstGeom prst="rect">
-            <a:avLst/>
-          </a:prstGeom>
-          <a:noFill/>
-          <a:ln/>
-        </p:spPr>
-        <p:txBody>
-          <a:bodyPr wrap="square" lIns="0" tIns="0" rIns="0" bIns="0" rtlCol="0" anchor="ctr"/>
-          <a:lstStyle/>
+              <a:t>}</a:t>
+            </a:r>
+            <a:endParaRPr lang="en-US" sz="1250" dirty="0"/>
+          </a:p>
           <a:p>
             <a:pPr algn="l" indent="0" marL="0">
               <a:buNone/>
@@ -18670,58 +18741,7 @@
                 <a:ea typeface="Courier New" pitchFamily="34" charset="-122"/>
                 <a:cs typeface="Courier New" pitchFamily="34" charset="-120"/>
               </a:rPr>
-              <a:t>server.port=${PORT:8080}</a:t>
-            </a:r>
-            <a:endParaRPr lang="en-US" sz="1250" dirty="0"/>
-          </a:p>
-          <a:p>
-            <a:pPr algn="l" indent="0" marL="0">
-              <a:buNone/>
-            </a:pPr>
-            <a:r>
-              <a:rPr lang="en-US" sz="1250" dirty="0">
-                <a:solidFill>
-                  <a:schemeClr val="bg1"/>
-                </a:solidFill>
-                <a:latin typeface="Courier New" pitchFamily="34" charset="0"/>
-                <a:ea typeface="Courier New" pitchFamily="34" charset="-122"/>
-                <a:cs typeface="Courier New" pitchFamily="34" charset="-120"/>
-              </a:rPr>
-              <a:t>upi.mesh.packet-max-age-seconds=86400</a:t>
-            </a:r>
-            <a:endParaRPr lang="en-US" sz="1250" dirty="0"/>
-          </a:p>
-          <a:p>
-            <a:pPr algn="l" indent="0" marL="0">
-              <a:buNone/>
-            </a:pPr>
-            <a:r>
-              <a:rPr lang="en-US" sz="1250" dirty="0">
-                <a:solidFill>
-                  <a:schemeClr val="bg1"/>
-                </a:solidFill>
-                <a:latin typeface="Courier New" pitchFamily="34" charset="0"/>
-                <a:ea typeface="Courier New" pitchFamily="34" charset="-122"/>
-                <a:cs typeface="Courier New" pitchFamily="34" charset="-120"/>
-              </a:rPr>
-              <a:t>upi.mesh.idempotency-ttl-seconds=86400</a:t>
-            </a:r>
-            <a:endParaRPr lang="en-US" sz="1250" dirty="0"/>
-          </a:p>
-          <a:p>
-            <a:pPr algn="l" indent="0" marL="0">
-              <a:buNone/>
-            </a:pPr>
-            <a:r>
-              <a:rPr lang="en-US" sz="1250" dirty="0">
-                <a:solidFill>
-                  <a:schemeClr val="bg1"/>
-                </a:solidFill>
-                <a:latin typeface="Courier New" pitchFamily="34" charset="0"/>
-                <a:ea typeface="Courier New" pitchFamily="34" charset="-122"/>
-                <a:cs typeface="Courier New" pitchFamily="34" charset="-120"/>
-              </a:rPr>
-              <a:t>spring.datasource.url=jdbc:h2:mem:upimesh</a:t>
+              <a:t>Files.move(temp, target, ATOMIC_MOVE);</a:t>
             </a:r>
             <a:endParaRPr lang="en-US" sz="1250" dirty="0"/>
           </a:p>
@@ -18735,7 +18755,7 @@
         </p:nvSpPr>
         <p:spPr>
           <a:xfrm>
-            <a:off x="6190488" y="3520440"/>
+            <a:off x="6190488" y="3429000"/>
             <a:ext cx="5486400" cy="365760"/>
           </a:xfrm>
           <a:prstGeom prst="rect">
@@ -18760,7 +18780,7 @@
                 <a:ea typeface="Calibri" pitchFamily="34" charset="-122"/>
                 <a:cs typeface="Calibri" pitchFamily="34" charset="-120"/>
               </a:rPr>
-              <a:t>If a setting is missing</a:t>
+              <a:t>Java tools used</a:t>
             </a:r>
             <a:endParaRPr lang="en-US" sz="1800" dirty="0"/>
           </a:p>
@@ -18774,8 +18794,8 @@
         </p:nvSpPr>
         <p:spPr>
           <a:xfrm>
-            <a:off x="6190488" y="3931920"/>
-            <a:ext cx="5541264" cy="914400"/>
+            <a:off x="6190488" y="3840480"/>
+            <a:ext cx="5541264" cy="1600200"/>
           </a:xfrm>
           <a:prstGeom prst="rect">
             <a:avLst/>
@@ -18789,7 +18809,7 @@
           <a:p>
             <a:pPr algn="l" marL="342900" indent="-342900">
               <a:spcAft>
-                <a:spcPts val="500"/>
+                <a:spcPts val="400"/>
               </a:spcAft>
               <a:buSzPct val="100000"/>
               <a:buChar char="•"/>
@@ -18803,14 +18823,14 @@
                 <a:ea typeface="Calibri" pitchFamily="34" charset="-122"/>
                 <a:cs typeface="Calibri" pitchFamily="34" charset="-120"/>
               </a:rPr>
-              <a:t>The code carries safe defaults, for example 86400 seconds (24 h).</a:t>
+              <a:t>Path, Files, BufferedWriter (java.nio.file)</a:t>
             </a:r>
             <a:endParaRPr lang="en-US" sz="1500" dirty="0"/>
           </a:p>
           <a:p>
             <a:pPr algn="l" marL="342900" indent="-342900">
               <a:spcAft>
-                <a:spcPts val="500"/>
+                <a:spcPts val="400"/>
               </a:spcAft>
               <a:buSzPct val="100000"/>
               <a:buChar char="•"/>
@@ -18824,60 +18844,20 @@
                 <a:ea typeface="Calibri" pitchFamily="34" charset="-122"/>
                 <a:cs typeface="Calibri" pitchFamily="34" charset="-120"/>
               </a:rPr>
-              <a:t>The port falls back to 8080 when PORT is not set.</a:t>
+              <a:t>try-with-resources closes files for us</a:t>
             </a:r>
             <a:endParaRPr lang="en-US" sz="1500" dirty="0"/>
           </a:p>
-        </p:txBody>
-      </p:sp>
-      <p:sp>
-        <p:nvSpPr>
-          <p:cNvPr id="15" name="if asked"/>
-          <p:cNvSpPr/>
-          <p:nvPr/>
-        </p:nvSpPr>
-        <p:spPr>
-          <a:xfrm>
-            <a:off x="6190488" y="4846320"/>
-            <a:ext cx="5541264" cy="731520"/>
-          </a:xfrm>
-          <a:prstGeom prst="roundRect">
-            <a:avLst>
-              <a:gd name="adj" fmla="val 15000"/>
-            </a:avLst>
-          </a:prstGeom>
-          <a:solidFill>
-            <a:schemeClr val="bg2"/>
-          </a:solidFill>
-          <a:ln/>
-        </p:spPr>
-      </p:sp>
-      <p:sp>
-        <p:nvSpPr>
-          <p:cNvPr id="16" name="Text 13"/>
-          <p:cNvSpPr txBox="1"/>
-          <p:nvPr/>
-        </p:nvSpPr>
-        <p:spPr>
-          <a:xfrm>
-            <a:off x="6327648" y="4846320"/>
-            <a:ext cx="5303520" cy="731520"/>
-          </a:xfrm>
-          <a:prstGeom prst="rect">
-            <a:avLst/>
-          </a:prstGeom>
-          <a:noFill/>
-          <a:ln/>
-        </p:spPr>
-        <p:txBody>
-          <a:bodyPr wrap="square" lIns="0" tIns="0" rIns="0" bIns="0" rtlCol="0" anchor="ctr"/>
-          <a:lstStyle/>
-          <a:p>
-            <a:pPr algn="l" indent="0" marL="0">
-              <a:buNone/>
-            </a:pPr>
-            <a:r>
-              <a:rPr lang="en-US" sz="1400" i="1" dirty="0">
+          <a:p>
+            <a:pPr algn="l" marL="342900" indent="-342900">
+              <a:spcAft>
+                <a:spcPts val="400"/>
+              </a:spcAft>
+              <a:buSzPct val="100000"/>
+              <a:buChar char="•"/>
+            </a:pPr>
+            <a:r>
+              <a:rPr lang="en-US" sz="1500" dirty="0">
                 <a:solidFill>
                   <a:schemeClr val="tx1"/>
                 </a:solidFill>
@@ -18885,15 +18865,36 @@
                 <a:ea typeface="Calibri" pitchFamily="34" charset="-122"/>
                 <a:cs typeface="Calibri" pitchFamily="34" charset="-120"/>
               </a:rPr>
-              <a:t>If asked: we could export the ledger to CSV using try-with-resources and catch IOException. Not built yet.</a:t>
-            </a:r>
-            <a:endParaRPr lang="en-US" sz="1400" dirty="0"/>
-          </a:p>
-        </p:txBody>
-      </p:sp>
-      <p:sp>
-        <p:nvSpPr>
-          <p:cNvPr id="17" name="takeaway"/>
+              <a:t>IOException is caught and logged</a:t>
+            </a:r>
+            <a:endParaRPr lang="en-US" sz="1500" dirty="0"/>
+          </a:p>
+          <a:p>
+            <a:pPr algn="l" marL="342900" indent="-342900">
+              <a:spcAft>
+                <a:spcPts val="400"/>
+              </a:spcAft>
+              <a:buSzPct val="100000"/>
+              <a:buChar char="•"/>
+            </a:pPr>
+            <a:r>
+              <a:rPr lang="en-US" sz="1500" dirty="0">
+                <a:solidFill>
+                  <a:schemeClr val="tx1"/>
+                </a:solidFill>
+                <a:latin typeface="Calibri" pitchFamily="34" charset="0"/>
+                <a:ea typeface="Calibri" pitchFamily="34" charset="-122"/>
+                <a:cs typeface="Calibri" pitchFamily="34" charset="-120"/>
+              </a:rPr>
+              <a:t>Settings still come from application.properties</a:t>
+            </a:r>
+            <a:endParaRPr lang="en-US" sz="1500" dirty="0"/>
+          </a:p>
+        </p:txBody>
+      </p:sp>
+      <p:sp>
+        <p:nvSpPr>
+          <p:cNvPr id="15" name="takeaway"/>
           <p:cNvSpPr/>
           <p:nvPr/>
         </p:nvSpPr>
@@ -18915,7 +18916,7 @@
       </p:sp>
       <p:sp>
         <p:nvSpPr>
-          <p:cNvPr id="18" name="Text 15"/>
+          <p:cNvPr id="16" name="Text 13"/>
           <p:cNvSpPr txBox="1"/>
           <p:nvPr/>
         </p:nvSpPr>
@@ -18946,7 +18947,7 @@
                 <a:ea typeface="Calibri" pitchFamily="34" charset="-122"/>
                 <a:cs typeface="Calibri" pitchFamily="34" charset="-120"/>
               </a:rPr>
-              <a:t>Files hold settings and pages. The database holds the money.</a:t>
+              <a:t>The database holds the money. Files hold exports and the audit trail.</a:t>
             </a:r>
             <a:endParaRPr lang="en-US" sz="1600" dirty="0"/>
           </a:p>
@@ -23837,7 +23838,7 @@
                   <a:schemeClr val="tx2"/>
                 </a:solidFill>
               </a:rPr>
-              <a:t>JDBC: the bridge to the database</a:t>
+              <a:t>JDBC: talking to the database directly</a:t>
             </a:r>
             <a:endParaRPr lang="en-US" sz="3400" dirty="0"/>
           </a:p>
@@ -23845,22 +23846,22 @@
       </p:sp>
       <p:sp>
         <p:nvSpPr>
-          <p:cNvPr id="4" name="honest"/>
+          <p:cNvPr id="4" name="two ways"/>
           <p:cNvSpPr/>
           <p:nvPr/>
         </p:nvSpPr>
         <p:spPr>
           <a:xfrm>
             <a:off x="457200" y="1280160"/>
-            <a:ext cx="11274552" cy="685800"/>
+            <a:ext cx="11274552" cy="640080"/>
           </a:xfrm>
           <a:prstGeom prst="roundRect">
             <a:avLst>
-              <a:gd name="adj" fmla="val 16000"/>
+              <a:gd name="adj" fmla="val 17143"/>
             </a:avLst>
           </a:prstGeom>
           <a:solidFill>
-            <a:srgbClr val="FDF1DC"/>
+            <a:srgbClr val="E1F1E7"/>
           </a:solidFill>
           <a:ln/>
         </p:spPr>
@@ -23874,7 +23875,7 @@
         <p:spPr>
           <a:xfrm>
             <a:off x="640080" y="1280160"/>
-            <a:ext cx="10881360" cy="685800"/>
+            <a:ext cx="10881360" cy="640080"/>
           </a:xfrm>
           <a:prstGeom prst="rect">
             <a:avLst/>
@@ -23898,7 +23899,7 @@
                 <a:ea typeface="Calibri" pitchFamily="34" charset="-122"/>
                 <a:cs typeface="Calibri" pitchFamily="34" charset="-120"/>
               </a:rPr>
-              <a:t>We do not write JDBC code by hand. Spring Data JPA does it for us, and it uses JDBC underneath.</a:t>
+              <a:t>Two ways in: JPA writes the settlement. Our own JDBC class (LedgerJdbcDao) reads reports and exports.</a:t>
             </a:r>
             <a:endParaRPr lang="en-US" sz="1600" dirty="0"/>
           </a:p>
@@ -23906,22 +23907,22 @@
       </p:sp>
       <p:sp>
         <p:nvSpPr>
-          <p:cNvPr id="6" name="node Java code accountRepo.save()"/>
+          <p:cNvPr id="6" name="node DataSource (connection pool)"/>
           <p:cNvSpPr/>
           <p:nvPr/>
         </p:nvSpPr>
         <p:spPr>
           <a:xfrm>
-            <a:off x="457200" y="2240280"/>
-            <a:ext cx="2468880" cy="1097280"/>
+            <a:off x="457200" y="2103120"/>
+            <a:ext cx="1920240" cy="868680"/>
           </a:xfrm>
           <a:prstGeom prst="roundRect">
             <a:avLst>
-              <a:gd name="adj" fmla="val 8333"/>
+              <a:gd name="adj" fmla="val 10526"/>
             </a:avLst>
           </a:prstGeom>
           <a:solidFill>
-            <a:schemeClr val="accent1"/>
+            <a:schemeClr val="accent5"/>
           </a:solidFill>
           <a:ln/>
         </p:spPr>
@@ -23934,8 +23935,8 @@
         </p:nvSpPr>
         <p:spPr>
           <a:xfrm>
-            <a:off x="530352" y="2240280"/>
-            <a:ext cx="2322576" cy="1097280"/>
+            <a:off x="530352" y="2103120"/>
+            <a:ext cx="1773936" cy="868680"/>
           </a:xfrm>
           <a:prstGeom prst="rect">
             <a:avLst/>
@@ -23951,7 +23952,7 @@
               <a:buNone/>
             </a:pPr>
             <a:r>
-              <a:rPr lang="en-US" sz="1600" b="1" dirty="0">
+              <a:rPr lang="en-US" sz="1400" b="1" dirty="0">
                 <a:solidFill>
                   <a:schemeClr val="bg1"/>
                 </a:solidFill>
@@ -23959,16 +23960,16 @@
                 <a:ea typeface="Calibri" pitchFamily="34" charset="-122"/>
                 <a:cs typeface="Calibri" pitchFamily="34" charset="-120"/>
               </a:rPr>
-              <a:t>Java code</a:t>
-            </a:r>
-            <a:endParaRPr lang="en-US" sz="1600" dirty="0"/>
+              <a:t>DataSource</a:t>
+            </a:r>
+            <a:endParaRPr lang="en-US" sz="1400" dirty="0"/>
           </a:p>
           <a:p>
             <a:pPr algn="ctr" indent="0" marL="0">
               <a:buNone/>
             </a:pPr>
             <a:r>
-              <a:rPr lang="en-US" sz="1600" b="1" dirty="0">
+              <a:rPr lang="en-US" sz="1400" b="1" dirty="0">
                 <a:solidFill>
                   <a:schemeClr val="bg1"/>
                 </a:solidFill>
@@ -23976,9 +23977,9 @@
                 <a:ea typeface="Calibri" pitchFamily="34" charset="-122"/>
                 <a:cs typeface="Calibri" pitchFamily="34" charset="-120"/>
               </a:rPr>
-              <a:t>accountRepo.save()</a:t>
-            </a:r>
-            <a:endParaRPr lang="en-US" sz="1600" dirty="0"/>
+              <a:t>(connection pool)</a:t>
+            </a:r>
+            <a:endParaRPr lang="en-US" sz="1400" dirty="0"/>
           </a:p>
         </p:txBody>
       </p:sp>
@@ -23990,8 +23991,8 @@
         </p:nvSpPr>
         <p:spPr>
           <a:xfrm>
-            <a:off x="2971800" y="2788920"/>
-            <a:ext cx="320040" cy="0"/>
+            <a:off x="2404872" y="2468880"/>
+            <a:ext cx="310896" cy="0"/>
           </a:xfrm>
           <a:prstGeom prst="line">
             <a:avLst/>
@@ -24008,18 +24009,18 @@
       </p:sp>
       <p:sp>
         <p:nvSpPr>
-          <p:cNvPr id="9" name="node Spring Data JPA + Hibernate"/>
+          <p:cNvPr id="9" name="node Connection"/>
           <p:cNvSpPr/>
           <p:nvPr/>
         </p:nvSpPr>
         <p:spPr>
           <a:xfrm>
-            <a:off x="3337560" y="2240280"/>
-            <a:ext cx="2468880" cy="1097280"/>
+            <a:off x="2743200" y="2103120"/>
+            <a:ext cx="1920240" cy="868680"/>
           </a:xfrm>
           <a:prstGeom prst="roundRect">
             <a:avLst>
-              <a:gd name="adj" fmla="val 8333"/>
+              <a:gd name="adj" fmla="val 10526"/>
             </a:avLst>
           </a:prstGeom>
           <a:solidFill>
@@ -24036,8 +24037,8 @@
         </p:nvSpPr>
         <p:spPr>
           <a:xfrm>
-            <a:off x="3410712" y="2240280"/>
-            <a:ext cx="2322576" cy="1097280"/>
+            <a:off x="2816352" y="2103120"/>
+            <a:ext cx="1773936" cy="868680"/>
           </a:xfrm>
           <a:prstGeom prst="rect">
             <a:avLst/>
@@ -24053,7 +24054,7 @@
               <a:buNone/>
             </a:pPr>
             <a:r>
-              <a:rPr lang="en-US" sz="1600" b="1" dirty="0">
+              <a:rPr lang="en-US" sz="1400" b="1" dirty="0">
                 <a:solidFill>
                   <a:schemeClr val="bg1"/>
                 </a:solidFill>
@@ -24061,26 +24062,9 @@
                 <a:ea typeface="Calibri" pitchFamily="34" charset="-122"/>
                 <a:cs typeface="Calibri" pitchFamily="34" charset="-120"/>
               </a:rPr>
-              <a:t>Spring Data JPA</a:t>
-            </a:r>
-            <a:endParaRPr lang="en-US" sz="1600" dirty="0"/>
-          </a:p>
-          <a:p>
-            <a:pPr algn="ctr" indent="0" marL="0">
-              <a:buNone/>
-            </a:pPr>
-            <a:r>
-              <a:rPr lang="en-US" sz="1600" b="1" dirty="0">
-                <a:solidFill>
-                  <a:schemeClr val="bg1"/>
-                </a:solidFill>
-                <a:latin typeface="Calibri" pitchFamily="34" charset="0"/>
-                <a:ea typeface="Calibri" pitchFamily="34" charset="-122"/>
-                <a:cs typeface="Calibri" pitchFamily="34" charset="-120"/>
-              </a:rPr>
-              <a:t>+ Hibernate</a:t>
-            </a:r>
-            <a:endParaRPr lang="en-US" sz="1600" dirty="0"/>
+              <a:t>Connection</a:t>
+            </a:r>
+            <a:endParaRPr lang="en-US" sz="1400" dirty="0"/>
           </a:p>
         </p:txBody>
       </p:sp>
@@ -24092,8 +24076,8 @@
         </p:nvSpPr>
         <p:spPr>
           <a:xfrm>
-            <a:off x="5852160" y="2788920"/>
-            <a:ext cx="320040" cy="0"/>
+            <a:off x="4690872" y="2468880"/>
+            <a:ext cx="310896" cy="0"/>
           </a:xfrm>
           <a:prstGeom prst="line">
             <a:avLst/>
@@ -24110,22 +24094,22 @@
       </p:sp>
       <p:sp>
         <p:nvSpPr>
-          <p:cNvPr id="12" name="node JDBC (the bridge)"/>
+          <p:cNvPr id="12" name="node PreparedStatement with ? values"/>
           <p:cNvSpPr/>
           <p:nvPr/>
         </p:nvSpPr>
         <p:spPr>
           <a:xfrm>
-            <a:off x="6217920" y="2240280"/>
-            <a:ext cx="2468880" cy="1097280"/>
+            <a:off x="5029200" y="2103120"/>
+            <a:ext cx="1920240" cy="868680"/>
           </a:xfrm>
           <a:prstGeom prst="roundRect">
             <a:avLst>
-              <a:gd name="adj" fmla="val 8333"/>
+              <a:gd name="adj" fmla="val 10526"/>
             </a:avLst>
           </a:prstGeom>
           <a:solidFill>
-            <a:schemeClr val="accent2"/>
+            <a:schemeClr val="accent1"/>
           </a:solidFill>
           <a:ln/>
         </p:spPr>
@@ -24138,8 +24122,8 @@
         </p:nvSpPr>
         <p:spPr>
           <a:xfrm>
-            <a:off x="6291072" y="2240280"/>
-            <a:ext cx="2322576" cy="1097280"/>
+            <a:off x="5102352" y="2103120"/>
+            <a:ext cx="1773936" cy="868680"/>
           </a:xfrm>
           <a:prstGeom prst="rect">
             <a:avLst/>
@@ -24155,34 +24139,34 @@
               <a:buNone/>
             </a:pPr>
             <a:r>
-              <a:rPr lang="en-US" sz="1600" b="1" dirty="0">
-                <a:solidFill>
-                  <a:schemeClr val="tx1"/>
-                </a:solidFill>
-                <a:latin typeface="Calibri" pitchFamily="34" charset="0"/>
-                <a:ea typeface="Calibri" pitchFamily="34" charset="-122"/>
-                <a:cs typeface="Calibri" pitchFamily="34" charset="-120"/>
-              </a:rPr>
-              <a:t>JDBC</a:t>
-            </a:r>
-            <a:endParaRPr lang="en-US" sz="1600" dirty="0"/>
+              <a:rPr lang="en-US" sz="1400" b="1" dirty="0">
+                <a:solidFill>
+                  <a:schemeClr val="bg1"/>
+                </a:solidFill>
+                <a:latin typeface="Calibri" pitchFamily="34" charset="0"/>
+                <a:ea typeface="Calibri" pitchFamily="34" charset="-122"/>
+                <a:cs typeface="Calibri" pitchFamily="34" charset="-120"/>
+              </a:rPr>
+              <a:t>PreparedStatement</a:t>
+            </a:r>
+            <a:endParaRPr lang="en-US" sz="1400" dirty="0"/>
           </a:p>
           <a:p>
             <a:pPr algn="ctr" indent="0" marL="0">
               <a:buNone/>
             </a:pPr>
             <a:r>
-              <a:rPr lang="en-US" sz="1600" b="1" dirty="0">
-                <a:solidFill>
-                  <a:schemeClr val="tx1"/>
-                </a:solidFill>
-                <a:latin typeface="Calibri" pitchFamily="34" charset="0"/>
-                <a:ea typeface="Calibri" pitchFamily="34" charset="-122"/>
-                <a:cs typeface="Calibri" pitchFamily="34" charset="-120"/>
-              </a:rPr>
-              <a:t>(the bridge)</a:t>
-            </a:r>
-            <a:endParaRPr lang="en-US" sz="1600" dirty="0"/>
+              <a:rPr lang="en-US" sz="1400" b="1" dirty="0">
+                <a:solidFill>
+                  <a:schemeClr val="bg1"/>
+                </a:solidFill>
+                <a:latin typeface="Calibri" pitchFamily="34" charset="0"/>
+                <a:ea typeface="Calibri" pitchFamily="34" charset="-122"/>
+                <a:cs typeface="Calibri" pitchFamily="34" charset="-120"/>
+              </a:rPr>
+              <a:t>with ? values</a:t>
+            </a:r>
+            <a:endParaRPr lang="en-US" sz="1400" dirty="0"/>
           </a:p>
         </p:txBody>
       </p:sp>
@@ -24194,8 +24178,8 @@
         </p:nvSpPr>
         <p:spPr>
           <a:xfrm>
-            <a:off x="8732520" y="2788920"/>
-            <a:ext cx="320040" cy="0"/>
+            <a:off x="6976872" y="2468880"/>
+            <a:ext cx="310896" cy="0"/>
           </a:xfrm>
           <a:prstGeom prst="line">
             <a:avLst/>
@@ -24212,18 +24196,120 @@
       </p:sp>
       <p:sp>
         <p:nvSpPr>
-          <p:cNvPr id="15" name="node H2 database"/>
+          <p:cNvPr id="15" name="node ResultSet rs.next()"/>
           <p:cNvSpPr/>
           <p:nvPr/>
         </p:nvSpPr>
         <p:spPr>
           <a:xfrm>
-            <a:off x="9098280" y="2240280"/>
-            <a:ext cx="2468880" cy="1097280"/>
+            <a:off x="7315200" y="2103120"/>
+            <a:ext cx="1920240" cy="868680"/>
           </a:xfrm>
           <a:prstGeom prst="roundRect">
             <a:avLst>
-              <a:gd name="adj" fmla="val 8333"/>
+              <a:gd name="adj" fmla="val 10526"/>
+            </a:avLst>
+          </a:prstGeom>
+          <a:solidFill>
+            <a:schemeClr val="accent2"/>
+          </a:solidFill>
+          <a:ln/>
+        </p:spPr>
+      </p:sp>
+      <p:sp>
+        <p:nvSpPr>
+          <p:cNvPr id="16" name="Text 13"/>
+          <p:cNvSpPr txBox="1"/>
+          <p:nvPr/>
+        </p:nvSpPr>
+        <p:spPr>
+          <a:xfrm>
+            <a:off x="7388352" y="2103120"/>
+            <a:ext cx="1773936" cy="868680"/>
+          </a:xfrm>
+          <a:prstGeom prst="rect">
+            <a:avLst/>
+          </a:prstGeom>
+          <a:noFill/>
+          <a:ln/>
+        </p:spPr>
+        <p:txBody>
+          <a:bodyPr wrap="square" lIns="0" tIns="0" rIns="0" bIns="0" rtlCol="0" anchor="ctr"/>
+          <a:lstStyle/>
+          <a:p>
+            <a:pPr algn="ctr" indent="0" marL="0">
+              <a:buNone/>
+            </a:pPr>
+            <a:r>
+              <a:rPr lang="en-US" sz="1400" b="1" dirty="0">
+                <a:solidFill>
+                  <a:schemeClr val="tx1"/>
+                </a:solidFill>
+                <a:latin typeface="Calibri" pitchFamily="34" charset="0"/>
+                <a:ea typeface="Calibri" pitchFamily="34" charset="-122"/>
+                <a:cs typeface="Calibri" pitchFamily="34" charset="-120"/>
+              </a:rPr>
+              <a:t>ResultSet</a:t>
+            </a:r>
+            <a:endParaRPr lang="en-US" sz="1400" dirty="0"/>
+          </a:p>
+          <a:p>
+            <a:pPr algn="ctr" indent="0" marL="0">
+              <a:buNone/>
+            </a:pPr>
+            <a:r>
+              <a:rPr lang="en-US" sz="1400" b="1" dirty="0">
+                <a:solidFill>
+                  <a:schemeClr val="tx1"/>
+                </a:solidFill>
+                <a:latin typeface="Calibri" pitchFamily="34" charset="0"/>
+                <a:ea typeface="Calibri" pitchFamily="34" charset="-122"/>
+                <a:cs typeface="Calibri" pitchFamily="34" charset="-120"/>
+              </a:rPr>
+              <a:t>rs.next()</a:t>
+            </a:r>
+            <a:endParaRPr lang="en-US" sz="1400" dirty="0"/>
+          </a:p>
+        </p:txBody>
+      </p:sp>
+      <p:sp>
+        <p:nvSpPr>
+          <p:cNvPr id="17" name="arrow"/>
+          <p:cNvSpPr/>
+          <p:nvPr/>
+        </p:nvSpPr>
+        <p:spPr>
+          <a:xfrm>
+            <a:off x="9262872" y="2468880"/>
+            <a:ext cx="310896" cy="0"/>
+          </a:xfrm>
+          <a:prstGeom prst="line">
+            <a:avLst/>
+          </a:prstGeom>
+          <a:noFill/>
+          <a:ln w="28575">
+            <a:solidFill>
+              <a:schemeClr val="accent5"/>
+            </a:solidFill>
+            <a:prstDash val="solid"/>
+            <a:tailEnd type="triangle"/>
+          </a:ln>
+        </p:spPr>
+      </p:sp>
+      <p:sp>
+        <p:nvSpPr>
+          <p:cNvPr id="18" name="node Close (try-with-resources)"/>
+          <p:cNvSpPr/>
+          <p:nvPr/>
+        </p:nvSpPr>
+        <p:spPr>
+          <a:xfrm>
+            <a:off x="9601200" y="2103120"/>
+            <a:ext cx="1920240" cy="868680"/>
+          </a:xfrm>
+          <a:prstGeom prst="roundRect">
+            <a:avLst>
+              <a:gd name="adj" fmla="val 10526"/>
             </a:avLst>
           </a:prstGeom>
           <a:solidFill>
@@ -24234,14 +24320,2066 @@
       </p:sp>
       <p:sp>
         <p:nvSpPr>
+          <p:cNvPr id="19" name="Text 16"/>
+          <p:cNvSpPr txBox="1"/>
+          <p:nvPr/>
+        </p:nvSpPr>
+        <p:spPr>
+          <a:xfrm>
+            <a:off x="9674352" y="2103120"/>
+            <a:ext cx="1773936" cy="868680"/>
+          </a:xfrm>
+          <a:prstGeom prst="rect">
+            <a:avLst/>
+          </a:prstGeom>
+          <a:noFill/>
+          <a:ln/>
+        </p:spPr>
+        <p:txBody>
+          <a:bodyPr wrap="square" lIns="0" tIns="0" rIns="0" bIns="0" rtlCol="0" anchor="ctr"/>
+          <a:lstStyle/>
+          <a:p>
+            <a:pPr algn="ctr" indent="0" marL="0">
+              <a:buNone/>
+            </a:pPr>
+            <a:r>
+              <a:rPr lang="en-US" sz="1400" b="1" dirty="0">
+                <a:solidFill>
+                  <a:schemeClr val="bg1"/>
+                </a:solidFill>
+                <a:latin typeface="Calibri" pitchFamily="34" charset="0"/>
+                <a:ea typeface="Calibri" pitchFamily="34" charset="-122"/>
+                <a:cs typeface="Calibri" pitchFamily="34" charset="-120"/>
+              </a:rPr>
+              <a:t>Close</a:t>
+            </a:r>
+            <a:endParaRPr lang="en-US" sz="1400" dirty="0"/>
+          </a:p>
+          <a:p>
+            <a:pPr algn="ctr" indent="0" marL="0">
+              <a:buNone/>
+            </a:pPr>
+            <a:r>
+              <a:rPr lang="en-US" sz="1400" b="1" dirty="0">
+                <a:solidFill>
+                  <a:schemeClr val="bg1"/>
+                </a:solidFill>
+                <a:latin typeface="Calibri" pitchFamily="34" charset="0"/>
+                <a:ea typeface="Calibri" pitchFamily="34" charset="-122"/>
+                <a:cs typeface="Calibri" pitchFamily="34" charset="-120"/>
+              </a:rPr>
+              <a:t>(try-with-resources)</a:t>
+            </a:r>
+            <a:endParaRPr lang="en-US" sz="1400" dirty="0"/>
+          </a:p>
+        </p:txBody>
+      </p:sp>
+      <p:sp>
+        <p:nvSpPr>
+          <p:cNvPr id="20" name="code block"/>
+          <p:cNvSpPr/>
+          <p:nvPr/>
+        </p:nvSpPr>
+        <p:spPr>
+          <a:xfrm>
+            <a:off x="457200" y="3200400"/>
+            <a:ext cx="5541264" cy="1965960"/>
+          </a:xfrm>
+          <a:prstGeom prst="roundRect">
+            <a:avLst>
+              <a:gd name="adj" fmla="val 4651"/>
+            </a:avLst>
+          </a:prstGeom>
+          <a:solidFill>
+            <a:schemeClr val="tx1"/>
+          </a:solidFill>
+          <a:ln/>
+        </p:spPr>
+      </p:sp>
+      <p:sp>
+        <p:nvSpPr>
+          <p:cNvPr id="21" name="Text 18"/>
+          <p:cNvSpPr txBox="1"/>
+          <p:nvPr/>
+        </p:nvSpPr>
+        <p:spPr>
+          <a:xfrm>
+            <a:off x="640080" y="3337560"/>
+            <a:ext cx="5175504" cy="1691640"/>
+          </a:xfrm>
+          <a:prstGeom prst="rect">
+            <a:avLst/>
+          </a:prstGeom>
+          <a:noFill/>
+          <a:ln/>
+        </p:spPr>
+        <p:txBody>
+          <a:bodyPr wrap="square" lIns="0" tIns="0" rIns="0" bIns="0" rtlCol="0" anchor="ctr"/>
+          <a:lstStyle/>
+          <a:p>
+            <a:pPr algn="l" indent="0" marL="0">
+              <a:buNone/>
+            </a:pPr>
+            <a:r>
+              <a:rPr lang="en-US" sz="1250" dirty="0">
+                <a:solidFill>
+                  <a:schemeClr val="bg1"/>
+                </a:solidFill>
+                <a:latin typeface="Courier New" pitchFamily="34" charset="0"/>
+                <a:ea typeface="Courier New" pitchFamily="34" charset="-122"/>
+                <a:cs typeface="Courier New" pitchFamily="34" charset="-120"/>
+              </a:rPr>
+              <a:t>try (Connection con = dataSource.getConnection();</a:t>
+            </a:r>
+            <a:endParaRPr lang="en-US" sz="1250" dirty="0"/>
+          </a:p>
+          <a:p>
+            <a:pPr algn="l" indent="0" marL="0">
+              <a:buNone/>
+            </a:pPr>
+            <a:r>
+              <a:rPr lang="en-US" sz="1250" dirty="0">
+                <a:solidFill>
+                  <a:schemeClr val="bg1"/>
+                </a:solidFill>
+                <a:latin typeface="Courier New" pitchFamily="34" charset="0"/>
+                <a:ea typeface="Courier New" pitchFamily="34" charset="-122"/>
+                <a:cs typeface="Courier New" pitchFamily="34" charset="-120"/>
+              </a:rPr>
+              <a:t>     PreparedStatement ps =</a:t>
+            </a:r>
+            <a:endParaRPr lang="en-US" sz="1250" dirty="0"/>
+          </a:p>
+          <a:p>
+            <a:pPr algn="l" indent="0" marL="0">
+              <a:buNone/>
+            </a:pPr>
+            <a:r>
+              <a:rPr lang="en-US" sz="1250" dirty="0">
+                <a:solidFill>
+                  <a:schemeClr val="bg1"/>
+                </a:solidFill>
+                <a:latin typeface="Courier New" pitchFamily="34" charset="0"/>
+                <a:ea typeface="Courier New" pitchFamily="34" charset="-122"/>
+                <a:cs typeface="Courier New" pitchFamily="34" charset="-120"/>
+              </a:rPr>
+              <a:t>         con.prepareStatement(SQL_BY_SENDER)) {</a:t>
+            </a:r>
+            <a:endParaRPr lang="en-US" sz="1250" dirty="0"/>
+          </a:p>
+          <a:p>
+            <a:pPr algn="l" indent="0" marL="0">
+              <a:buNone/>
+            </a:pPr>
+            <a:r>
+              <a:rPr lang="en-US" sz="1250" dirty="0">
+                <a:solidFill>
+                  <a:schemeClr val="bg1"/>
+                </a:solidFill>
+                <a:latin typeface="Courier New" pitchFamily="34" charset="0"/>
+                <a:ea typeface="Courier New" pitchFamily="34" charset="-122"/>
+                <a:cs typeface="Courier New" pitchFamily="34" charset="-120"/>
+              </a:rPr>
+              <a:t>   ps.setString(1, senderVpa);</a:t>
+            </a:r>
+            <a:endParaRPr lang="en-US" sz="1250" dirty="0"/>
+          </a:p>
+          <a:p>
+            <a:pPr algn="l" indent="0" marL="0">
+              <a:buNone/>
+            </a:pPr>
+            <a:r>
+              <a:rPr lang="en-US" sz="1250" dirty="0">
+                <a:solidFill>
+                  <a:schemeClr val="bg1"/>
+                </a:solidFill>
+                <a:latin typeface="Courier New" pitchFamily="34" charset="0"/>
+                <a:ea typeface="Courier New" pitchFamily="34" charset="-122"/>
+                <a:cs typeface="Courier New" pitchFamily="34" charset="-120"/>
+              </a:rPr>
+              <a:t>   ps.setInt(2, limit);</a:t>
+            </a:r>
+            <a:endParaRPr lang="en-US" sz="1250" dirty="0"/>
+          </a:p>
+          <a:p>
+            <a:pPr algn="l" indent="0" marL="0">
+              <a:buNone/>
+            </a:pPr>
+            <a:r>
+              <a:rPr lang="en-US" sz="1250" dirty="0">
+                <a:solidFill>
+                  <a:schemeClr val="bg1"/>
+                </a:solidFill>
+                <a:latin typeface="Courier New" pitchFamily="34" charset="0"/>
+                <a:ea typeface="Courier New" pitchFamily="34" charset="-122"/>
+                <a:cs typeface="Courier New" pitchFamily="34" charset="-120"/>
+              </a:rPr>
+              <a:t>   try (ResultSet rs = ps.executeQuery()) { ... }</a:t>
+            </a:r>
+            <a:endParaRPr lang="en-US" sz="1250" dirty="0"/>
+          </a:p>
+          <a:p>
+            <a:pPr algn="l" indent="0" marL="0">
+              <a:buNone/>
+            </a:pPr>
+            <a:r>
+              <a:rPr lang="en-US" sz="1250" dirty="0">
+                <a:solidFill>
+                  <a:schemeClr val="bg1"/>
+                </a:solidFill>
+                <a:latin typeface="Courier New" pitchFamily="34" charset="0"/>
+                <a:ea typeface="Courier New" pitchFamily="34" charset="-122"/>
+                <a:cs typeface="Courier New" pitchFamily="34" charset="-120"/>
+              </a:rPr>
+              <a:t>}</a:t>
+            </a:r>
+            <a:endParaRPr lang="en-US" sz="1250" dirty="0"/>
+          </a:p>
+        </p:txBody>
+      </p:sp>
+      <p:sp>
+        <p:nvSpPr>
+          <p:cNvPr id="22" name="Text 19"/>
+          <p:cNvSpPr txBox="1"/>
+          <p:nvPr/>
+        </p:nvSpPr>
+        <p:spPr>
+          <a:xfrm>
+            <a:off x="6190488" y="3154680"/>
+            <a:ext cx="5486400" cy="365760"/>
+          </a:xfrm>
+          <a:prstGeom prst="rect">
+            <a:avLst/>
+          </a:prstGeom>
+          <a:noFill/>
+          <a:ln/>
+        </p:spPr>
+        <p:txBody>
+          <a:bodyPr wrap="square" lIns="0" tIns="0" rIns="0" bIns="0" rtlCol="0" anchor="t"/>
+          <a:lstStyle/>
+          <a:p>
+            <a:pPr algn="l" indent="0" marL="0">
+              <a:buNone/>
+            </a:pPr>
+            <a:r>
+              <a:rPr lang="en-US" sz="1800" b="1" dirty="0">
+                <a:solidFill>
+                  <a:schemeClr val="tx2"/>
+                </a:solidFill>
+                <a:latin typeface="Calibri" pitchFamily="34" charset="0"/>
+                <a:ea typeface="Calibri" pitchFamily="34" charset="-122"/>
+                <a:cs typeface="Calibri" pitchFamily="34" charset="-120"/>
+              </a:rPr>
+              <a:t>What LedgerJdbcDao offers</a:t>
+            </a:r>
+            <a:endParaRPr lang="en-US" sz="1800" dirty="0"/>
+          </a:p>
+        </p:txBody>
+      </p:sp>
+      <p:sp>
+        <p:nvSpPr>
+          <p:cNvPr id="23" name="Text 20"/>
+          <p:cNvSpPr txBox="1"/>
+          <p:nvPr/>
+        </p:nvSpPr>
+        <p:spPr>
+          <a:xfrm>
+            <a:off x="6190488" y="3566160"/>
+            <a:ext cx="5541264" cy="1600200"/>
+          </a:xfrm>
+          <a:prstGeom prst="rect">
+            <a:avLst/>
+          </a:prstGeom>
+          <a:noFill/>
+          <a:ln/>
+        </p:spPr>
+        <p:txBody>
+          <a:bodyPr wrap="square" lIns="0" tIns="0" rIns="0" bIns="0" rtlCol="0" anchor="t"/>
+          <a:lstStyle/>
+          <a:p>
+            <a:pPr algn="l" indent="0" marL="0">
+              <a:spcAft>
+                <a:spcPts val="400"/>
+              </a:spcAft>
+              <a:buNone/>
+            </a:pPr>
+            <a:r>
+              <a:rPr lang="en-US" sz="1450" b="1" dirty="0">
+                <a:solidFill>
+                  <a:schemeClr val="accent4"/>
+                </a:solidFill>
+                <a:latin typeface="Courier New" pitchFamily="34" charset="0"/>
+                <a:ea typeface="Courier New" pitchFamily="34" charset="-122"/>
+                <a:cs typeface="Courier New" pitchFamily="34" charset="-120"/>
+              </a:rPr>
+              <a:t>summary()</a:t>
+            </a:r>
+            <a:pPr algn="l" indent="0" marL="0">
+              <a:spcAft>
+                <a:spcPts val="400"/>
+              </a:spcAft>
+              <a:buNone/>
+            </a:pPr>
+            <a:r>
+              <a:rPr lang="en-US" sz="1450" dirty="0">
+                <a:solidFill>
+                  <a:schemeClr val="tx1"/>
+                </a:solidFill>
+                <a:latin typeface="Calibri" pitchFamily="34" charset="0"/>
+                <a:ea typeface="Calibri" pitchFamily="34" charset="-122"/>
+                <a:cs typeface="Calibri" pitchFamily="34" charset="-120"/>
+              </a:rPr>
+              <a:t>  totals with GROUP BY</a:t>
+            </a:r>
+            <a:endParaRPr lang="en-US" sz="1450" dirty="0"/>
+          </a:p>
+          <a:p>
+            <a:pPr algn="l" indent="0" marL="0">
+              <a:spcAft>
+                <a:spcPts val="400"/>
+              </a:spcAft>
+              <a:buNone/>
+            </a:pPr>
+            <a:r>
+              <a:rPr lang="en-US" sz="1450" b="1" dirty="0">
+                <a:solidFill>
+                  <a:schemeClr val="accent4"/>
+                </a:solidFill>
+                <a:latin typeface="Courier New" pitchFamily="34" charset="0"/>
+                <a:ea typeface="Courier New" pitchFamily="34" charset="-122"/>
+                <a:cs typeface="Courier New" pitchFamily="34" charset="-120"/>
+              </a:rPr>
+              <a:t>findBySender()</a:t>
+            </a:r>
+            <a:pPr algn="l" indent="0" marL="0">
+              <a:spcAft>
+                <a:spcPts val="400"/>
+              </a:spcAft>
+              <a:buNone/>
+            </a:pPr>
+            <a:r>
+              <a:rPr lang="en-US" sz="1450" dirty="0">
+                <a:solidFill>
+                  <a:schemeClr val="tx1"/>
+                </a:solidFill>
+                <a:latin typeface="Calibri" pitchFamily="34" charset="0"/>
+                <a:ea typeface="Calibri" pitchFamily="34" charset="-122"/>
+                <a:cs typeface="Calibri" pitchFamily="34" charset="-120"/>
+              </a:rPr>
+              <a:t>  rows for one VPA</a:t>
+            </a:r>
+            <a:endParaRPr lang="en-US" sz="1450" dirty="0"/>
+          </a:p>
+          <a:p>
+            <a:pPr algn="l" indent="0" marL="0">
+              <a:spcAft>
+                <a:spcPts val="400"/>
+              </a:spcAft>
+              <a:buNone/>
+            </a:pPr>
+            <a:r>
+              <a:rPr lang="en-US" sz="1450" b="1" dirty="0">
+                <a:solidFill>
+                  <a:schemeClr val="accent4"/>
+                </a:solidFill>
+                <a:latin typeface="Courier New" pitchFamily="34" charset="0"/>
+                <a:ea typeface="Courier New" pitchFamily="34" charset="-122"/>
+                <a:cs typeface="Courier New" pitchFamily="34" charset="-120"/>
+              </a:rPr>
+              <a:t>forEachTransaction()</a:t>
+            </a:r>
+            <a:pPr algn="l" indent="0" marL="0">
+              <a:spcAft>
+                <a:spcPts val="400"/>
+              </a:spcAft>
+              <a:buNone/>
+            </a:pPr>
+            <a:r>
+              <a:rPr lang="en-US" sz="1450" dirty="0">
+                <a:solidFill>
+                  <a:schemeClr val="tx1"/>
+                </a:solidFill>
+                <a:latin typeface="Calibri" pitchFamily="34" charset="0"/>
+                <a:ea typeface="Calibri" pitchFamily="34" charset="-122"/>
+                <a:cs typeface="Calibri" pitchFamily="34" charset="-120"/>
+              </a:rPr>
+              <a:t>  streams every row</a:t>
+            </a:r>
+            <a:endParaRPr lang="en-US" sz="1450" dirty="0"/>
+          </a:p>
+          <a:p>
+            <a:pPr algn="l" indent="0" marL="0">
+              <a:spcAft>
+                <a:spcPts val="400"/>
+              </a:spcAft>
+              <a:buNone/>
+            </a:pPr>
+            <a:r>
+              <a:rPr lang="en-US" sz="1450" b="1" dirty="0">
+                <a:solidFill>
+                  <a:schemeClr val="accent4"/>
+                </a:solidFill>
+                <a:latin typeface="Courier New" pitchFamily="34" charset="0"/>
+                <a:ea typeface="Courier New" pitchFamily="34" charset="-122"/>
+                <a:cs typeface="Courier New" pitchFamily="34" charset="-120"/>
+              </a:rPr>
+              <a:t>databaseInfo()</a:t>
+            </a:r>
+            <a:pPr algn="l" indent="0" marL="0">
+              <a:spcAft>
+                <a:spcPts val="400"/>
+              </a:spcAft>
+              <a:buNone/>
+            </a:pPr>
+            <a:r>
+              <a:rPr lang="en-US" sz="1450" dirty="0">
+                <a:solidFill>
+                  <a:schemeClr val="tx1"/>
+                </a:solidFill>
+                <a:latin typeface="Calibri" pitchFamily="34" charset="0"/>
+                <a:ea typeface="Calibri" pitchFamily="34" charset="-122"/>
+                <a:cs typeface="Calibri" pitchFamily="34" charset="-120"/>
+              </a:rPr>
+              <a:t>  which database is this?</a:t>
+            </a:r>
+            <a:endParaRPr lang="en-US" sz="1450" dirty="0"/>
+          </a:p>
+        </p:txBody>
+      </p:sp>
+      <p:sp>
+        <p:nvSpPr>
+          <p:cNvPr id="24" name="jdbc rules"/>
+          <p:cNvSpPr/>
+          <p:nvPr/>
+        </p:nvSpPr>
+        <p:spPr>
+          <a:xfrm>
+            <a:off x="457200" y="5349240"/>
+            <a:ext cx="11274552" cy="777240"/>
+          </a:xfrm>
+          <a:prstGeom prst="roundRect">
+            <a:avLst>
+              <a:gd name="adj" fmla="val 14118"/>
+            </a:avLst>
+          </a:prstGeom>
+          <a:solidFill>
+            <a:srgbClr val="FDF1DC"/>
+          </a:solidFill>
+          <a:ln/>
+        </p:spPr>
+      </p:sp>
+      <p:sp>
+        <p:nvSpPr>
+          <p:cNvPr id="25" name="Text 22"/>
+          <p:cNvSpPr txBox="1"/>
+          <p:nvPr/>
+        </p:nvSpPr>
+        <p:spPr>
+          <a:xfrm>
+            <a:off x="640080" y="5349240"/>
+            <a:ext cx="10881360" cy="777240"/>
+          </a:xfrm>
+          <a:prstGeom prst="rect">
+            <a:avLst/>
+          </a:prstGeom>
+          <a:noFill/>
+          <a:ln/>
+        </p:spPr>
+        <p:txBody>
+          <a:bodyPr wrap="square" lIns="0" tIns="0" rIns="0" bIns="0" rtlCol="0" anchor="ctr"/>
+          <a:lstStyle/>
+          <a:p>
+            <a:pPr algn="l" indent="0" marL="0">
+              <a:buNone/>
+            </a:pPr>
+            <a:r>
+              <a:rPr lang="en-US" sz="1450" dirty="0">
+                <a:solidFill>
+                  <a:schemeClr val="tx2"/>
+                </a:solidFill>
+                <a:latin typeface="Calibri" pitchFamily="34" charset="0"/>
+                <a:ea typeface="Calibri" pitchFamily="34" charset="-122"/>
+                <a:cs typeface="Calibri" pitchFamily="34" charset="-120"/>
+              </a:rPr>
+              <a:t>Safety: ? values stop SQL injection. SQLException is wrapped in DataAccessLayerException. The same class works on H2 and MySQL because it reads the tables JPA created.</a:t>
+            </a:r>
+            <a:endParaRPr lang="en-US" sz="1450" dirty="0"/>
+          </a:p>
+        </p:txBody>
+      </p:sp>
+      <p:sp>
+        <p:nvSpPr>
+          <p:cNvPr id="25" name="Slide Number Placeholder 0"/>
+          <p:cNvSpPr>
+            <a:spLocks noGrp="1"/>
+          </p:cNvSpPr>
+          <p:nvPr>
+            <p:ph type="sldNum" sz="quarter" idx="4294967295"/>
+          </p:nvPr>
+        </p:nvSpPr>
+        <p:spPr>
+          <a:xfrm>
+            <a:off x="11247120" y="6428232"/>
+            <a:ext cx="502920" cy="274320"/>
+          </a:xfrm>
+          <a:prstGeom prst="rect">
+            <a:avLst/>
+          </a:prstGeom>
+          <a:extLst>
+            <a:ext uri="{C572A759-6A51-4108-AA02-DFA0A04FC94B}">
+              <ma14:wrappingTextBoxFlag xmlns:ma14="http://schemas.microsoft.com/office/mac/drawingml/2011/main" val="0"/>
+            </a:ext>
+          </a:extLst>
+        </p:spPr>
+        <p:txBody>
+          <a:bodyPr/>
+          <a:lstStyle>
+            <a:lvl1pPr>
+              <a:defRPr sz="1000">
+                <a:solidFill>
+                  <a:schemeClr val="accent5"/>
+                </a:solidFill>
+                <a:latin typeface="Calibri"/>
+                <a:ea typeface="Calibri"/>
+                <a:cs typeface="Calibri"/>
+              </a:defRPr>
+            </a:lvl1pPr>
+          </a:lstStyle>
+          <a:p>
+            <a:pPr algn="r"/>
+            <a:fld id="{F7021451-1387-4CA6-816F-3879F97B5CBC}" type="slidenum">
+              <a:rPr b="0" lang="en-US"/>
+              <a:t>24</a:t>
+            </a:fld>
+            <a:endParaRPr lang="en-US"/>
+          </a:p>
+        </p:txBody>
+      </p:sp>
+    </p:spTree>
+  </p:cSld>
+  <p:clrMapOvr>
+    <a:masterClrMapping/>
+  </p:clrMapOvr>
+</p:sld>
+</file>
+
+<file path=ppt/slides/slide25.xml><?xml version="1.0" encoding="utf-8"?>
+<p:sld xmlns:a="http://schemas.openxmlformats.org/drawingml/2006/main" xmlns:r="http://schemas.openxmlformats.org/officeDocument/2006/relationships" xmlns:p="http://schemas.openxmlformats.org/presentationml/2006/main">
+  <p:cSld name="Slide 25">
+    <p:spTree>
+      <p:nvGrpSpPr>
+        <p:cNvPr id="1" name=""/>
+        <p:cNvGrpSpPr/>
+        <p:nvPr/>
+      </p:nvGrpSpPr>
+      <p:grpSpPr>
+        <a:xfrm>
+          <a:off x="0" y="0"/>
+          <a:ext cx="0" cy="0"/>
+          <a:chOff x="0" y="0"/>
+          <a:chExt cx="0" cy="0"/>
+        </a:xfrm>
+      </p:grpSpPr>
+      <p:sp>
+        <p:nvSpPr>
+          <p:cNvPr id="2" name="Text 1"/>
+          <p:cNvSpPr/>
+          <p:nvPr>
+            <p:ph idx="101" type="title" hasCustomPrompt="1"/>
+          </p:nvPr>
+        </p:nvSpPr>
+        <p:spPr>
+          <a:xfrm>
+            <a:off x="457200" y="274320"/>
+            <a:ext cx="11247120" cy="777240"/>
+          </a:xfrm>
+          <a:prstGeom prst="rect">
+            <a:avLst/>
+          </a:prstGeom>
+          <a:noFill/>
+          <a:ln/>
+        </p:spPr>
+        <p:txBody>
+          <a:bodyPr wrap="square" lIns="0" tIns="0" rIns="0" bIns="0" rtlCol="0" anchor="ctr"/>
+          <a:lstStyle/>
+          <a:p>
+            <a:pPr algn="l" indent="0" marL="0">
+              <a:buNone/>
+            </a:pPr>
+            <a:r>
+              <a:rPr lang="en-US" sz="3400" b="1" dirty="0">
+                <a:solidFill>
+                  <a:schemeClr val="tx2"/>
+                </a:solidFill>
+              </a:rPr>
+              <a:t>Database integration: H2 or MySQL</a:t>
+            </a:r>
+            <a:endParaRPr lang="en-US" sz="3400" dirty="0"/>
+          </a:p>
+        </p:txBody>
+      </p:sp>
+      <p:sp>
+        <p:nvSpPr>
+          <p:cNvPr id="4" name="two databases"/>
+          <p:cNvSpPr/>
+          <p:nvPr/>
+        </p:nvSpPr>
+        <p:spPr>
+          <a:xfrm>
+            <a:off x="457200" y="1280160"/>
+            <a:ext cx="11274552" cy="685800"/>
+          </a:xfrm>
+          <a:prstGeom prst="roundRect">
+            <a:avLst>
+              <a:gd name="adj" fmla="val 16000"/>
+            </a:avLst>
+          </a:prstGeom>
+          <a:solidFill>
+            <a:srgbClr val="E1F1E7"/>
+          </a:solidFill>
+          <a:ln/>
+        </p:spPr>
+      </p:sp>
+      <p:sp>
+        <p:nvSpPr>
+          <p:cNvPr id="5" name="Text 2"/>
+          <p:cNvSpPr txBox="1"/>
+          <p:nvPr/>
+        </p:nvSpPr>
+        <p:spPr>
+          <a:xfrm>
+            <a:off x="640080" y="1280160"/>
+            <a:ext cx="10881360" cy="685800"/>
+          </a:xfrm>
+          <a:prstGeom prst="rect">
+            <a:avLst/>
+          </a:prstGeom>
+          <a:noFill/>
+          <a:ln/>
+        </p:spPr>
+        <p:txBody>
+          <a:bodyPr wrap="square" lIns="0" tIns="0" rIns="0" bIns="0" rtlCol="0" anchor="ctr"/>
+          <a:lstStyle/>
+          <a:p>
+            <a:pPr algn="l" indent="0" marL="0">
+              <a:buNone/>
+            </a:pPr>
+            <a:r>
+              <a:rPr lang="en-US" sz="1600" b="1" dirty="0">
+                <a:solidFill>
+                  <a:schemeClr val="tx2"/>
+                </a:solidFill>
+                <a:latin typeface="Calibri" pitchFamily="34" charset="0"/>
+                <a:ea typeface="Calibri" pitchFamily="34" charset="-122"/>
+                <a:cs typeface="Calibri" pitchFamily="34" charset="-120"/>
+              </a:rPr>
+              <a:t>Default: H2 in memory, zero setup.   Permanent: MySQL, switched on with the mysql profile.</a:t>
+            </a:r>
+            <a:endParaRPr lang="en-US" sz="1600" dirty="0"/>
+          </a:p>
+        </p:txBody>
+      </p:sp>
+      <p:sp>
+        <p:nvSpPr>
+          <p:cNvPr id="6" name="accounts table"/>
+          <p:cNvSpPr/>
+          <p:nvPr/>
+        </p:nvSpPr>
+        <p:spPr>
+          <a:xfrm>
+            <a:off x="457200" y="2103120"/>
+            <a:ext cx="4846320" cy="2926080"/>
+          </a:xfrm>
+          <a:prstGeom prst="roundRect">
+            <a:avLst>
+              <a:gd name="adj" fmla="val 3750"/>
+            </a:avLst>
+          </a:prstGeom>
+          <a:solidFill>
+            <a:schemeClr val="bg2"/>
+          </a:solidFill>
+          <a:ln/>
+        </p:spPr>
+      </p:sp>
+      <p:sp>
+        <p:nvSpPr>
+          <p:cNvPr id="7" name="Text 4"/>
+          <p:cNvSpPr txBox="1"/>
+          <p:nvPr/>
+        </p:nvSpPr>
+        <p:spPr>
+          <a:xfrm>
+            <a:off x="640080" y="2176272"/>
+            <a:ext cx="4480560" cy="365760"/>
+          </a:xfrm>
+          <a:prstGeom prst="rect">
+            <a:avLst/>
+          </a:prstGeom>
+          <a:noFill/>
+          <a:ln/>
+        </p:spPr>
+        <p:txBody>
+          <a:bodyPr wrap="square" lIns="0" tIns="0" rIns="0" bIns="0" rtlCol="0" anchor="t"/>
+          <a:lstStyle/>
+          <a:p>
+            <a:pPr algn="l" indent="0" marL="0">
+              <a:buNone/>
+            </a:pPr>
+            <a:r>
+              <a:rPr lang="en-US" sz="1800" b="1" dirty="0">
+                <a:solidFill>
+                  <a:schemeClr val="accent4"/>
+                </a:solidFill>
+                <a:latin typeface="Courier New" pitchFamily="34" charset="0"/>
+                <a:ea typeface="Courier New" pitchFamily="34" charset="-122"/>
+                <a:cs typeface="Courier New" pitchFamily="34" charset="-120"/>
+              </a:rPr>
+              <a:t>accounts</a:t>
+            </a:r>
+            <a:endParaRPr lang="en-US" sz="1800" dirty="0"/>
+          </a:p>
+        </p:txBody>
+      </p:sp>
+      <p:sp>
+        <p:nvSpPr>
+          <p:cNvPr id="8" name="Text 5"/>
+          <p:cNvSpPr txBox="1"/>
+          <p:nvPr/>
+        </p:nvSpPr>
+        <p:spPr>
+          <a:xfrm>
+            <a:off x="640080" y="2606040"/>
+            <a:ext cx="4480560" cy="1554480"/>
+          </a:xfrm>
+          <a:prstGeom prst="rect">
+            <a:avLst/>
+          </a:prstGeom>
+          <a:noFill/>
+          <a:ln/>
+        </p:spPr>
+        <p:txBody>
+          <a:bodyPr wrap="square" lIns="0" tIns="0" rIns="0" bIns="0" rtlCol="0" anchor="t"/>
+          <a:lstStyle/>
+          <a:p>
+            <a:pPr algn="l" indent="0" marL="0">
+              <a:spcAft>
+                <a:spcPts val="400"/>
+              </a:spcAft>
+              <a:buNone/>
+            </a:pPr>
+            <a:r>
+              <a:rPr lang="en-US" sz="1400" b="1" dirty="0">
+                <a:solidFill>
+                  <a:schemeClr val="accent4"/>
+                </a:solidFill>
+                <a:latin typeface="Courier New" pitchFamily="34" charset="0"/>
+                <a:ea typeface="Courier New" pitchFamily="34" charset="-122"/>
+                <a:cs typeface="Courier New" pitchFamily="34" charset="-120"/>
+              </a:rPr>
+              <a:t>vpa</a:t>
+            </a:r>
+            <a:pPr algn="l" indent="0" marL="0">
+              <a:spcAft>
+                <a:spcPts val="400"/>
+              </a:spcAft>
+              <a:buNone/>
+            </a:pPr>
+            <a:r>
+              <a:rPr lang="en-US" sz="1400" dirty="0">
+                <a:solidFill>
+                  <a:schemeClr val="tx1"/>
+                </a:solidFill>
+                <a:latin typeface="Calibri" pitchFamily="34" charset="0"/>
+                <a:ea typeface="Calibri" pitchFamily="34" charset="-122"/>
+                <a:cs typeface="Calibri" pitchFamily="34" charset="-120"/>
+              </a:rPr>
+              <a:t>  main ID, like alice@demo</a:t>
+            </a:r>
+            <a:endParaRPr lang="en-US" sz="1400" dirty="0"/>
+          </a:p>
+          <a:p>
+            <a:pPr algn="l" indent="0" marL="0">
+              <a:spcAft>
+                <a:spcPts val="400"/>
+              </a:spcAft>
+              <a:buNone/>
+            </a:pPr>
+            <a:r>
+              <a:rPr lang="en-US" sz="1400" b="1" dirty="0">
+                <a:solidFill>
+                  <a:schemeClr val="accent4"/>
+                </a:solidFill>
+                <a:latin typeface="Courier New" pitchFamily="34" charset="0"/>
+                <a:ea typeface="Courier New" pitchFamily="34" charset="-122"/>
+                <a:cs typeface="Courier New" pitchFamily="34" charset="-120"/>
+              </a:rPr>
+              <a:t>holderName</a:t>
+            </a:r>
+            <a:pPr algn="l" indent="0" marL="0">
+              <a:spcAft>
+                <a:spcPts val="400"/>
+              </a:spcAft>
+              <a:buNone/>
+            </a:pPr>
+            <a:r>
+              <a:rPr lang="en-US" sz="1400" dirty="0">
+                <a:solidFill>
+                  <a:schemeClr val="tx1"/>
+                </a:solidFill>
+                <a:latin typeface="Calibri" pitchFamily="34" charset="0"/>
+                <a:ea typeface="Calibri" pitchFamily="34" charset="-122"/>
+                <a:cs typeface="Calibri" pitchFamily="34" charset="-120"/>
+              </a:rPr>
+              <a:t>  who owns it</a:t>
+            </a:r>
+            <a:endParaRPr lang="en-US" sz="1400" dirty="0"/>
+          </a:p>
+          <a:p>
+            <a:pPr algn="l" indent="0" marL="0">
+              <a:spcAft>
+                <a:spcPts val="400"/>
+              </a:spcAft>
+              <a:buNone/>
+            </a:pPr>
+            <a:r>
+              <a:rPr lang="en-US" sz="1400" b="1" dirty="0">
+                <a:solidFill>
+                  <a:schemeClr val="accent4"/>
+                </a:solidFill>
+                <a:latin typeface="Courier New" pitchFamily="34" charset="0"/>
+                <a:ea typeface="Courier New" pitchFamily="34" charset="-122"/>
+                <a:cs typeface="Courier New" pitchFamily="34" charset="-120"/>
+              </a:rPr>
+              <a:t>balance</a:t>
+            </a:r>
+            <a:pPr algn="l" indent="0" marL="0">
+              <a:spcAft>
+                <a:spcPts val="400"/>
+              </a:spcAft>
+              <a:buNone/>
+            </a:pPr>
+            <a:r>
+              <a:rPr lang="en-US" sz="1400" dirty="0">
+                <a:solidFill>
+                  <a:schemeClr val="tx1"/>
+                </a:solidFill>
+                <a:latin typeface="Calibri" pitchFamily="34" charset="0"/>
+                <a:ea typeface="Calibri" pitchFamily="34" charset="-122"/>
+                <a:cs typeface="Calibri" pitchFamily="34" charset="-120"/>
+              </a:rPr>
+              <a:t>  money, exact decimal</a:t>
+            </a:r>
+            <a:endParaRPr lang="en-US" sz="1400" dirty="0"/>
+          </a:p>
+          <a:p>
+            <a:pPr algn="l" indent="0" marL="0">
+              <a:spcAft>
+                <a:spcPts val="400"/>
+              </a:spcAft>
+              <a:buNone/>
+            </a:pPr>
+            <a:r>
+              <a:rPr lang="en-US" sz="1400" b="1" dirty="0">
+                <a:solidFill>
+                  <a:schemeClr val="accent4"/>
+                </a:solidFill>
+                <a:latin typeface="Courier New" pitchFamily="34" charset="0"/>
+                <a:ea typeface="Courier New" pitchFamily="34" charset="-122"/>
+                <a:cs typeface="Courier New" pitchFamily="34" charset="-120"/>
+              </a:rPr>
+              <a:t>version</a:t>
+            </a:r>
+            <a:pPr algn="l" indent="0" marL="0">
+              <a:spcAft>
+                <a:spcPts val="400"/>
+              </a:spcAft>
+              <a:buNone/>
+            </a:pPr>
+            <a:r>
+              <a:rPr lang="en-US" sz="1400" dirty="0">
+                <a:solidFill>
+                  <a:schemeClr val="tx1"/>
+                </a:solidFill>
+                <a:latin typeface="Calibri" pitchFamily="34" charset="0"/>
+                <a:ea typeface="Calibri" pitchFamily="34" charset="-122"/>
+                <a:cs typeface="Calibri" pitchFamily="34" charset="-120"/>
+              </a:rPr>
+              <a:t>  catches two updates at once</a:t>
+            </a:r>
+            <a:endParaRPr lang="en-US" sz="1400" dirty="0"/>
+          </a:p>
+        </p:txBody>
+      </p:sp>
+      <p:sp>
+        <p:nvSpPr>
+          <p:cNvPr id="9" name="Text 6"/>
+          <p:cNvSpPr txBox="1"/>
+          <p:nvPr/>
+        </p:nvSpPr>
+        <p:spPr>
+          <a:xfrm>
+            <a:off x="640080" y="4206240"/>
+            <a:ext cx="4480560" cy="731520"/>
+          </a:xfrm>
+          <a:prstGeom prst="rect">
+            <a:avLst/>
+          </a:prstGeom>
+          <a:noFill/>
+          <a:ln/>
+        </p:spPr>
+        <p:txBody>
+          <a:bodyPr wrap="square" lIns="0" tIns="0" rIns="0" bIns="0" rtlCol="0" anchor="t"/>
+          <a:lstStyle/>
+          <a:p>
+            <a:pPr algn="l" indent="0" marL="0">
+              <a:buNone/>
+            </a:pPr>
+            <a:r>
+              <a:rPr lang="en-US" sz="1400" i="1" dirty="0">
+                <a:solidFill>
+                  <a:schemeClr val="accent5"/>
+                </a:solidFill>
+                <a:latin typeface="Calibri" pitchFamily="34" charset="0"/>
+                <a:ea typeface="Calibri" pitchFamily="34" charset="-122"/>
+                <a:cs typeface="Calibri" pitchFamily="34" charset="-120"/>
+              </a:rPr>
+              <a:t>4 demo accounts: alice ₹5000, bob ₹1000, carol ₹2500, dave ₹500</a:t>
+            </a:r>
+            <a:endParaRPr lang="en-US" sz="1400" dirty="0"/>
+          </a:p>
+        </p:txBody>
+      </p:sp>
+      <p:sp>
+        <p:nvSpPr>
+          <p:cNvPr id="10" name="transactions table"/>
+          <p:cNvSpPr/>
+          <p:nvPr/>
+        </p:nvSpPr>
+        <p:spPr>
+          <a:xfrm>
+            <a:off x="5513832" y="2103120"/>
+            <a:ext cx="6217920" cy="2926080"/>
+          </a:xfrm>
+          <a:prstGeom prst="roundRect">
+            <a:avLst>
+              <a:gd name="adj" fmla="val 3750"/>
+            </a:avLst>
+          </a:prstGeom>
+          <a:solidFill>
+            <a:schemeClr val="bg2"/>
+          </a:solidFill>
+          <a:ln/>
+        </p:spPr>
+      </p:sp>
+      <p:sp>
+        <p:nvSpPr>
+          <p:cNvPr id="11" name="Text 8"/>
+          <p:cNvSpPr txBox="1"/>
+          <p:nvPr/>
+        </p:nvSpPr>
+        <p:spPr>
+          <a:xfrm>
+            <a:off x="5696712" y="2176272"/>
+            <a:ext cx="5852160" cy="365760"/>
+          </a:xfrm>
+          <a:prstGeom prst="rect">
+            <a:avLst/>
+          </a:prstGeom>
+          <a:noFill/>
+          <a:ln/>
+        </p:spPr>
+        <p:txBody>
+          <a:bodyPr wrap="square" lIns="0" tIns="0" rIns="0" bIns="0" rtlCol="0" anchor="t"/>
+          <a:lstStyle/>
+          <a:p>
+            <a:pPr algn="l" indent="0" marL="0">
+              <a:buNone/>
+            </a:pPr>
+            <a:r>
+              <a:rPr lang="en-US" sz="1800" b="1" dirty="0">
+                <a:solidFill>
+                  <a:schemeClr val="accent4"/>
+                </a:solidFill>
+                <a:latin typeface="Courier New" pitchFamily="34" charset="0"/>
+                <a:ea typeface="Courier New" pitchFamily="34" charset="-122"/>
+                <a:cs typeface="Courier New" pitchFamily="34" charset="-120"/>
+              </a:rPr>
+              <a:t>transactions  (one row per payment)</a:t>
+            </a:r>
+            <a:endParaRPr lang="en-US" sz="1800" dirty="0"/>
+          </a:p>
+        </p:txBody>
+      </p:sp>
+      <p:sp>
+        <p:nvSpPr>
+          <p:cNvPr id="12" name="Text 9"/>
+          <p:cNvSpPr txBox="1"/>
+          <p:nvPr/>
+        </p:nvSpPr>
+        <p:spPr>
+          <a:xfrm>
+            <a:off x="5696712" y="2606040"/>
+            <a:ext cx="5852160" cy="2286000"/>
+          </a:xfrm>
+          <a:prstGeom prst="rect">
+            <a:avLst/>
+          </a:prstGeom>
+          <a:noFill/>
+          <a:ln/>
+        </p:spPr>
+        <p:txBody>
+          <a:bodyPr wrap="square" lIns="0" tIns="0" rIns="0" bIns="0" rtlCol="0" anchor="t"/>
+          <a:lstStyle/>
+          <a:p>
+            <a:pPr algn="l" indent="0" marL="0">
+              <a:spcAft>
+                <a:spcPts val="400"/>
+              </a:spcAft>
+              <a:buNone/>
+            </a:pPr>
+            <a:r>
+              <a:rPr lang="en-US" sz="1400" b="1" dirty="0">
+                <a:solidFill>
+                  <a:schemeClr val="accent4"/>
+                </a:solidFill>
+                <a:latin typeface="Courier New" pitchFamily="34" charset="0"/>
+                <a:ea typeface="Courier New" pitchFamily="34" charset="-122"/>
+                <a:cs typeface="Courier New" pitchFamily="34" charset="-120"/>
+              </a:rPr>
+              <a:t>id, packetHash</a:t>
+            </a:r>
+            <a:pPr algn="l" indent="0" marL="0">
+              <a:spcAft>
+                <a:spcPts val="400"/>
+              </a:spcAft>
+              <a:buNone/>
+            </a:pPr>
+            <a:r>
+              <a:rPr lang="en-US" sz="1400" dirty="0">
+                <a:solidFill>
+                  <a:schemeClr val="tx1"/>
+                </a:solidFill>
+                <a:latin typeface="Calibri" pitchFamily="34" charset="0"/>
+                <a:ea typeface="Calibri" pitchFamily="34" charset="-122"/>
+                <a:cs typeface="Calibri" pitchFamily="34" charset="-120"/>
+              </a:rPr>
+              <a:t>  hash is UNIQUE (the fingerprint)</a:t>
+            </a:r>
+            <a:endParaRPr lang="en-US" sz="1400" dirty="0"/>
+          </a:p>
+          <a:p>
+            <a:pPr algn="l" indent="0" marL="0">
+              <a:spcAft>
+                <a:spcPts val="400"/>
+              </a:spcAft>
+              <a:buNone/>
+            </a:pPr>
+            <a:r>
+              <a:rPr lang="en-US" sz="1400" b="1" dirty="0">
+                <a:solidFill>
+                  <a:schemeClr val="accent4"/>
+                </a:solidFill>
+                <a:latin typeface="Courier New" pitchFamily="34" charset="0"/>
+                <a:ea typeface="Courier New" pitchFamily="34" charset="-122"/>
+                <a:cs typeface="Courier New" pitchFamily="34" charset="-120"/>
+              </a:rPr>
+              <a:t>senderVpa, receiverVpa, amount</a:t>
+            </a:r>
+            <a:pPr algn="l" indent="0" marL="0">
+              <a:spcAft>
+                <a:spcPts val="400"/>
+              </a:spcAft>
+              <a:buNone/>
+            </a:pPr>
+            <a:r>
+              <a:rPr lang="en-US" sz="1400" dirty="0">
+                <a:solidFill>
+                  <a:schemeClr val="tx1"/>
+                </a:solidFill>
+                <a:latin typeface="Calibri" pitchFamily="34" charset="0"/>
+                <a:ea typeface="Calibri" pitchFamily="34" charset="-122"/>
+                <a:cs typeface="Calibri" pitchFamily="34" charset="-120"/>
+              </a:rPr>
+              <a:t>  who paid whom</a:t>
+            </a:r>
+            <a:endParaRPr lang="en-US" sz="1400" dirty="0"/>
+          </a:p>
+          <a:p>
+            <a:pPr algn="l" indent="0" marL="0">
+              <a:spcAft>
+                <a:spcPts val="400"/>
+              </a:spcAft>
+              <a:buNone/>
+            </a:pPr>
+            <a:r>
+              <a:rPr lang="en-US" sz="1400" b="1" dirty="0">
+                <a:solidFill>
+                  <a:schemeClr val="accent4"/>
+                </a:solidFill>
+                <a:latin typeface="Courier New" pitchFamily="34" charset="0"/>
+                <a:ea typeface="Courier New" pitchFamily="34" charset="-122"/>
+                <a:cs typeface="Courier New" pitchFamily="34" charset="-120"/>
+              </a:rPr>
+              <a:t>signedAt, settledAt</a:t>
+            </a:r>
+            <a:pPr algn="l" indent="0" marL="0">
+              <a:spcAft>
+                <a:spcPts val="400"/>
+              </a:spcAft>
+              <a:buNone/>
+            </a:pPr>
+            <a:r>
+              <a:rPr lang="en-US" sz="1400" dirty="0">
+                <a:solidFill>
+                  <a:schemeClr val="tx1"/>
+                </a:solidFill>
+                <a:latin typeface="Calibri" pitchFamily="34" charset="0"/>
+                <a:ea typeface="Calibri" pitchFamily="34" charset="-122"/>
+                <a:cs typeface="Calibri" pitchFamily="34" charset="-120"/>
+              </a:rPr>
+              <a:t>  when signed / when settled</a:t>
+            </a:r>
+            <a:endParaRPr lang="en-US" sz="1400" dirty="0"/>
+          </a:p>
+          <a:p>
+            <a:pPr algn="l" indent="0" marL="0">
+              <a:spcAft>
+                <a:spcPts val="400"/>
+              </a:spcAft>
+              <a:buNone/>
+            </a:pPr>
+            <a:r>
+              <a:rPr lang="en-US" sz="1400" b="1" dirty="0">
+                <a:solidFill>
+                  <a:schemeClr val="accent4"/>
+                </a:solidFill>
+                <a:latin typeface="Courier New" pitchFamily="34" charset="0"/>
+                <a:ea typeface="Courier New" pitchFamily="34" charset="-122"/>
+                <a:cs typeface="Courier New" pitchFamily="34" charset="-120"/>
+              </a:rPr>
+              <a:t>bridgeNodeId, hopCount</a:t>
+            </a:r>
+            <a:pPr algn="l" indent="0" marL="0">
+              <a:spcAft>
+                <a:spcPts val="400"/>
+              </a:spcAft>
+              <a:buNone/>
+            </a:pPr>
+            <a:r>
+              <a:rPr lang="en-US" sz="1400" dirty="0">
+                <a:solidFill>
+                  <a:schemeClr val="tx1"/>
+                </a:solidFill>
+                <a:latin typeface="Calibri" pitchFamily="34" charset="0"/>
+                <a:ea typeface="Calibri" pitchFamily="34" charset="-122"/>
+                <a:cs typeface="Calibri" pitchFamily="34" charset="-120"/>
+              </a:rPr>
+              <a:t>  how it arrived</a:t>
+            </a:r>
+            <a:endParaRPr lang="en-US" sz="1400" dirty="0"/>
+          </a:p>
+          <a:p>
+            <a:pPr algn="l" indent="0" marL="0">
+              <a:spcAft>
+                <a:spcPts val="400"/>
+              </a:spcAft>
+              <a:buNone/>
+            </a:pPr>
+            <a:r>
+              <a:rPr lang="en-US" sz="1400" b="1" dirty="0">
+                <a:solidFill>
+                  <a:schemeClr val="accent4"/>
+                </a:solidFill>
+                <a:latin typeface="Courier New" pitchFamily="34" charset="0"/>
+                <a:ea typeface="Courier New" pitchFamily="34" charset="-122"/>
+                <a:cs typeface="Courier New" pitchFamily="34" charset="-120"/>
+              </a:rPr>
+              <a:t>status</a:t>
+            </a:r>
+            <a:pPr algn="l" indent="0" marL="0">
+              <a:spcAft>
+                <a:spcPts val="400"/>
+              </a:spcAft>
+              <a:buNone/>
+            </a:pPr>
+            <a:r>
+              <a:rPr lang="en-US" sz="1400" dirty="0">
+                <a:solidFill>
+                  <a:schemeClr val="tx1"/>
+                </a:solidFill>
+                <a:latin typeface="Calibri" pitchFamily="34" charset="0"/>
+                <a:ea typeface="Calibri" pitchFamily="34" charset="-122"/>
+                <a:cs typeface="Calibri" pitchFamily="34" charset="-120"/>
+              </a:rPr>
+              <a:t>  SETTLED or REJECTED</a:t>
+            </a:r>
+            <a:endParaRPr lang="en-US" sz="1400" dirty="0"/>
+          </a:p>
+        </p:txBody>
+      </p:sp>
+      <p:sp>
+        <p:nvSpPr>
+          <p:cNvPr id="13" name="node Application"/>
+          <p:cNvSpPr/>
+          <p:nvPr/>
+        </p:nvSpPr>
+        <p:spPr>
+          <a:xfrm>
+            <a:off x="457200" y="5212080"/>
+            <a:ext cx="2011680" cy="594360"/>
+          </a:xfrm>
+          <a:prstGeom prst="roundRect">
+            <a:avLst>
+              <a:gd name="adj" fmla="val 15385"/>
+            </a:avLst>
+          </a:prstGeom>
+          <a:solidFill>
+            <a:schemeClr val="accent1"/>
+          </a:solidFill>
+          <a:ln/>
+        </p:spPr>
+      </p:sp>
+      <p:sp>
+        <p:nvSpPr>
+          <p:cNvPr id="14" name="Text 11"/>
+          <p:cNvSpPr txBox="1"/>
+          <p:nvPr/>
+        </p:nvSpPr>
+        <p:spPr>
+          <a:xfrm>
+            <a:off x="530352" y="5212080"/>
+            <a:ext cx="1865376" cy="594360"/>
+          </a:xfrm>
+          <a:prstGeom prst="rect">
+            <a:avLst/>
+          </a:prstGeom>
+          <a:noFill/>
+          <a:ln/>
+        </p:spPr>
+        <p:txBody>
+          <a:bodyPr wrap="square" lIns="0" tIns="0" rIns="0" bIns="0" rtlCol="0" anchor="ctr"/>
+          <a:lstStyle/>
+          <a:p>
+            <a:pPr algn="ctr" indent="0" marL="0">
+              <a:buNone/>
+            </a:pPr>
+            <a:r>
+              <a:rPr lang="en-US" sz="1500" b="1" dirty="0">
+                <a:solidFill>
+                  <a:schemeClr val="bg1"/>
+                </a:solidFill>
+                <a:latin typeface="Calibri" pitchFamily="34" charset="0"/>
+                <a:ea typeface="Calibri" pitchFamily="34" charset="-122"/>
+                <a:cs typeface="Calibri" pitchFamily="34" charset="-120"/>
+              </a:rPr>
+              <a:t>Application</a:t>
+            </a:r>
+            <a:endParaRPr lang="en-US" sz="1500" dirty="0"/>
+          </a:p>
+        </p:txBody>
+      </p:sp>
+      <p:sp>
+        <p:nvSpPr>
+          <p:cNvPr id="15" name="arrow"/>
+          <p:cNvSpPr/>
+          <p:nvPr/>
+        </p:nvSpPr>
+        <p:spPr>
+          <a:xfrm>
+            <a:off x="2514600" y="5413248"/>
+            <a:ext cx="365760" cy="0"/>
+          </a:xfrm>
+          <a:prstGeom prst="line">
+            <a:avLst/>
+          </a:prstGeom>
+          <a:noFill/>
+          <a:ln w="28575">
+            <a:solidFill>
+              <a:schemeClr val="accent5"/>
+            </a:solidFill>
+            <a:prstDash val="solid"/>
+            <a:tailEnd type="triangle"/>
+          </a:ln>
+        </p:spPr>
+      </p:sp>
+      <p:sp>
+        <p:nvSpPr>
+          <p:cNvPr id="16" name="node JPA + our JDBC"/>
+          <p:cNvSpPr/>
+          <p:nvPr/>
+        </p:nvSpPr>
+        <p:spPr>
+          <a:xfrm>
+            <a:off x="2926080" y="5212080"/>
+            <a:ext cx="2377440" cy="594360"/>
+          </a:xfrm>
+          <a:prstGeom prst="roundRect">
+            <a:avLst>
+              <a:gd name="adj" fmla="val 15385"/>
+            </a:avLst>
+          </a:prstGeom>
+          <a:solidFill>
+            <a:schemeClr val="accent4"/>
+          </a:solidFill>
+          <a:ln/>
+        </p:spPr>
+      </p:sp>
+      <p:sp>
+        <p:nvSpPr>
+          <p:cNvPr id="17" name="Text 14"/>
+          <p:cNvSpPr txBox="1"/>
+          <p:nvPr/>
+        </p:nvSpPr>
+        <p:spPr>
+          <a:xfrm>
+            <a:off x="2999232" y="5212080"/>
+            <a:ext cx="2231136" cy="594360"/>
+          </a:xfrm>
+          <a:prstGeom prst="rect">
+            <a:avLst/>
+          </a:prstGeom>
+          <a:noFill/>
+          <a:ln/>
+        </p:spPr>
+        <p:txBody>
+          <a:bodyPr wrap="square" lIns="0" tIns="0" rIns="0" bIns="0" rtlCol="0" anchor="ctr"/>
+          <a:lstStyle/>
+          <a:p>
+            <a:pPr algn="ctr" indent="0" marL="0">
+              <a:buNone/>
+            </a:pPr>
+            <a:r>
+              <a:rPr lang="en-US" sz="1500" b="1" dirty="0">
+                <a:solidFill>
+                  <a:schemeClr val="bg1"/>
+                </a:solidFill>
+                <a:latin typeface="Calibri" pitchFamily="34" charset="0"/>
+                <a:ea typeface="Calibri" pitchFamily="34" charset="-122"/>
+                <a:cs typeface="Calibri" pitchFamily="34" charset="-120"/>
+              </a:rPr>
+              <a:t>JPA + our JDBC</a:t>
+            </a:r>
+            <a:endParaRPr lang="en-US" sz="1500" dirty="0"/>
+          </a:p>
+        </p:txBody>
+      </p:sp>
+      <p:sp>
+        <p:nvSpPr>
+          <p:cNvPr id="18" name="arrow"/>
+          <p:cNvSpPr/>
+          <p:nvPr/>
+        </p:nvSpPr>
+        <p:spPr>
+          <a:xfrm>
+            <a:off x="5349240" y="5413248"/>
+            <a:ext cx="365760" cy="0"/>
+          </a:xfrm>
+          <a:prstGeom prst="line">
+            <a:avLst/>
+          </a:prstGeom>
+          <a:noFill/>
+          <a:ln w="28575">
+            <a:solidFill>
+              <a:schemeClr val="accent5"/>
+            </a:solidFill>
+            <a:prstDash val="solid"/>
+            <a:tailEnd type="triangle"/>
+          </a:ln>
+        </p:spPr>
+      </p:sp>
+      <p:sp>
+        <p:nvSpPr>
+          <p:cNvPr id="19" name="node H2  (default)"/>
+          <p:cNvSpPr/>
+          <p:nvPr/>
+        </p:nvSpPr>
+        <p:spPr>
+          <a:xfrm>
+            <a:off x="5760720" y="5212080"/>
+            <a:ext cx="2377440" cy="594360"/>
+          </a:xfrm>
+          <a:prstGeom prst="roundRect">
+            <a:avLst>
+              <a:gd name="adj" fmla="val 15385"/>
+            </a:avLst>
+          </a:prstGeom>
+          <a:solidFill>
+            <a:schemeClr val="accent6"/>
+          </a:solidFill>
+          <a:ln/>
+        </p:spPr>
+      </p:sp>
+      <p:sp>
+        <p:nvSpPr>
+          <p:cNvPr id="20" name="Text 17"/>
+          <p:cNvSpPr txBox="1"/>
+          <p:nvPr/>
+        </p:nvSpPr>
+        <p:spPr>
+          <a:xfrm>
+            <a:off x="5833872" y="5212080"/>
+            <a:ext cx="2231136" cy="594360"/>
+          </a:xfrm>
+          <a:prstGeom prst="rect">
+            <a:avLst/>
+          </a:prstGeom>
+          <a:noFill/>
+          <a:ln/>
+        </p:spPr>
+        <p:txBody>
+          <a:bodyPr wrap="square" lIns="0" tIns="0" rIns="0" bIns="0" rtlCol="0" anchor="ctr"/>
+          <a:lstStyle/>
+          <a:p>
+            <a:pPr algn="ctr" indent="0" marL="0">
+              <a:buNone/>
+            </a:pPr>
+            <a:r>
+              <a:rPr lang="en-US" sz="1500" b="1" dirty="0">
+                <a:solidFill>
+                  <a:schemeClr val="bg1"/>
+                </a:solidFill>
+                <a:latin typeface="Calibri" pitchFamily="34" charset="0"/>
+                <a:ea typeface="Calibri" pitchFamily="34" charset="-122"/>
+                <a:cs typeface="Calibri" pitchFamily="34" charset="-120"/>
+              </a:rPr>
+              <a:t>H2  (default)</a:t>
+            </a:r>
+            <a:endParaRPr lang="en-US" sz="1500" dirty="0"/>
+          </a:p>
+        </p:txBody>
+      </p:sp>
+      <p:sp>
+        <p:nvSpPr>
+          <p:cNvPr id="21" name="Text 18"/>
+          <p:cNvSpPr txBox="1"/>
+          <p:nvPr/>
+        </p:nvSpPr>
+        <p:spPr>
+          <a:xfrm>
+            <a:off x="8183880" y="5212080"/>
+            <a:ext cx="457200" cy="594360"/>
+          </a:xfrm>
+          <a:prstGeom prst="rect">
+            <a:avLst/>
+          </a:prstGeom>
+          <a:noFill/>
+          <a:ln/>
+        </p:spPr>
+        <p:txBody>
+          <a:bodyPr wrap="square" lIns="0" tIns="0" rIns="0" bIns="0" rtlCol="0" anchor="ctr"/>
+          <a:lstStyle/>
+          <a:p>
+            <a:pPr algn="ctr" indent="0" marL="0">
+              <a:buNone/>
+            </a:pPr>
+            <a:r>
+              <a:rPr lang="en-US" sz="1500" i="1" dirty="0">
+                <a:solidFill>
+                  <a:schemeClr val="accent5"/>
+                </a:solidFill>
+                <a:latin typeface="Calibri" pitchFamily="34" charset="0"/>
+                <a:ea typeface="Calibri" pitchFamily="34" charset="-122"/>
+                <a:cs typeface="Calibri" pitchFamily="34" charset="-120"/>
+              </a:rPr>
+              <a:t>or</a:t>
+            </a:r>
+            <a:endParaRPr lang="en-US" sz="1500" dirty="0"/>
+          </a:p>
+        </p:txBody>
+      </p:sp>
+      <p:sp>
+        <p:nvSpPr>
+          <p:cNvPr id="22" name="node MySQL  (mysql profile)"/>
+          <p:cNvSpPr/>
+          <p:nvPr/>
+        </p:nvSpPr>
+        <p:spPr>
+          <a:xfrm>
+            <a:off x="8686800" y="5212080"/>
+            <a:ext cx="3044952" cy="594360"/>
+          </a:xfrm>
+          <a:prstGeom prst="roundRect">
+            <a:avLst>
+              <a:gd name="adj" fmla="val 15385"/>
+            </a:avLst>
+          </a:prstGeom>
+          <a:solidFill>
+            <a:schemeClr val="accent2"/>
+          </a:solidFill>
+          <a:ln/>
+        </p:spPr>
+      </p:sp>
+      <p:sp>
+        <p:nvSpPr>
+          <p:cNvPr id="23" name="Text 20"/>
+          <p:cNvSpPr txBox="1"/>
+          <p:nvPr/>
+        </p:nvSpPr>
+        <p:spPr>
+          <a:xfrm>
+            <a:off x="8759952" y="5212080"/>
+            <a:ext cx="2898648" cy="594360"/>
+          </a:xfrm>
+          <a:prstGeom prst="rect">
+            <a:avLst/>
+          </a:prstGeom>
+          <a:noFill/>
+          <a:ln/>
+        </p:spPr>
+        <p:txBody>
+          <a:bodyPr wrap="square" lIns="0" tIns="0" rIns="0" bIns="0" rtlCol="0" anchor="ctr"/>
+          <a:lstStyle/>
+          <a:p>
+            <a:pPr algn="ctr" indent="0" marL="0">
+              <a:buNone/>
+            </a:pPr>
+            <a:r>
+              <a:rPr lang="en-US" sz="1500" b="1" dirty="0">
+                <a:solidFill>
+                  <a:schemeClr val="tx1"/>
+                </a:solidFill>
+                <a:latin typeface="Calibri" pitchFamily="34" charset="0"/>
+                <a:ea typeface="Calibri" pitchFamily="34" charset="-122"/>
+                <a:cs typeface="Calibri" pitchFamily="34" charset="-120"/>
+              </a:rPr>
+              <a:t>MySQL  (mysql profile)</a:t>
+            </a:r>
+            <a:endParaRPr lang="en-US" sz="1500" dirty="0"/>
+          </a:p>
+        </p:txBody>
+      </p:sp>
+      <p:sp>
+        <p:nvSpPr>
+          <p:cNvPr id="24" name="Text 21"/>
+          <p:cNvSpPr txBox="1"/>
+          <p:nvPr/>
+        </p:nvSpPr>
+        <p:spPr>
+          <a:xfrm>
+            <a:off x="457200" y="5897880"/>
+            <a:ext cx="11247120" cy="548640"/>
+          </a:xfrm>
+          <a:prstGeom prst="rect">
+            <a:avLst/>
+          </a:prstGeom>
+          <a:noFill/>
+          <a:ln/>
+        </p:spPr>
+        <p:txBody>
+          <a:bodyPr wrap="square" lIns="0" tIns="0" rIns="0" bIns="0" rtlCol="0" anchor="t"/>
+          <a:lstStyle/>
+          <a:p>
+            <a:pPr algn="l" indent="0" marL="0">
+              <a:buNone/>
+            </a:pPr>
+            <a:r>
+              <a:rPr lang="en-US" sz="1300" i="1" dirty="0">
+                <a:solidFill>
+                  <a:schemeClr val="accent3"/>
+                </a:solidFill>
+                <a:latin typeface="Calibri" pitchFamily="34" charset="0"/>
+                <a:ea typeface="Calibri" pitchFamily="34" charset="-122"/>
+                <a:cs typeface="Calibri" pitchFamily="34" charset="-120"/>
+              </a:rPr>
+              <a:t>Run MySQL: docker compose up -d, then start with the mysql profile. Tables now survive restarts (ddl-auto=update). The idempotency cache is still in memory, so the UNIQUE hash is the safety net after a restart.</a:t>
+            </a:r>
+            <a:endParaRPr lang="en-US" sz="1300" dirty="0"/>
+          </a:p>
+        </p:txBody>
+      </p:sp>
+      <p:sp>
+        <p:nvSpPr>
+          <p:cNvPr id="25" name="Slide Number Placeholder 0"/>
+          <p:cNvSpPr>
+            <a:spLocks noGrp="1"/>
+          </p:cNvSpPr>
+          <p:nvPr>
+            <p:ph type="sldNum" sz="quarter" idx="4294967295"/>
+          </p:nvPr>
+        </p:nvSpPr>
+        <p:spPr>
+          <a:xfrm>
+            <a:off x="11247120" y="6428232"/>
+            <a:ext cx="502920" cy="274320"/>
+          </a:xfrm>
+          <a:prstGeom prst="rect">
+            <a:avLst/>
+          </a:prstGeom>
+          <a:extLst>
+            <a:ext uri="{C572A759-6A51-4108-AA02-DFA0A04FC94B}">
+              <ma14:wrappingTextBoxFlag xmlns:ma14="http://schemas.microsoft.com/office/mac/drawingml/2011/main" val="0"/>
+            </a:ext>
+          </a:extLst>
+        </p:spPr>
+        <p:txBody>
+          <a:bodyPr/>
+          <a:lstStyle>
+            <a:lvl1pPr>
+              <a:defRPr sz="1000">
+                <a:solidFill>
+                  <a:schemeClr val="accent5"/>
+                </a:solidFill>
+                <a:latin typeface="Calibri"/>
+                <a:ea typeface="Calibri"/>
+                <a:cs typeface="Calibri"/>
+              </a:defRPr>
+            </a:lvl1pPr>
+          </a:lstStyle>
+          <a:p>
+            <a:pPr algn="r"/>
+            <a:fld id="{F7021451-1387-4CA6-816F-3879F97B5CBC}" type="slidenum">
+              <a:rPr b="0" lang="en-US"/>
+              <a:t>25</a:t>
+            </a:fld>
+            <a:endParaRPr lang="en-US"/>
+          </a:p>
+        </p:txBody>
+      </p:sp>
+    </p:spTree>
+  </p:cSld>
+  <p:clrMapOvr>
+    <a:masterClrMapping/>
+  </p:clrMapOvr>
+</p:sld>
+</file>
+
+<file path=ppt/slides/slide26.xml><?xml version="1.0" encoding="utf-8"?>
+<p:sld xmlns:a="http://schemas.openxmlformats.org/drawingml/2006/main" xmlns:r="http://schemas.openxmlformats.org/officeDocument/2006/relationships" xmlns:p="http://schemas.openxmlformats.org/presentationml/2006/main">
+  <p:cSld name="Slide 26">
+    <p:spTree>
+      <p:nvGrpSpPr>
+        <p:cNvPr id="1" name=""/>
+        <p:cNvGrpSpPr/>
+        <p:nvPr/>
+      </p:nvGrpSpPr>
+      <p:grpSpPr>
+        <a:xfrm>
+          <a:off x="0" y="0"/>
+          <a:ext cx="0" cy="0"/>
+          <a:chOff x="0" y="0"/>
+          <a:chExt cx="0" cy="0"/>
+        </a:xfrm>
+      </p:grpSpPr>
+      <p:sp>
+        <p:nvSpPr>
+          <p:cNvPr id="2" name="Text 1"/>
+          <p:cNvSpPr/>
+          <p:nvPr>
+            <p:ph idx="101" type="title" hasCustomPrompt="1"/>
+          </p:nvPr>
+        </p:nvSpPr>
+        <p:spPr>
+          <a:xfrm>
+            <a:off x="457200" y="274320"/>
+            <a:ext cx="11247120" cy="777240"/>
+          </a:xfrm>
+          <a:prstGeom prst="rect">
+            <a:avLst/>
+          </a:prstGeom>
+          <a:noFill/>
+          <a:ln/>
+        </p:spPr>
+        <p:txBody>
+          <a:bodyPr wrap="square" lIns="0" tIns="0" rIns="0" bIns="0" rtlCol="0" anchor="ctr"/>
+          <a:lstStyle/>
+          <a:p>
+            <a:pPr algn="l" indent="0" marL="0">
+              <a:buNone/>
+            </a:pPr>
+            <a:r>
+              <a:rPr lang="en-US" sz="3400" b="1" dirty="0">
+                <a:solidFill>
+                  <a:schemeClr val="tx2"/>
+                </a:solidFill>
+              </a:rPr>
+              <a:t>Servlets: real servlets beside Spring</a:t>
+            </a:r>
+            <a:endParaRPr lang="en-US" sz="3400" dirty="0"/>
+          </a:p>
+        </p:txBody>
+      </p:sp>
+      <p:sp>
+        <p:nvSpPr>
+          <p:cNvPr id="4" name="we write servlets"/>
+          <p:cNvSpPr/>
+          <p:nvPr/>
+        </p:nvSpPr>
+        <p:spPr>
+          <a:xfrm>
+            <a:off x="457200" y="1280160"/>
+            <a:ext cx="11274552" cy="685800"/>
+          </a:xfrm>
+          <a:prstGeom prst="roundRect">
+            <a:avLst>
+              <a:gd name="adj" fmla="val 16000"/>
+            </a:avLst>
+          </a:prstGeom>
+          <a:solidFill>
+            <a:srgbClr val="E1F1E7"/>
+          </a:solidFill>
+          <a:ln/>
+        </p:spPr>
+      </p:sp>
+      <p:sp>
+        <p:nvSpPr>
+          <p:cNvPr id="5" name="Text 2"/>
+          <p:cNvSpPr txBox="1"/>
+          <p:nvPr/>
+        </p:nvSpPr>
+        <p:spPr>
+          <a:xfrm>
+            <a:off x="640080" y="1280160"/>
+            <a:ext cx="10881360" cy="685800"/>
+          </a:xfrm>
+          <a:prstGeom prst="rect">
+            <a:avLst/>
+          </a:prstGeom>
+          <a:noFill/>
+          <a:ln/>
+        </p:spPr>
+        <p:txBody>
+          <a:bodyPr wrap="square" lIns="0" tIns="0" rIns="0" bIns="0" rtlCol="0" anchor="ctr"/>
+          <a:lstStyle/>
+          <a:p>
+            <a:pPr algn="l" indent="0" marL="0">
+              <a:buNone/>
+            </a:pPr>
+            <a:r>
+              <a:rPr lang="en-US" sz="1600" b="1" dirty="0">
+                <a:solidFill>
+                  <a:schemeClr val="tx2"/>
+                </a:solidFill>
+                <a:latin typeface="Calibri" pitchFamily="34" charset="0"/>
+                <a:ea typeface="Calibri" pitchFamily="34" charset="-122"/>
+                <a:cs typeface="Calibri" pitchFamily="34" charset="-120"/>
+              </a:rPr>
+              <a:t>We write 3 servlets (extending HttpServlet) and 1 Filter. The /api endpoints still use Spring controllers.</a:t>
+            </a:r>
+            <a:endParaRPr lang="en-US" sz="1600" dirty="0"/>
+          </a:p>
+        </p:txBody>
+      </p:sp>
+      <p:sp>
+        <p:nvSpPr>
+          <p:cNvPr id="6" name="node Browser"/>
+          <p:cNvSpPr/>
+          <p:nvPr/>
+        </p:nvSpPr>
+        <p:spPr>
+          <a:xfrm>
+            <a:off x="457200" y="2148840"/>
+            <a:ext cx="1920240" cy="1005840"/>
+          </a:xfrm>
+          <a:prstGeom prst="roundRect">
+            <a:avLst>
+              <a:gd name="adj" fmla="val 9091"/>
+            </a:avLst>
+          </a:prstGeom>
+          <a:solidFill>
+            <a:schemeClr val="accent5"/>
+          </a:solidFill>
+          <a:ln/>
+        </p:spPr>
+      </p:sp>
+      <p:sp>
+        <p:nvSpPr>
+          <p:cNvPr id="7" name="Text 4"/>
+          <p:cNvSpPr txBox="1"/>
+          <p:nvPr/>
+        </p:nvSpPr>
+        <p:spPr>
+          <a:xfrm>
+            <a:off x="530352" y="2148840"/>
+            <a:ext cx="1773936" cy="1005840"/>
+          </a:xfrm>
+          <a:prstGeom prst="rect">
+            <a:avLst/>
+          </a:prstGeom>
+          <a:noFill/>
+          <a:ln/>
+        </p:spPr>
+        <p:txBody>
+          <a:bodyPr wrap="square" lIns="0" tIns="0" rIns="0" bIns="0" rtlCol="0" anchor="ctr"/>
+          <a:lstStyle/>
+          <a:p>
+            <a:pPr algn="ctr" indent="0" marL="0">
+              <a:buNone/>
+            </a:pPr>
+            <a:r>
+              <a:rPr lang="en-US" sz="1400" b="1" dirty="0">
+                <a:solidFill>
+                  <a:schemeClr val="bg1"/>
+                </a:solidFill>
+                <a:latin typeface="Calibri" pitchFamily="34" charset="0"/>
+                <a:ea typeface="Calibri" pitchFamily="34" charset="-122"/>
+                <a:cs typeface="Calibri" pitchFamily="34" charset="-120"/>
+              </a:rPr>
+              <a:t>Browser</a:t>
+            </a:r>
+            <a:endParaRPr lang="en-US" sz="1400" dirty="0"/>
+          </a:p>
+        </p:txBody>
+      </p:sp>
+      <p:sp>
+        <p:nvSpPr>
+          <p:cNvPr id="8" name="arrow"/>
+          <p:cNvSpPr/>
+          <p:nvPr/>
+        </p:nvSpPr>
+        <p:spPr>
+          <a:xfrm>
+            <a:off x="2404872" y="2651760"/>
+            <a:ext cx="310896" cy="0"/>
+          </a:xfrm>
+          <a:prstGeom prst="line">
+            <a:avLst/>
+          </a:prstGeom>
+          <a:noFill/>
+          <a:ln w="28575">
+            <a:solidFill>
+              <a:schemeClr val="accent5"/>
+            </a:solidFill>
+            <a:prstDash val="solid"/>
+            <a:tailEnd type="triangle"/>
+          </a:ln>
+        </p:spPr>
+      </p:sp>
+      <p:sp>
+        <p:nvSpPr>
+          <p:cNvPr id="9" name="node RequestLogFilter /servlet/*"/>
+          <p:cNvSpPr/>
+          <p:nvPr/>
+        </p:nvSpPr>
+        <p:spPr>
+          <a:xfrm>
+            <a:off x="2743200" y="2148840"/>
+            <a:ext cx="1920240" cy="1005840"/>
+          </a:xfrm>
+          <a:prstGeom prst="roundRect">
+            <a:avLst>
+              <a:gd name="adj" fmla="val 9091"/>
+            </a:avLst>
+          </a:prstGeom>
+          <a:solidFill>
+            <a:schemeClr val="accent2"/>
+          </a:solidFill>
+          <a:ln/>
+        </p:spPr>
+      </p:sp>
+      <p:sp>
+        <p:nvSpPr>
+          <p:cNvPr id="10" name="Text 7"/>
+          <p:cNvSpPr txBox="1"/>
+          <p:nvPr/>
+        </p:nvSpPr>
+        <p:spPr>
+          <a:xfrm>
+            <a:off x="2816352" y="2148840"/>
+            <a:ext cx="1773936" cy="1005840"/>
+          </a:xfrm>
+          <a:prstGeom prst="rect">
+            <a:avLst/>
+          </a:prstGeom>
+          <a:noFill/>
+          <a:ln/>
+        </p:spPr>
+        <p:txBody>
+          <a:bodyPr wrap="square" lIns="0" tIns="0" rIns="0" bIns="0" rtlCol="0" anchor="ctr"/>
+          <a:lstStyle/>
+          <a:p>
+            <a:pPr algn="ctr" indent="0" marL="0">
+              <a:buNone/>
+            </a:pPr>
+            <a:r>
+              <a:rPr lang="en-US" sz="1400" b="1" dirty="0">
+                <a:solidFill>
+                  <a:schemeClr val="tx1"/>
+                </a:solidFill>
+                <a:latin typeface="Calibri" pitchFamily="34" charset="0"/>
+                <a:ea typeface="Calibri" pitchFamily="34" charset="-122"/>
+                <a:cs typeface="Calibri" pitchFamily="34" charset="-120"/>
+              </a:rPr>
+              <a:t>RequestLogFilter</a:t>
+            </a:r>
+            <a:endParaRPr lang="en-US" sz="1400" dirty="0"/>
+          </a:p>
+          <a:p>
+            <a:pPr algn="ctr" indent="0" marL="0">
+              <a:buNone/>
+            </a:pPr>
+            <a:r>
+              <a:rPr lang="en-US" sz="1400" b="1" dirty="0">
+                <a:solidFill>
+                  <a:schemeClr val="tx1"/>
+                </a:solidFill>
+                <a:latin typeface="Calibri" pitchFamily="34" charset="0"/>
+                <a:ea typeface="Calibri" pitchFamily="34" charset="-122"/>
+                <a:cs typeface="Calibri" pitchFamily="34" charset="-120"/>
+              </a:rPr>
+              <a:t>/servlet/*</a:t>
+            </a:r>
+            <a:endParaRPr lang="en-US" sz="1400" dirty="0"/>
+          </a:p>
+        </p:txBody>
+      </p:sp>
+      <p:sp>
+        <p:nvSpPr>
+          <p:cNvPr id="11" name="arrow"/>
+          <p:cNvSpPr/>
+          <p:nvPr/>
+        </p:nvSpPr>
+        <p:spPr>
+          <a:xfrm>
+            <a:off x="4690872" y="2651760"/>
+            <a:ext cx="310896" cy="0"/>
+          </a:xfrm>
+          <a:prstGeom prst="line">
+            <a:avLst/>
+          </a:prstGeom>
+          <a:noFill/>
+          <a:ln w="28575">
+            <a:solidFill>
+              <a:schemeClr val="accent5"/>
+            </a:solidFill>
+            <a:prstDash val="solid"/>
+            <a:tailEnd type="triangle"/>
+          </a:ln>
+        </p:spPr>
+      </p:sp>
+      <p:sp>
+        <p:nvSpPr>
+          <p:cNvPr id="12" name="node LedgerExportServlet doGet() / doPost()"/>
+          <p:cNvSpPr/>
+          <p:nvPr/>
+        </p:nvSpPr>
+        <p:spPr>
+          <a:xfrm>
+            <a:off x="5029200" y="2148840"/>
+            <a:ext cx="1920240" cy="1005840"/>
+          </a:xfrm>
+          <a:prstGeom prst="roundRect">
+            <a:avLst>
+              <a:gd name="adj" fmla="val 9091"/>
+            </a:avLst>
+          </a:prstGeom>
+          <a:solidFill>
+            <a:schemeClr val="accent1"/>
+          </a:solidFill>
+          <a:ln/>
+        </p:spPr>
+      </p:sp>
+      <p:sp>
+        <p:nvSpPr>
+          <p:cNvPr id="13" name="Text 10"/>
+          <p:cNvSpPr txBox="1"/>
+          <p:nvPr/>
+        </p:nvSpPr>
+        <p:spPr>
+          <a:xfrm>
+            <a:off x="5102352" y="2148840"/>
+            <a:ext cx="1773936" cy="1005840"/>
+          </a:xfrm>
+          <a:prstGeom prst="rect">
+            <a:avLst/>
+          </a:prstGeom>
+          <a:noFill/>
+          <a:ln/>
+        </p:spPr>
+        <p:txBody>
+          <a:bodyPr wrap="square" lIns="0" tIns="0" rIns="0" bIns="0" rtlCol="0" anchor="ctr"/>
+          <a:lstStyle/>
+          <a:p>
+            <a:pPr algn="ctr" indent="0" marL="0">
+              <a:buNone/>
+            </a:pPr>
+            <a:r>
+              <a:rPr lang="en-US" sz="1400" b="1" dirty="0">
+                <a:solidFill>
+                  <a:schemeClr val="bg1"/>
+                </a:solidFill>
+                <a:latin typeface="Calibri" pitchFamily="34" charset="0"/>
+                <a:ea typeface="Calibri" pitchFamily="34" charset="-122"/>
+                <a:cs typeface="Calibri" pitchFamily="34" charset="-120"/>
+              </a:rPr>
+              <a:t>LedgerExportServlet</a:t>
+            </a:r>
+            <a:endParaRPr lang="en-US" sz="1400" dirty="0"/>
+          </a:p>
+          <a:p>
+            <a:pPr algn="ctr" indent="0" marL="0">
+              <a:buNone/>
+            </a:pPr>
+            <a:r>
+              <a:rPr lang="en-US" sz="1400" b="1" dirty="0">
+                <a:solidFill>
+                  <a:schemeClr val="bg1"/>
+                </a:solidFill>
+                <a:latin typeface="Calibri" pitchFamily="34" charset="0"/>
+                <a:ea typeface="Calibri" pitchFamily="34" charset="-122"/>
+                <a:cs typeface="Calibri" pitchFamily="34" charset="-120"/>
+              </a:rPr>
+              <a:t>doGet() / doPost()</a:t>
+            </a:r>
+            <a:endParaRPr lang="en-US" sz="1400" dirty="0"/>
+          </a:p>
+        </p:txBody>
+      </p:sp>
+      <p:sp>
+        <p:nvSpPr>
+          <p:cNvPr id="14" name="arrow"/>
+          <p:cNvSpPr/>
+          <p:nvPr/>
+        </p:nvSpPr>
+        <p:spPr>
+          <a:xfrm>
+            <a:off x="6976872" y="2651760"/>
+            <a:ext cx="310896" cy="0"/>
+          </a:xfrm>
+          <a:prstGeom prst="line">
+            <a:avLst/>
+          </a:prstGeom>
+          <a:noFill/>
+          <a:ln w="28575">
+            <a:solidFill>
+              <a:schemeClr val="accent5"/>
+            </a:solidFill>
+            <a:prstDash val="solid"/>
+            <a:tailEnd type="triangle"/>
+          </a:ln>
+        </p:spPr>
+      </p:sp>
+      <p:sp>
+        <p:nvSpPr>
+          <p:cNvPr id="15" name="node LedgerFileService + LedgerJdbcDao"/>
+          <p:cNvSpPr/>
+          <p:nvPr/>
+        </p:nvSpPr>
+        <p:spPr>
+          <a:xfrm>
+            <a:off x="7315200" y="2148840"/>
+            <a:ext cx="1920240" cy="1005840"/>
+          </a:xfrm>
+          <a:prstGeom prst="roundRect">
+            <a:avLst>
+              <a:gd name="adj" fmla="val 9091"/>
+            </a:avLst>
+          </a:prstGeom>
+          <a:solidFill>
+            <a:schemeClr val="accent4"/>
+          </a:solidFill>
+          <a:ln/>
+        </p:spPr>
+      </p:sp>
+      <p:sp>
+        <p:nvSpPr>
           <p:cNvPr id="16" name="Text 13"/>
           <p:cNvSpPr txBox="1"/>
           <p:nvPr/>
         </p:nvSpPr>
         <p:spPr>
           <a:xfrm>
-            <a:off x="9171432" y="2240280"/>
-            <a:ext cx="2322576" cy="1097280"/>
+            <a:off x="7388352" y="2148840"/>
+            <a:ext cx="1773936" cy="1005840"/>
           </a:xfrm>
           <a:prstGeom prst="rect">
             <a:avLst/>
@@ -24257,7 +26395,7 @@
               <a:buNone/>
             </a:pPr>
             <a:r>
-              <a:rPr lang="en-US" sz="1600" b="1" dirty="0">
+              <a:rPr lang="en-US" sz="1400" b="1" dirty="0">
                 <a:solidFill>
                   <a:schemeClr val="bg1"/>
                 </a:solidFill>
@@ -24265,15 +26403,156 @@
                 <a:ea typeface="Calibri" pitchFamily="34" charset="-122"/>
                 <a:cs typeface="Calibri" pitchFamily="34" charset="-120"/>
               </a:rPr>
-              <a:t>H2 database</a:t>
-            </a:r>
-            <a:endParaRPr lang="en-US" sz="1600" dirty="0"/>
+              <a:t>LedgerFileService</a:t>
+            </a:r>
+            <a:endParaRPr lang="en-US" sz="1400" dirty="0"/>
+          </a:p>
+          <a:p>
+            <a:pPr algn="ctr" indent="0" marL="0">
+              <a:buNone/>
+            </a:pPr>
+            <a:r>
+              <a:rPr lang="en-US" sz="1400" b="1" dirty="0">
+                <a:solidFill>
+                  <a:schemeClr val="bg1"/>
+                </a:solidFill>
+                <a:latin typeface="Calibri" pitchFamily="34" charset="0"/>
+                <a:ea typeface="Calibri" pitchFamily="34" charset="-122"/>
+                <a:cs typeface="Calibri" pitchFamily="34" charset="-120"/>
+              </a:rPr>
+              <a:t>+ LedgerJdbcDao</a:t>
+            </a:r>
+            <a:endParaRPr lang="en-US" sz="1400" dirty="0"/>
+          </a:p>
+        </p:txBody>
+      </p:sp>
+      <p:sp>
+        <p:nvSpPr>
+          <p:cNvPr id="17" name="arrow"/>
+          <p:cNvSpPr/>
+          <p:nvPr/>
+        </p:nvSpPr>
+        <p:spPr>
+          <a:xfrm>
+            <a:off x="9262872" y="2651760"/>
+            <a:ext cx="310896" cy="0"/>
+          </a:xfrm>
+          <a:prstGeom prst="line">
+            <a:avLst/>
+          </a:prstGeom>
+          <a:noFill/>
+          <a:ln w="28575">
+            <a:solidFill>
+              <a:schemeClr val="accent5"/>
+            </a:solidFill>
+            <a:prstDash val="solid"/>
+            <a:tailEnd type="triangle"/>
+          </a:ln>
+        </p:spPr>
+      </p:sp>
+      <p:sp>
+        <p:nvSpPr>
+          <p:cNvPr id="18" name="node Database"/>
+          <p:cNvSpPr/>
+          <p:nvPr/>
+        </p:nvSpPr>
+        <p:spPr>
+          <a:xfrm>
+            <a:off x="9601200" y="2148840"/>
+            <a:ext cx="1920240" cy="1005840"/>
+          </a:xfrm>
+          <a:prstGeom prst="roundRect">
+            <a:avLst>
+              <a:gd name="adj" fmla="val 9091"/>
+            </a:avLst>
+          </a:prstGeom>
+          <a:solidFill>
+            <a:schemeClr val="accent6"/>
+          </a:solidFill>
+          <a:ln/>
+        </p:spPr>
+      </p:sp>
+      <p:sp>
+        <p:nvSpPr>
+          <p:cNvPr id="19" name="Text 16"/>
+          <p:cNvSpPr txBox="1"/>
+          <p:nvPr/>
+        </p:nvSpPr>
+        <p:spPr>
+          <a:xfrm>
+            <a:off x="9674352" y="2148840"/>
+            <a:ext cx="1773936" cy="1005840"/>
+          </a:xfrm>
+          <a:prstGeom prst="rect">
+            <a:avLst/>
+          </a:prstGeom>
+          <a:noFill/>
+          <a:ln/>
+        </p:spPr>
+        <p:txBody>
+          <a:bodyPr wrap="square" lIns="0" tIns="0" rIns="0" bIns="0" rtlCol="0" anchor="ctr"/>
+          <a:lstStyle/>
+          <a:p>
+            <a:pPr algn="ctr" indent="0" marL="0">
+              <a:buNone/>
+            </a:pPr>
+            <a:r>
+              <a:rPr lang="en-US" sz="1400" b="1" dirty="0">
+                <a:solidFill>
+                  <a:schemeClr val="bg1"/>
+                </a:solidFill>
+                <a:latin typeface="Calibri" pitchFamily="34" charset="0"/>
+                <a:ea typeface="Calibri" pitchFamily="34" charset="-122"/>
+                <a:cs typeface="Calibri" pitchFamily="34" charset="-120"/>
+              </a:rPr>
+              <a:t>Database</a:t>
+            </a:r>
+            <a:endParaRPr lang="en-US" sz="1400" dirty="0"/>
+          </a:p>
+        </p:txBody>
+      </p:sp>
+      <p:sp>
+        <p:nvSpPr>
+          <p:cNvPr id="20" name="Text 17"/>
+          <p:cNvSpPr txBox="1"/>
+          <p:nvPr/>
+        </p:nvSpPr>
+        <p:spPr>
+          <a:xfrm>
+            <a:off x="457200" y="3218688"/>
+            <a:ext cx="11247120" cy="320040"/>
+          </a:xfrm>
+          <a:prstGeom prst="rect">
+            <a:avLst/>
+          </a:prstGeom>
+          <a:noFill/>
+          <a:ln/>
+        </p:spPr>
+        <p:txBody>
+          <a:bodyPr wrap="square" lIns="0" tIns="0" rIns="0" bIns="0" rtlCol="0" anchor="t"/>
+          <a:lstStyle/>
+          <a:p>
+            <a:pPr algn="l" indent="0" marL="0">
+              <a:buNone/>
+            </a:pPr>
+            <a:r>
+              <a:rPr lang="en-US" sz="1400" i="1" dirty="0">
+                <a:solidFill>
+                  <a:schemeClr val="accent5"/>
+                </a:solidFill>
+                <a:latin typeface="Calibri" pitchFamily="34" charset="0"/>
+                <a:ea typeface="Calibri" pitchFamily="34" charset="-122"/>
+                <a:cs typeface="Calibri" pitchFamily="34" charset="-120"/>
+              </a:rPr>
+              <a:t>Request goes in →   CSV or JSON comes back ←</a:t>
+            </a:r>
+            <a:endParaRPr lang="en-US" sz="1400" dirty="0"/>
           </a:p>
         </p:txBody>
       </p:sp>
       <p:graphicFrame>
         <p:nvGraphicFramePr>
-          <p:cNvPr id="25" name="jdbc table"/>
+          <p:cNvPr id="27" name="servlet table"/>
           <p:cNvGraphicFramePr>
             <a:graphicFrameLocks noGrp="1"/>
           </p:cNvGraphicFramePr>
@@ -24286,7 +26565,7 @@
           </p:nvPr>
         </p:nvGraphicFramePr>
         <p:xfrm>
-          <a:off x="457200" y="3566160"/>
+          <a:off x="457200" y="3657600"/>
           <a:ext cx="11274552" cy="914400"/>
         </p:xfrm>
         <a:graphic>
@@ -24294,11 +26573,12 @@
             <a:tbl>
               <a:tblPr/>
               <a:tblGrid>
-                <a:gridCol w="1737360"/>
-                <a:gridCol w="4937760"/>
-                <a:gridCol w="4599432"/>
+                <a:gridCol w="2103120"/>
+                <a:gridCol w="2926080"/>
+                <a:gridCol w="1188720"/>
+                <a:gridCol w="5056632"/>
               </a:tblGrid>
-              <a:tr h="384048">
+              <a:tr h="365760">
                 <a:tc>
                   <a:txBody>
                     <a:bodyPr/>
@@ -24316,7 +26596,7 @@
                           <a:ea typeface="Calibri" pitchFamily="34" charset="-122"/>
                           <a:cs typeface="Calibri" pitchFamily="34" charset="-120"/>
                         </a:rPr>
-                        <a:t>Job</a:t>
+                        <a:t>URL</a:t>
                       </a:r>
                       <a:endParaRPr lang="en-US" sz="1400" dirty="0">
                         <a:latin typeface="Calibri" charset="0"/>
@@ -24384,7 +26664,7 @@
                           <a:ea typeface="Calibri" pitchFamily="34" charset="-122"/>
                           <a:cs typeface="Calibri" pitchFamily="34" charset="-120"/>
                         </a:rPr>
-                        <a:t>What we write in Java</a:t>
+                        <a:t>Servlet</a:t>
                       </a:r>
                       <a:endParaRPr lang="en-US" sz="1400" dirty="0">
                         <a:latin typeface="Calibri" charset="0"/>
@@ -24452,2853 +26732,7 @@
                           <a:ea typeface="Calibri" pitchFamily="34" charset="-122"/>
                           <a:cs typeface="Calibri" pitchFamily="34" charset="-120"/>
                         </a:rPr>
-                        <a:t>What happens underneath</a:t>
-                      </a:r>
-                      <a:endParaRPr lang="en-US" sz="1400" dirty="0">
-                        <a:latin typeface="Calibri" charset="0"/>
-                        <a:ea typeface="Calibri" charset="0"/>
-                        <a:cs typeface="Calibri" charset="0"/>
-                      </a:endParaRPr>
-                    </a:p>
-                  </a:txBody>
-                  <a:tcPr marL="109728" marR="109728" marT="0" marB="0" anchor="ctr">
-                    <a:lnL w="6350" cap="flat" cmpd="sng" algn="ctr">
-                      <a:solidFill>
-                        <a:srgbClr val="C9D3DC"/>
-                      </a:solidFill>
-                      <a:prstDash val="solid"/>
-                      <a:round/>
-                      <a:headEnd type="none" w="med" len="med"/>
-                      <a:tailEnd type="none" w="med" len="med"/>
-                    </a:lnL>
-                    <a:lnR w="6350" cap="flat" cmpd="sng" algn="ctr">
-                      <a:solidFill>
-                        <a:srgbClr val="C9D3DC"/>
-                      </a:solidFill>
-                      <a:prstDash val="solid"/>
-                      <a:round/>
-                      <a:headEnd type="none" w="med" len="med"/>
-                      <a:tailEnd type="none" w="med" len="med"/>
-                    </a:lnR>
-                    <a:lnT w="6350" cap="flat" cmpd="sng" algn="ctr">
-                      <a:solidFill>
-                        <a:srgbClr val="C9D3DC"/>
-                      </a:solidFill>
-                      <a:prstDash val="solid"/>
-                      <a:round/>
-                      <a:headEnd type="none" w="med" len="med"/>
-                      <a:tailEnd type="none" w="med" len="med"/>
-                    </a:lnT>
-                    <a:lnB w="6350" cap="flat" cmpd="sng" algn="ctr">
-                      <a:solidFill>
-                        <a:srgbClr val="C9D3DC"/>
-                      </a:solidFill>
-                      <a:prstDash val="solid"/>
-                      <a:round/>
-                      <a:headEnd type="none" w="med" len="med"/>
-                      <a:tailEnd type="none" w="med" len="med"/>
-                    </a:lnB>
-                    <a:solidFill>
-                      <a:schemeClr val="accent1"/>
-                    </a:solidFill>
-                  </a:tcPr>
-                </a:tc>
-              </a:tr>
-              <a:tr h="384048">
-                <a:tc>
-                  <a:txBody>
-                    <a:bodyPr/>
-                    <a:lstStyle/>
-                    <a:p>
-                      <a:pPr indent="0" marL="0">
-                        <a:buNone/>
-                      </a:pPr>
-                      <a:r>
-                        <a:rPr lang="en-US" sz="1400" dirty="0">
-                          <a:solidFill>
-                            <a:schemeClr val="tx1"/>
-                          </a:solidFill>
-                          <a:latin typeface="Calibri" pitchFamily="34" charset="0"/>
-                          <a:ea typeface="Calibri" pitchFamily="34" charset="-122"/>
-                          <a:cs typeface="Calibri" pitchFamily="34" charset="-120"/>
-                        </a:rPr>
-                        <a:t>Connect</a:t>
-                      </a:r>
-                      <a:endParaRPr lang="en-US" sz="1400" dirty="0">
-                        <a:latin typeface="Calibri" charset="0"/>
-                        <a:ea typeface="Calibri" charset="0"/>
-                        <a:cs typeface="Calibri" charset="0"/>
-                      </a:endParaRPr>
-                    </a:p>
-                  </a:txBody>
-                  <a:tcPr marL="109728" marR="109728" marT="0" marB="0" anchor="ctr">
-                    <a:lnL w="6350" cap="flat" cmpd="sng" algn="ctr">
-                      <a:solidFill>
-                        <a:srgbClr val="C9D3DC"/>
-                      </a:solidFill>
-                      <a:prstDash val="solid"/>
-                      <a:round/>
-                      <a:headEnd type="none" w="med" len="med"/>
-                      <a:tailEnd type="none" w="med" len="med"/>
-                    </a:lnL>
-                    <a:lnR w="6350" cap="flat" cmpd="sng" algn="ctr">
-                      <a:solidFill>
-                        <a:srgbClr val="C9D3DC"/>
-                      </a:solidFill>
-                      <a:prstDash val="solid"/>
-                      <a:round/>
-                      <a:headEnd type="none" w="med" len="med"/>
-                      <a:tailEnd type="none" w="med" len="med"/>
-                    </a:lnR>
-                    <a:lnT w="6350" cap="flat" cmpd="sng" algn="ctr">
-                      <a:solidFill>
-                        <a:srgbClr val="C9D3DC"/>
-                      </a:solidFill>
-                      <a:prstDash val="solid"/>
-                      <a:round/>
-                      <a:headEnd type="none" w="med" len="med"/>
-                      <a:tailEnd type="none" w="med" len="med"/>
-                    </a:lnT>
-                    <a:lnB w="6350" cap="flat" cmpd="sng" algn="ctr">
-                      <a:solidFill>
-                        <a:srgbClr val="C9D3DC"/>
-                      </a:solidFill>
-                      <a:prstDash val="solid"/>
-                      <a:round/>
-                      <a:headEnd type="none" w="med" len="med"/>
-                      <a:tailEnd type="none" w="med" len="med"/>
-                    </a:lnB>
-                    <a:solidFill>
-                      <a:srgbClr val="FFFFFF"/>
-                    </a:solidFill>
-                  </a:tcPr>
-                </a:tc>
-                <a:tc>
-                  <a:txBody>
-                    <a:bodyPr/>
-                    <a:lstStyle/>
-                    <a:p>
-                      <a:pPr indent="0" marL="0">
-                        <a:buNone/>
-                      </a:pPr>
-                      <a:r>
-                        <a:rPr lang="en-US" sz="1250" dirty="0">
-                          <a:solidFill>
-                            <a:schemeClr val="accent4"/>
-                          </a:solidFill>
-                          <a:latin typeface="Courier New" pitchFamily="34" charset="0"/>
-                          <a:ea typeface="Courier New" pitchFamily="34" charset="-122"/>
-                          <a:cs typeface="Courier New" pitchFamily="34" charset="-120"/>
-                        </a:rPr>
-                        <a:t>spring.datasource.url=jdbc:h2:mem:upimesh</a:t>
-                      </a:r>
-                      <a:endParaRPr lang="en-US" sz="1250" dirty="0">
-                        <a:latin typeface="Courier New" charset="0"/>
-                        <a:ea typeface="Courier New" charset="0"/>
-                        <a:cs typeface="Courier New" charset="0"/>
-                      </a:endParaRPr>
-                    </a:p>
-                  </a:txBody>
-                  <a:tcPr marL="109728" marR="109728" marT="0" marB="0" anchor="ctr">
-                    <a:lnL w="6350" cap="flat" cmpd="sng" algn="ctr">
-                      <a:solidFill>
-                        <a:srgbClr val="C9D3DC"/>
-                      </a:solidFill>
-                      <a:prstDash val="solid"/>
-                      <a:round/>
-                      <a:headEnd type="none" w="med" len="med"/>
-                      <a:tailEnd type="none" w="med" len="med"/>
-                    </a:lnL>
-                    <a:lnR w="6350" cap="flat" cmpd="sng" algn="ctr">
-                      <a:solidFill>
-                        <a:srgbClr val="C9D3DC"/>
-                      </a:solidFill>
-                      <a:prstDash val="solid"/>
-                      <a:round/>
-                      <a:headEnd type="none" w="med" len="med"/>
-                      <a:tailEnd type="none" w="med" len="med"/>
-                    </a:lnR>
-                    <a:lnT w="6350" cap="flat" cmpd="sng" algn="ctr">
-                      <a:solidFill>
-                        <a:srgbClr val="C9D3DC"/>
-                      </a:solidFill>
-                      <a:prstDash val="solid"/>
-                      <a:round/>
-                      <a:headEnd type="none" w="med" len="med"/>
-                      <a:tailEnd type="none" w="med" len="med"/>
-                    </a:lnT>
-                    <a:lnB w="6350" cap="flat" cmpd="sng" algn="ctr">
-                      <a:solidFill>
-                        <a:srgbClr val="C9D3DC"/>
-                      </a:solidFill>
-                      <a:prstDash val="solid"/>
-                      <a:round/>
-                      <a:headEnd type="none" w="med" len="med"/>
-                      <a:tailEnd type="none" w="med" len="med"/>
-                    </a:lnB>
-                    <a:solidFill>
-                      <a:srgbClr val="FFFFFF"/>
-                    </a:solidFill>
-                  </a:tcPr>
-                </a:tc>
-                <a:tc>
-                  <a:txBody>
-                    <a:bodyPr/>
-                    <a:lstStyle/>
-                    <a:p>
-                      <a:pPr indent="0" marL="0">
-                        <a:buNone/>
-                      </a:pPr>
-                      <a:r>
-                        <a:rPr lang="en-US" sz="1400" dirty="0">
-                          <a:solidFill>
-                            <a:schemeClr val="tx1"/>
-                          </a:solidFill>
-                          <a:latin typeface="Calibri" pitchFamily="34" charset="0"/>
-                          <a:ea typeface="Calibri" pitchFamily="34" charset="-122"/>
-                          <a:cs typeface="Calibri" pitchFamily="34" charset="-120"/>
-                        </a:rPr>
-                        <a:t>Spring opens and manages connections</a:t>
-                      </a:r>
-                      <a:endParaRPr lang="en-US" sz="1400" dirty="0">
-                        <a:latin typeface="Calibri" charset="0"/>
-                        <a:ea typeface="Calibri" charset="0"/>
-                        <a:cs typeface="Calibri" charset="0"/>
-                      </a:endParaRPr>
-                    </a:p>
-                  </a:txBody>
-                  <a:tcPr marL="109728" marR="109728" marT="0" marB="0" anchor="ctr">
-                    <a:lnL w="6350" cap="flat" cmpd="sng" algn="ctr">
-                      <a:solidFill>
-                        <a:srgbClr val="C9D3DC"/>
-                      </a:solidFill>
-                      <a:prstDash val="solid"/>
-                      <a:round/>
-                      <a:headEnd type="none" w="med" len="med"/>
-                      <a:tailEnd type="none" w="med" len="med"/>
-                    </a:lnL>
-                    <a:lnR w="6350" cap="flat" cmpd="sng" algn="ctr">
-                      <a:solidFill>
-                        <a:srgbClr val="C9D3DC"/>
-                      </a:solidFill>
-                      <a:prstDash val="solid"/>
-                      <a:round/>
-                      <a:headEnd type="none" w="med" len="med"/>
-                      <a:tailEnd type="none" w="med" len="med"/>
-                    </a:lnR>
-                    <a:lnT w="6350" cap="flat" cmpd="sng" algn="ctr">
-                      <a:solidFill>
-                        <a:srgbClr val="C9D3DC"/>
-                      </a:solidFill>
-                      <a:prstDash val="solid"/>
-                      <a:round/>
-                      <a:headEnd type="none" w="med" len="med"/>
-                      <a:tailEnd type="none" w="med" len="med"/>
-                    </a:lnT>
-                    <a:lnB w="6350" cap="flat" cmpd="sng" algn="ctr">
-                      <a:solidFill>
-                        <a:srgbClr val="C9D3DC"/>
-                      </a:solidFill>
-                      <a:prstDash val="solid"/>
-                      <a:round/>
-                      <a:headEnd type="none" w="med" len="med"/>
-                      <a:tailEnd type="none" w="med" len="med"/>
-                    </a:lnB>
-                    <a:solidFill>
-                      <a:srgbClr val="FFFFFF"/>
-                    </a:solidFill>
-                  </a:tcPr>
-                </a:tc>
-              </a:tr>
-              <a:tr h="384048">
-                <a:tc>
-                  <a:txBody>
-                    <a:bodyPr/>
-                    <a:lstStyle/>
-                    <a:p>
-                      <a:pPr indent="0" marL="0">
-                        <a:buNone/>
-                      </a:pPr>
-                      <a:r>
-                        <a:rPr lang="en-US" sz="1400" dirty="0">
-                          <a:solidFill>
-                            <a:schemeClr val="tx1"/>
-                          </a:solidFill>
-                          <a:latin typeface="Calibri" pitchFamily="34" charset="0"/>
-                          <a:ea typeface="Calibri" pitchFamily="34" charset="-122"/>
-                          <a:cs typeface="Calibri" pitchFamily="34" charset="-120"/>
-                        </a:rPr>
-                        <a:t>Insert</a:t>
-                      </a:r>
-                      <a:endParaRPr lang="en-US" sz="1400" dirty="0">
-                        <a:latin typeface="Calibri" charset="0"/>
-                        <a:ea typeface="Calibri" charset="0"/>
-                        <a:cs typeface="Calibri" charset="0"/>
-                      </a:endParaRPr>
-                    </a:p>
-                  </a:txBody>
-                  <a:tcPr marL="109728" marR="109728" marT="0" marB="0" anchor="ctr">
-                    <a:lnL w="6350" cap="flat" cmpd="sng" algn="ctr">
-                      <a:solidFill>
-                        <a:srgbClr val="C9D3DC"/>
-                      </a:solidFill>
-                      <a:prstDash val="solid"/>
-                      <a:round/>
-                      <a:headEnd type="none" w="med" len="med"/>
-                      <a:tailEnd type="none" w="med" len="med"/>
-                    </a:lnL>
-                    <a:lnR w="6350" cap="flat" cmpd="sng" algn="ctr">
-                      <a:solidFill>
-                        <a:srgbClr val="C9D3DC"/>
-                      </a:solidFill>
-                      <a:prstDash val="solid"/>
-                      <a:round/>
-                      <a:headEnd type="none" w="med" len="med"/>
-                      <a:tailEnd type="none" w="med" len="med"/>
-                    </a:lnR>
-                    <a:lnT w="6350" cap="flat" cmpd="sng" algn="ctr">
-                      <a:solidFill>
-                        <a:srgbClr val="C9D3DC"/>
-                      </a:solidFill>
-                      <a:prstDash val="solid"/>
-                      <a:round/>
-                      <a:headEnd type="none" w="med" len="med"/>
-                      <a:tailEnd type="none" w="med" len="med"/>
-                    </a:lnT>
-                    <a:lnB w="6350" cap="flat" cmpd="sng" algn="ctr">
-                      <a:solidFill>
-                        <a:srgbClr val="C9D3DC"/>
-                      </a:solidFill>
-                      <a:prstDash val="solid"/>
-                      <a:round/>
-                      <a:headEnd type="none" w="med" len="med"/>
-                      <a:tailEnd type="none" w="med" len="med"/>
-                    </a:lnB>
-                    <a:solidFill>
-                      <a:srgbClr val="F4F8F7"/>
-                    </a:solidFill>
-                  </a:tcPr>
-                </a:tc>
-                <a:tc>
-                  <a:txBody>
-                    <a:bodyPr/>
-                    <a:lstStyle/>
-                    <a:p>
-                      <a:pPr indent="0" marL="0">
-                        <a:buNone/>
-                      </a:pPr>
-                      <a:r>
-                        <a:rPr lang="en-US" sz="1250" dirty="0">
-                          <a:solidFill>
-                            <a:schemeClr val="accent4"/>
-                          </a:solidFill>
-                          <a:latin typeface="Courier New" pitchFamily="34" charset="0"/>
-                          <a:ea typeface="Courier New" pitchFamily="34" charset="-122"/>
-                          <a:cs typeface="Courier New" pitchFamily="34" charset="-120"/>
-                        </a:rPr>
-                        <a:t>transactions.save(tx)</a:t>
-                      </a:r>
-                      <a:endParaRPr lang="en-US" sz="1250" dirty="0">
-                        <a:latin typeface="Courier New" charset="0"/>
-                        <a:ea typeface="Courier New" charset="0"/>
-                        <a:cs typeface="Courier New" charset="0"/>
-                      </a:endParaRPr>
-                    </a:p>
-                  </a:txBody>
-                  <a:tcPr marL="109728" marR="109728" marT="0" marB="0" anchor="ctr">
-                    <a:lnL w="6350" cap="flat" cmpd="sng" algn="ctr">
-                      <a:solidFill>
-                        <a:srgbClr val="C9D3DC"/>
-                      </a:solidFill>
-                      <a:prstDash val="solid"/>
-                      <a:round/>
-                      <a:headEnd type="none" w="med" len="med"/>
-                      <a:tailEnd type="none" w="med" len="med"/>
-                    </a:lnL>
-                    <a:lnR w="6350" cap="flat" cmpd="sng" algn="ctr">
-                      <a:solidFill>
-                        <a:srgbClr val="C9D3DC"/>
-                      </a:solidFill>
-                      <a:prstDash val="solid"/>
-                      <a:round/>
-                      <a:headEnd type="none" w="med" len="med"/>
-                      <a:tailEnd type="none" w="med" len="med"/>
-                    </a:lnR>
-                    <a:lnT w="6350" cap="flat" cmpd="sng" algn="ctr">
-                      <a:solidFill>
-                        <a:srgbClr val="C9D3DC"/>
-                      </a:solidFill>
-                      <a:prstDash val="solid"/>
-                      <a:round/>
-                      <a:headEnd type="none" w="med" len="med"/>
-                      <a:tailEnd type="none" w="med" len="med"/>
-                    </a:lnT>
-                    <a:lnB w="6350" cap="flat" cmpd="sng" algn="ctr">
-                      <a:solidFill>
-                        <a:srgbClr val="C9D3DC"/>
-                      </a:solidFill>
-                      <a:prstDash val="solid"/>
-                      <a:round/>
-                      <a:headEnd type="none" w="med" len="med"/>
-                      <a:tailEnd type="none" w="med" len="med"/>
-                    </a:lnB>
-                    <a:solidFill>
-                      <a:srgbClr val="F4F8F7"/>
-                    </a:solidFill>
-                  </a:tcPr>
-                </a:tc>
-                <a:tc>
-                  <a:txBody>
-                    <a:bodyPr/>
-                    <a:lstStyle/>
-                    <a:p>
-                      <a:pPr indent="0" marL="0">
-                        <a:buNone/>
-                      </a:pPr>
-                      <a:r>
-                        <a:rPr lang="en-US" sz="1400" dirty="0">
-                          <a:solidFill>
-                            <a:schemeClr val="tx1"/>
-                          </a:solidFill>
-                          <a:latin typeface="Calibri" pitchFamily="34" charset="0"/>
-                          <a:ea typeface="Calibri" pitchFamily="34" charset="-122"/>
-                          <a:cs typeface="Calibri" pitchFamily="34" charset="-120"/>
-                        </a:rPr>
-                        <a:t>INSERT INTO transactions…</a:t>
-                      </a:r>
-                      <a:endParaRPr lang="en-US" sz="1400" dirty="0">
-                        <a:latin typeface="Calibri" charset="0"/>
-                        <a:ea typeface="Calibri" charset="0"/>
-                        <a:cs typeface="Calibri" charset="0"/>
-                      </a:endParaRPr>
-                    </a:p>
-                  </a:txBody>
-                  <a:tcPr marL="109728" marR="109728" marT="0" marB="0" anchor="ctr">
-                    <a:lnL w="6350" cap="flat" cmpd="sng" algn="ctr">
-                      <a:solidFill>
-                        <a:srgbClr val="C9D3DC"/>
-                      </a:solidFill>
-                      <a:prstDash val="solid"/>
-                      <a:round/>
-                      <a:headEnd type="none" w="med" len="med"/>
-                      <a:tailEnd type="none" w="med" len="med"/>
-                    </a:lnL>
-                    <a:lnR w="6350" cap="flat" cmpd="sng" algn="ctr">
-                      <a:solidFill>
-                        <a:srgbClr val="C9D3DC"/>
-                      </a:solidFill>
-                      <a:prstDash val="solid"/>
-                      <a:round/>
-                      <a:headEnd type="none" w="med" len="med"/>
-                      <a:tailEnd type="none" w="med" len="med"/>
-                    </a:lnR>
-                    <a:lnT w="6350" cap="flat" cmpd="sng" algn="ctr">
-                      <a:solidFill>
-                        <a:srgbClr val="C9D3DC"/>
-                      </a:solidFill>
-                      <a:prstDash val="solid"/>
-                      <a:round/>
-                      <a:headEnd type="none" w="med" len="med"/>
-                      <a:tailEnd type="none" w="med" len="med"/>
-                    </a:lnT>
-                    <a:lnB w="6350" cap="flat" cmpd="sng" algn="ctr">
-                      <a:solidFill>
-                        <a:srgbClr val="C9D3DC"/>
-                      </a:solidFill>
-                      <a:prstDash val="solid"/>
-                      <a:round/>
-                      <a:headEnd type="none" w="med" len="med"/>
-                      <a:tailEnd type="none" w="med" len="med"/>
-                    </a:lnB>
-                    <a:solidFill>
-                      <a:srgbClr val="F4F8F7"/>
-                    </a:solidFill>
-                  </a:tcPr>
-                </a:tc>
-              </a:tr>
-              <a:tr h="384048">
-                <a:tc>
-                  <a:txBody>
-                    <a:bodyPr/>
-                    <a:lstStyle/>
-                    <a:p>
-                      <a:pPr indent="0" marL="0">
-                        <a:buNone/>
-                      </a:pPr>
-                      <a:r>
-                        <a:rPr lang="en-US" sz="1400" dirty="0">
-                          <a:solidFill>
-                            <a:schemeClr val="tx1"/>
-                          </a:solidFill>
-                          <a:latin typeface="Calibri" pitchFamily="34" charset="0"/>
-                          <a:ea typeface="Calibri" pitchFamily="34" charset="-122"/>
-                          <a:cs typeface="Calibri" pitchFamily="34" charset="-120"/>
-                        </a:rPr>
-                        <a:t>Read one / all</a:t>
-                      </a:r>
-                      <a:endParaRPr lang="en-US" sz="1400" dirty="0">
-                        <a:latin typeface="Calibri" charset="0"/>
-                        <a:ea typeface="Calibri" charset="0"/>
-                        <a:cs typeface="Calibri" charset="0"/>
-                      </a:endParaRPr>
-                    </a:p>
-                  </a:txBody>
-                  <a:tcPr marL="109728" marR="109728" marT="0" marB="0" anchor="ctr">
-                    <a:lnL w="6350" cap="flat" cmpd="sng" algn="ctr">
-                      <a:solidFill>
-                        <a:srgbClr val="C9D3DC"/>
-                      </a:solidFill>
-                      <a:prstDash val="solid"/>
-                      <a:round/>
-                      <a:headEnd type="none" w="med" len="med"/>
-                      <a:tailEnd type="none" w="med" len="med"/>
-                    </a:lnL>
-                    <a:lnR w="6350" cap="flat" cmpd="sng" algn="ctr">
-                      <a:solidFill>
-                        <a:srgbClr val="C9D3DC"/>
-                      </a:solidFill>
-                      <a:prstDash val="solid"/>
-                      <a:round/>
-                      <a:headEnd type="none" w="med" len="med"/>
-                      <a:tailEnd type="none" w="med" len="med"/>
-                    </a:lnR>
-                    <a:lnT w="6350" cap="flat" cmpd="sng" algn="ctr">
-                      <a:solidFill>
-                        <a:srgbClr val="C9D3DC"/>
-                      </a:solidFill>
-                      <a:prstDash val="solid"/>
-                      <a:round/>
-                      <a:headEnd type="none" w="med" len="med"/>
-                      <a:tailEnd type="none" w="med" len="med"/>
-                    </a:lnT>
-                    <a:lnB w="6350" cap="flat" cmpd="sng" algn="ctr">
-                      <a:solidFill>
-                        <a:srgbClr val="C9D3DC"/>
-                      </a:solidFill>
-                      <a:prstDash val="solid"/>
-                      <a:round/>
-                      <a:headEnd type="none" w="med" len="med"/>
-                      <a:tailEnd type="none" w="med" len="med"/>
-                    </a:lnB>
-                    <a:solidFill>
-                      <a:srgbClr val="FFFFFF"/>
-                    </a:solidFill>
-                  </a:tcPr>
-                </a:tc>
-                <a:tc>
-                  <a:txBody>
-                    <a:bodyPr/>
-                    <a:lstStyle/>
-                    <a:p>
-                      <a:pPr indent="0" marL="0">
-                        <a:buNone/>
-                      </a:pPr>
-                      <a:r>
-                        <a:rPr lang="en-US" sz="1250" dirty="0">
-                          <a:solidFill>
-                            <a:schemeClr val="accent4"/>
-                          </a:solidFill>
-                          <a:latin typeface="Courier New" pitchFamily="34" charset="0"/>
-                          <a:ea typeface="Courier New" pitchFamily="34" charset="-122"/>
-                          <a:cs typeface="Courier New" pitchFamily="34" charset="-120"/>
-                        </a:rPr>
-                        <a:t>accounts.findById(vpa), findAll()</a:t>
-                      </a:r>
-                      <a:endParaRPr lang="en-US" sz="1250" dirty="0">
-                        <a:latin typeface="Courier New" charset="0"/>
-                        <a:ea typeface="Courier New" charset="0"/>
-                        <a:cs typeface="Courier New" charset="0"/>
-                      </a:endParaRPr>
-                    </a:p>
-                  </a:txBody>
-                  <a:tcPr marL="109728" marR="109728" marT="0" marB="0" anchor="ctr">
-                    <a:lnL w="6350" cap="flat" cmpd="sng" algn="ctr">
-                      <a:solidFill>
-                        <a:srgbClr val="C9D3DC"/>
-                      </a:solidFill>
-                      <a:prstDash val="solid"/>
-                      <a:round/>
-                      <a:headEnd type="none" w="med" len="med"/>
-                      <a:tailEnd type="none" w="med" len="med"/>
-                    </a:lnL>
-                    <a:lnR w="6350" cap="flat" cmpd="sng" algn="ctr">
-                      <a:solidFill>
-                        <a:srgbClr val="C9D3DC"/>
-                      </a:solidFill>
-                      <a:prstDash val="solid"/>
-                      <a:round/>
-                      <a:headEnd type="none" w="med" len="med"/>
-                      <a:tailEnd type="none" w="med" len="med"/>
-                    </a:lnR>
-                    <a:lnT w="6350" cap="flat" cmpd="sng" algn="ctr">
-                      <a:solidFill>
-                        <a:srgbClr val="C9D3DC"/>
-                      </a:solidFill>
-                      <a:prstDash val="solid"/>
-                      <a:round/>
-                      <a:headEnd type="none" w="med" len="med"/>
-                      <a:tailEnd type="none" w="med" len="med"/>
-                    </a:lnT>
-                    <a:lnB w="6350" cap="flat" cmpd="sng" algn="ctr">
-                      <a:solidFill>
-                        <a:srgbClr val="C9D3DC"/>
-                      </a:solidFill>
-                      <a:prstDash val="solid"/>
-                      <a:round/>
-                      <a:headEnd type="none" w="med" len="med"/>
-                      <a:tailEnd type="none" w="med" len="med"/>
-                    </a:lnB>
-                    <a:solidFill>
-                      <a:srgbClr val="FFFFFF"/>
-                    </a:solidFill>
-                  </a:tcPr>
-                </a:tc>
-                <a:tc>
-                  <a:txBody>
-                    <a:bodyPr/>
-                    <a:lstStyle/>
-                    <a:p>
-                      <a:pPr indent="0" marL="0">
-                        <a:buNone/>
-                      </a:pPr>
-                      <a:r>
-                        <a:rPr lang="en-US" sz="1400" dirty="0">
-                          <a:solidFill>
-                            <a:schemeClr val="tx1"/>
-                          </a:solidFill>
-                          <a:latin typeface="Calibri" pitchFamily="34" charset="0"/>
-                          <a:ea typeface="Calibri" pitchFamily="34" charset="-122"/>
-                          <a:cs typeface="Calibri" pitchFamily="34" charset="-120"/>
-                        </a:rPr>
-                        <a:t>SELECT … FROM accounts</a:t>
-                      </a:r>
-                      <a:endParaRPr lang="en-US" sz="1400" dirty="0">
-                        <a:latin typeface="Calibri" charset="0"/>
-                        <a:ea typeface="Calibri" charset="0"/>
-                        <a:cs typeface="Calibri" charset="0"/>
-                      </a:endParaRPr>
-                    </a:p>
-                  </a:txBody>
-                  <a:tcPr marL="109728" marR="109728" marT="0" marB="0" anchor="ctr">
-                    <a:lnL w="6350" cap="flat" cmpd="sng" algn="ctr">
-                      <a:solidFill>
-                        <a:srgbClr val="C9D3DC"/>
-                      </a:solidFill>
-                      <a:prstDash val="solid"/>
-                      <a:round/>
-                      <a:headEnd type="none" w="med" len="med"/>
-                      <a:tailEnd type="none" w="med" len="med"/>
-                    </a:lnL>
-                    <a:lnR w="6350" cap="flat" cmpd="sng" algn="ctr">
-                      <a:solidFill>
-                        <a:srgbClr val="C9D3DC"/>
-                      </a:solidFill>
-                      <a:prstDash val="solid"/>
-                      <a:round/>
-                      <a:headEnd type="none" w="med" len="med"/>
-                      <a:tailEnd type="none" w="med" len="med"/>
-                    </a:lnR>
-                    <a:lnT w="6350" cap="flat" cmpd="sng" algn="ctr">
-                      <a:solidFill>
-                        <a:srgbClr val="C9D3DC"/>
-                      </a:solidFill>
-                      <a:prstDash val="solid"/>
-                      <a:round/>
-                      <a:headEnd type="none" w="med" len="med"/>
-                      <a:tailEnd type="none" w="med" len="med"/>
-                    </a:lnT>
-                    <a:lnB w="6350" cap="flat" cmpd="sng" algn="ctr">
-                      <a:solidFill>
-                        <a:srgbClr val="C9D3DC"/>
-                      </a:solidFill>
-                      <a:prstDash val="solid"/>
-                      <a:round/>
-                      <a:headEnd type="none" w="med" len="med"/>
-                      <a:tailEnd type="none" w="med" len="med"/>
-                    </a:lnB>
-                    <a:solidFill>
-                      <a:srgbClr val="FFFFFF"/>
-                    </a:solidFill>
-                  </a:tcPr>
-                </a:tc>
-              </a:tr>
-              <a:tr h="384048">
-                <a:tc>
-                  <a:txBody>
-                    <a:bodyPr/>
-                    <a:lstStyle/>
-                    <a:p>
-                      <a:pPr indent="0" marL="0">
-                        <a:buNone/>
-                      </a:pPr>
-                      <a:r>
-                        <a:rPr lang="en-US" sz="1400" dirty="0">
-                          <a:solidFill>
-                            <a:schemeClr val="tx1"/>
-                          </a:solidFill>
-                          <a:latin typeface="Calibri" pitchFamily="34" charset="0"/>
-                          <a:ea typeface="Calibri" pitchFamily="34" charset="-122"/>
-                          <a:cs typeface="Calibri" pitchFamily="34" charset="-120"/>
-                        </a:rPr>
-                        <a:t>Latest 20</a:t>
-                      </a:r>
-                      <a:endParaRPr lang="en-US" sz="1400" dirty="0">
-                        <a:latin typeface="Calibri" charset="0"/>
-                        <a:ea typeface="Calibri" charset="0"/>
-                        <a:cs typeface="Calibri" charset="0"/>
-                      </a:endParaRPr>
-                    </a:p>
-                  </a:txBody>
-                  <a:tcPr marL="109728" marR="109728" marT="0" marB="0" anchor="ctr">
-                    <a:lnL w="6350" cap="flat" cmpd="sng" algn="ctr">
-                      <a:solidFill>
-                        <a:srgbClr val="C9D3DC"/>
-                      </a:solidFill>
-                      <a:prstDash val="solid"/>
-                      <a:round/>
-                      <a:headEnd type="none" w="med" len="med"/>
-                      <a:tailEnd type="none" w="med" len="med"/>
-                    </a:lnL>
-                    <a:lnR w="6350" cap="flat" cmpd="sng" algn="ctr">
-                      <a:solidFill>
-                        <a:srgbClr val="C9D3DC"/>
-                      </a:solidFill>
-                      <a:prstDash val="solid"/>
-                      <a:round/>
-                      <a:headEnd type="none" w="med" len="med"/>
-                      <a:tailEnd type="none" w="med" len="med"/>
-                    </a:lnR>
-                    <a:lnT w="6350" cap="flat" cmpd="sng" algn="ctr">
-                      <a:solidFill>
-                        <a:srgbClr val="C9D3DC"/>
-                      </a:solidFill>
-                      <a:prstDash val="solid"/>
-                      <a:round/>
-                      <a:headEnd type="none" w="med" len="med"/>
-                      <a:tailEnd type="none" w="med" len="med"/>
-                    </a:lnT>
-                    <a:lnB w="6350" cap="flat" cmpd="sng" algn="ctr">
-                      <a:solidFill>
-                        <a:srgbClr val="C9D3DC"/>
-                      </a:solidFill>
-                      <a:prstDash val="solid"/>
-                      <a:round/>
-                      <a:headEnd type="none" w="med" len="med"/>
-                      <a:tailEnd type="none" w="med" len="med"/>
-                    </a:lnB>
-                    <a:solidFill>
-                      <a:srgbClr val="F4F8F7"/>
-                    </a:solidFill>
-                  </a:tcPr>
-                </a:tc>
-                <a:tc>
-                  <a:txBody>
-                    <a:bodyPr/>
-                    <a:lstStyle/>
-                    <a:p>
-                      <a:pPr indent="0" marL="0">
-                        <a:buNone/>
-                      </a:pPr>
-                      <a:r>
-                        <a:rPr lang="en-US" sz="1250" dirty="0">
-                          <a:solidFill>
-                            <a:schemeClr val="accent4"/>
-                          </a:solidFill>
-                          <a:latin typeface="Courier New" pitchFamily="34" charset="0"/>
-                          <a:ea typeface="Courier New" pitchFamily="34" charset="-122"/>
-                          <a:cs typeface="Courier New" pitchFamily="34" charset="-120"/>
-                        </a:rPr>
-                        <a:t>findTop20ByOrderByIdDesc()</a:t>
-                      </a:r>
-                      <a:endParaRPr lang="en-US" sz="1250" dirty="0">
-                        <a:latin typeface="Courier New" charset="0"/>
-                        <a:ea typeface="Courier New" charset="0"/>
-                        <a:cs typeface="Courier New" charset="0"/>
-                      </a:endParaRPr>
-                    </a:p>
-                  </a:txBody>
-                  <a:tcPr marL="109728" marR="109728" marT="0" marB="0" anchor="ctr">
-                    <a:lnL w="6350" cap="flat" cmpd="sng" algn="ctr">
-                      <a:solidFill>
-                        <a:srgbClr val="C9D3DC"/>
-                      </a:solidFill>
-                      <a:prstDash val="solid"/>
-                      <a:round/>
-                      <a:headEnd type="none" w="med" len="med"/>
-                      <a:tailEnd type="none" w="med" len="med"/>
-                    </a:lnL>
-                    <a:lnR w="6350" cap="flat" cmpd="sng" algn="ctr">
-                      <a:solidFill>
-                        <a:srgbClr val="C9D3DC"/>
-                      </a:solidFill>
-                      <a:prstDash val="solid"/>
-                      <a:round/>
-                      <a:headEnd type="none" w="med" len="med"/>
-                      <a:tailEnd type="none" w="med" len="med"/>
-                    </a:lnR>
-                    <a:lnT w="6350" cap="flat" cmpd="sng" algn="ctr">
-                      <a:solidFill>
-                        <a:srgbClr val="C9D3DC"/>
-                      </a:solidFill>
-                      <a:prstDash val="solid"/>
-                      <a:round/>
-                      <a:headEnd type="none" w="med" len="med"/>
-                      <a:tailEnd type="none" w="med" len="med"/>
-                    </a:lnT>
-                    <a:lnB w="6350" cap="flat" cmpd="sng" algn="ctr">
-                      <a:solidFill>
-                        <a:srgbClr val="C9D3DC"/>
-                      </a:solidFill>
-                      <a:prstDash val="solid"/>
-                      <a:round/>
-                      <a:headEnd type="none" w="med" len="med"/>
-                      <a:tailEnd type="none" w="med" len="med"/>
-                    </a:lnB>
-                    <a:solidFill>
-                      <a:srgbClr val="F4F8F7"/>
-                    </a:solidFill>
-                  </a:tcPr>
-                </a:tc>
-                <a:tc>
-                  <a:txBody>
-                    <a:bodyPr/>
-                    <a:lstStyle/>
-                    <a:p>
-                      <a:pPr indent="0" marL="0">
-                        <a:buNone/>
-                      </a:pPr>
-                      <a:r>
-                        <a:rPr lang="en-US" sz="1400" dirty="0">
-                          <a:solidFill>
-                            <a:schemeClr val="tx1"/>
-                          </a:solidFill>
-                          <a:latin typeface="Calibri" pitchFamily="34" charset="0"/>
-                          <a:ea typeface="Calibri" pitchFamily="34" charset="-122"/>
-                          <a:cs typeface="Calibri" pitchFamily="34" charset="-120"/>
-                        </a:rPr>
-                        <a:t>SELECT … ORDER BY id DESC, 20 rows</a:t>
-                      </a:r>
-                      <a:endParaRPr lang="en-US" sz="1400" dirty="0">
-                        <a:latin typeface="Calibri" charset="0"/>
-                        <a:ea typeface="Calibri" charset="0"/>
-                        <a:cs typeface="Calibri" charset="0"/>
-                      </a:endParaRPr>
-                    </a:p>
-                  </a:txBody>
-                  <a:tcPr marL="109728" marR="109728" marT="0" marB="0" anchor="ctr">
-                    <a:lnL w="6350" cap="flat" cmpd="sng" algn="ctr">
-                      <a:solidFill>
-                        <a:srgbClr val="C9D3DC"/>
-                      </a:solidFill>
-                      <a:prstDash val="solid"/>
-                      <a:round/>
-                      <a:headEnd type="none" w="med" len="med"/>
-                      <a:tailEnd type="none" w="med" len="med"/>
-                    </a:lnL>
-                    <a:lnR w="6350" cap="flat" cmpd="sng" algn="ctr">
-                      <a:solidFill>
-                        <a:srgbClr val="C9D3DC"/>
-                      </a:solidFill>
-                      <a:prstDash val="solid"/>
-                      <a:round/>
-                      <a:headEnd type="none" w="med" len="med"/>
-                      <a:tailEnd type="none" w="med" len="med"/>
-                    </a:lnR>
-                    <a:lnT w="6350" cap="flat" cmpd="sng" algn="ctr">
-                      <a:solidFill>
-                        <a:srgbClr val="C9D3DC"/>
-                      </a:solidFill>
-                      <a:prstDash val="solid"/>
-                      <a:round/>
-                      <a:headEnd type="none" w="med" len="med"/>
-                      <a:tailEnd type="none" w="med" len="med"/>
-                    </a:lnT>
-                    <a:lnB w="6350" cap="flat" cmpd="sng" algn="ctr">
-                      <a:solidFill>
-                        <a:srgbClr val="C9D3DC"/>
-                      </a:solidFill>
-                      <a:prstDash val="solid"/>
-                      <a:round/>
-                      <a:headEnd type="none" w="med" len="med"/>
-                      <a:tailEnd type="none" w="med" len="med"/>
-                    </a:lnB>
-                    <a:solidFill>
-                      <a:srgbClr val="F4F8F7"/>
-                    </a:solidFill>
-                  </a:tcPr>
-                </a:tc>
-              </a:tr>
-              <a:tr h="384048">
-                <a:tc>
-                  <a:txBody>
-                    <a:bodyPr/>
-                    <a:lstStyle/>
-                    <a:p>
-                      <a:pPr indent="0" marL="0">
-                        <a:buNone/>
-                      </a:pPr>
-                      <a:r>
-                        <a:rPr lang="en-US" sz="1400" dirty="0">
-                          <a:solidFill>
-                            <a:schemeClr val="tx1"/>
-                          </a:solidFill>
-                          <a:latin typeface="Calibri" pitchFamily="34" charset="0"/>
-                          <a:ea typeface="Calibri" pitchFamily="34" charset="-122"/>
-                          <a:cs typeface="Calibri" pitchFamily="34" charset="-120"/>
-                        </a:rPr>
-                        <a:t>Update</a:t>
-                      </a:r>
-                      <a:endParaRPr lang="en-US" sz="1400" dirty="0">
-                        <a:latin typeface="Calibri" charset="0"/>
-                        <a:ea typeface="Calibri" charset="0"/>
-                        <a:cs typeface="Calibri" charset="0"/>
-                      </a:endParaRPr>
-                    </a:p>
-                  </a:txBody>
-                  <a:tcPr marL="109728" marR="109728" marT="0" marB="0" anchor="ctr">
-                    <a:lnL w="6350" cap="flat" cmpd="sng" algn="ctr">
-                      <a:solidFill>
-                        <a:srgbClr val="C9D3DC"/>
-                      </a:solidFill>
-                      <a:prstDash val="solid"/>
-                      <a:round/>
-                      <a:headEnd type="none" w="med" len="med"/>
-                      <a:tailEnd type="none" w="med" len="med"/>
-                    </a:lnL>
-                    <a:lnR w="6350" cap="flat" cmpd="sng" algn="ctr">
-                      <a:solidFill>
-                        <a:srgbClr val="C9D3DC"/>
-                      </a:solidFill>
-                      <a:prstDash val="solid"/>
-                      <a:round/>
-                      <a:headEnd type="none" w="med" len="med"/>
-                      <a:tailEnd type="none" w="med" len="med"/>
-                    </a:lnR>
-                    <a:lnT w="6350" cap="flat" cmpd="sng" algn="ctr">
-                      <a:solidFill>
-                        <a:srgbClr val="C9D3DC"/>
-                      </a:solidFill>
-                      <a:prstDash val="solid"/>
-                      <a:round/>
-                      <a:headEnd type="none" w="med" len="med"/>
-                      <a:tailEnd type="none" w="med" len="med"/>
-                    </a:lnT>
-                    <a:lnB w="6350" cap="flat" cmpd="sng" algn="ctr">
-                      <a:solidFill>
-                        <a:srgbClr val="C9D3DC"/>
-                      </a:solidFill>
-                      <a:prstDash val="solid"/>
-                      <a:round/>
-                      <a:headEnd type="none" w="med" len="med"/>
-                      <a:tailEnd type="none" w="med" len="med"/>
-                    </a:lnB>
-                    <a:solidFill>
-                      <a:srgbClr val="FFFFFF"/>
-                    </a:solidFill>
-                  </a:tcPr>
-                </a:tc>
-                <a:tc>
-                  <a:txBody>
-                    <a:bodyPr/>
-                    <a:lstStyle/>
-                    <a:p>
-                      <a:pPr indent="0" marL="0">
-                        <a:buNone/>
-                      </a:pPr>
-                      <a:r>
-                        <a:rPr lang="en-US" sz="1250" dirty="0">
-                          <a:solidFill>
-                            <a:schemeClr val="accent4"/>
-                          </a:solidFill>
-                          <a:latin typeface="Courier New" pitchFamily="34" charset="0"/>
-                          <a:ea typeface="Courier New" pitchFamily="34" charset="-122"/>
-                          <a:cs typeface="Courier New" pitchFamily="34" charset="-120"/>
-                        </a:rPr>
-                        <a:t>accounts.save(sender)</a:t>
-                      </a:r>
-                      <a:endParaRPr lang="en-US" sz="1250" dirty="0">
-                        <a:latin typeface="Courier New" charset="0"/>
-                        <a:ea typeface="Courier New" charset="0"/>
-                        <a:cs typeface="Courier New" charset="0"/>
-                      </a:endParaRPr>
-                    </a:p>
-                  </a:txBody>
-                  <a:tcPr marL="109728" marR="109728" marT="0" marB="0" anchor="ctr">
-                    <a:lnL w="6350" cap="flat" cmpd="sng" algn="ctr">
-                      <a:solidFill>
-                        <a:srgbClr val="C9D3DC"/>
-                      </a:solidFill>
-                      <a:prstDash val="solid"/>
-                      <a:round/>
-                      <a:headEnd type="none" w="med" len="med"/>
-                      <a:tailEnd type="none" w="med" len="med"/>
-                    </a:lnL>
-                    <a:lnR w="6350" cap="flat" cmpd="sng" algn="ctr">
-                      <a:solidFill>
-                        <a:srgbClr val="C9D3DC"/>
-                      </a:solidFill>
-                      <a:prstDash val="solid"/>
-                      <a:round/>
-                      <a:headEnd type="none" w="med" len="med"/>
-                      <a:tailEnd type="none" w="med" len="med"/>
-                    </a:lnR>
-                    <a:lnT w="6350" cap="flat" cmpd="sng" algn="ctr">
-                      <a:solidFill>
-                        <a:srgbClr val="C9D3DC"/>
-                      </a:solidFill>
-                      <a:prstDash val="solid"/>
-                      <a:round/>
-                      <a:headEnd type="none" w="med" len="med"/>
-                      <a:tailEnd type="none" w="med" len="med"/>
-                    </a:lnT>
-                    <a:lnB w="6350" cap="flat" cmpd="sng" algn="ctr">
-                      <a:solidFill>
-                        <a:srgbClr val="C9D3DC"/>
-                      </a:solidFill>
-                      <a:prstDash val="solid"/>
-                      <a:round/>
-                      <a:headEnd type="none" w="med" len="med"/>
-                      <a:tailEnd type="none" w="med" len="med"/>
-                    </a:lnB>
-                    <a:solidFill>
-                      <a:srgbClr val="FFFFFF"/>
-                    </a:solidFill>
-                  </a:tcPr>
-                </a:tc>
-                <a:tc>
-                  <a:txBody>
-                    <a:bodyPr/>
-                    <a:lstStyle/>
-                    <a:p>
-                      <a:pPr indent="0" marL="0">
-                        <a:buNone/>
-                      </a:pPr>
-                      <a:r>
-                        <a:rPr lang="en-US" sz="1400" dirty="0">
-                          <a:solidFill>
-                            <a:schemeClr val="tx1"/>
-                          </a:solidFill>
-                          <a:latin typeface="Calibri" pitchFamily="34" charset="0"/>
-                          <a:ea typeface="Calibri" pitchFamily="34" charset="-122"/>
-                          <a:cs typeface="Calibri" pitchFamily="34" charset="-120"/>
-                        </a:rPr>
-                        <a:t>UPDATE … WHERE id = ? AND version = ?</a:t>
-                      </a:r>
-                      <a:endParaRPr lang="en-US" sz="1400" dirty="0">
-                        <a:latin typeface="Calibri" charset="0"/>
-                        <a:ea typeface="Calibri" charset="0"/>
-                        <a:cs typeface="Calibri" charset="0"/>
-                      </a:endParaRPr>
-                    </a:p>
-                  </a:txBody>
-                  <a:tcPr marL="109728" marR="109728" marT="0" marB="0" anchor="ctr">
-                    <a:lnL w="6350" cap="flat" cmpd="sng" algn="ctr">
-                      <a:solidFill>
-                        <a:srgbClr val="C9D3DC"/>
-                      </a:solidFill>
-                      <a:prstDash val="solid"/>
-                      <a:round/>
-                      <a:headEnd type="none" w="med" len="med"/>
-                      <a:tailEnd type="none" w="med" len="med"/>
-                    </a:lnL>
-                    <a:lnR w="6350" cap="flat" cmpd="sng" algn="ctr">
-                      <a:solidFill>
-                        <a:srgbClr val="C9D3DC"/>
-                      </a:solidFill>
-                      <a:prstDash val="solid"/>
-                      <a:round/>
-                      <a:headEnd type="none" w="med" len="med"/>
-                      <a:tailEnd type="none" w="med" len="med"/>
-                    </a:lnR>
-                    <a:lnT w="6350" cap="flat" cmpd="sng" algn="ctr">
-                      <a:solidFill>
-                        <a:srgbClr val="C9D3DC"/>
-                      </a:solidFill>
-                      <a:prstDash val="solid"/>
-                      <a:round/>
-                      <a:headEnd type="none" w="med" len="med"/>
-                      <a:tailEnd type="none" w="med" len="med"/>
-                    </a:lnT>
-                    <a:lnB w="6350" cap="flat" cmpd="sng" algn="ctr">
-                      <a:solidFill>
-                        <a:srgbClr val="C9D3DC"/>
-                      </a:solidFill>
-                      <a:prstDash val="solid"/>
-                      <a:round/>
-                      <a:headEnd type="none" w="med" len="med"/>
-                      <a:tailEnd type="none" w="med" len="med"/>
-                    </a:lnB>
-                    <a:solidFill>
-                      <a:srgbClr val="FFFFFF"/>
-                    </a:solidFill>
-                  </a:tcPr>
-                </a:tc>
-              </a:tr>
-            </a:tbl>
-          </a:graphicData>
-        </a:graphic>
-      </p:graphicFrame>
-      <p:sp>
-        <p:nvSpPr>
-          <p:cNvPr id="18" name="Text 14"/>
-          <p:cNvSpPr txBox="1"/>
-          <p:nvPr/>
-        </p:nvSpPr>
-        <p:spPr>
-          <a:xfrm>
-            <a:off x="457200" y="5989320"/>
-            <a:ext cx="11247120" cy="365760"/>
-          </a:xfrm>
-          <a:prstGeom prst="rect">
-            <a:avLst/>
-          </a:prstGeom>
-          <a:noFill/>
-          <a:ln/>
-        </p:spPr>
-        <p:txBody>
-          <a:bodyPr wrap="square" lIns="0" tIns="0" rIns="0" bIns="0" rtlCol="0" anchor="t"/>
-          <a:lstStyle/>
-          <a:p>
-            <a:pPr algn="l" indent="0" marL="0">
-              <a:buNone/>
-            </a:pPr>
-            <a:r>
-              <a:rPr lang="en-US" sz="1400" i="1" dirty="0">
-                <a:solidFill>
-                  <a:schemeClr val="accent5"/>
-                </a:solidFill>
-                <a:latin typeface="Calibri" pitchFamily="34" charset="0"/>
-                <a:ea typeface="Calibri" pitchFamily="34" charset="-122"/>
-                <a:cs typeface="Calibri" pitchFamily="34" charset="-120"/>
-              </a:rPr>
-              <a:t>Closing connections and handling SQL errors is also done by Spring. We never delete rows: the ledger is permanent.</a:t>
-            </a:r>
-            <a:endParaRPr lang="en-US" sz="1400" dirty="0"/>
-          </a:p>
-        </p:txBody>
-      </p:sp>
-      <p:sp>
-        <p:nvSpPr>
-          <p:cNvPr id="25" name="Slide Number Placeholder 0"/>
-          <p:cNvSpPr>
-            <a:spLocks noGrp="1"/>
-          </p:cNvSpPr>
-          <p:nvPr>
-            <p:ph type="sldNum" sz="quarter" idx="4294967295"/>
-          </p:nvPr>
-        </p:nvSpPr>
-        <p:spPr>
-          <a:xfrm>
-            <a:off x="11247120" y="6428232"/>
-            <a:ext cx="502920" cy="274320"/>
-          </a:xfrm>
-          <a:prstGeom prst="rect">
-            <a:avLst/>
-          </a:prstGeom>
-          <a:extLst>
-            <a:ext uri="{C572A759-6A51-4108-AA02-DFA0A04FC94B}">
-              <ma14:wrappingTextBoxFlag xmlns:ma14="http://schemas.microsoft.com/office/mac/drawingml/2011/main" val="0"/>
-            </a:ext>
-          </a:extLst>
-        </p:spPr>
-        <p:txBody>
-          <a:bodyPr/>
-          <a:lstStyle>
-            <a:lvl1pPr>
-              <a:defRPr sz="1000">
-                <a:solidFill>
-                  <a:schemeClr val="accent5"/>
-                </a:solidFill>
-                <a:latin typeface="Calibri"/>
-                <a:ea typeface="Calibri"/>
-                <a:cs typeface="Calibri"/>
-              </a:defRPr>
-            </a:lvl1pPr>
-          </a:lstStyle>
-          <a:p>
-            <a:pPr algn="r"/>
-            <a:fld id="{F7021451-1387-4CA6-816F-3879F97B5CBC}" type="slidenum">
-              <a:rPr b="0" lang="en-US"/>
-              <a:t>24</a:t>
-            </a:fld>
-            <a:endParaRPr lang="en-US"/>
-          </a:p>
-        </p:txBody>
-      </p:sp>
-    </p:spTree>
-  </p:cSld>
-  <p:clrMapOvr>
-    <a:masterClrMapping/>
-  </p:clrMapOvr>
-</p:sld>
-</file>
-
-<file path=ppt/slides/slide25.xml><?xml version="1.0" encoding="utf-8"?>
-<p:sld xmlns:a="http://schemas.openxmlformats.org/drawingml/2006/main" xmlns:r="http://schemas.openxmlformats.org/officeDocument/2006/relationships" xmlns:p="http://schemas.openxmlformats.org/presentationml/2006/main">
-  <p:cSld name="Slide 25">
-    <p:spTree>
-      <p:nvGrpSpPr>
-        <p:cNvPr id="1" name=""/>
-        <p:cNvGrpSpPr/>
-        <p:nvPr/>
-      </p:nvGrpSpPr>
-      <p:grpSpPr>
-        <a:xfrm>
-          <a:off x="0" y="0"/>
-          <a:ext cx="0" cy="0"/>
-          <a:chOff x="0" y="0"/>
-          <a:chExt cx="0" cy="0"/>
-        </a:xfrm>
-      </p:grpSpPr>
-      <p:sp>
-        <p:nvSpPr>
-          <p:cNvPr id="2" name="Text 1"/>
-          <p:cNvSpPr/>
-          <p:nvPr>
-            <p:ph idx="101" type="title" hasCustomPrompt="1"/>
-          </p:nvPr>
-        </p:nvSpPr>
-        <p:spPr>
-          <a:xfrm>
-            <a:off x="457200" y="274320"/>
-            <a:ext cx="11247120" cy="777240"/>
-          </a:xfrm>
-          <a:prstGeom prst="rect">
-            <a:avLst/>
-          </a:prstGeom>
-          <a:noFill/>
-          <a:ln/>
-        </p:spPr>
-        <p:txBody>
-          <a:bodyPr wrap="square" lIns="0" tIns="0" rIns="0" bIns="0" rtlCol="0" anchor="ctr"/>
-          <a:lstStyle/>
-          <a:p>
-            <a:pPr algn="l" indent="0" marL="0">
-              <a:buNone/>
-            </a:pPr>
-            <a:r>
-              <a:rPr lang="en-US" sz="3400" b="1" dirty="0">
-                <a:solidFill>
-                  <a:schemeClr val="tx2"/>
-                </a:solidFill>
-              </a:rPr>
-              <a:t>Database integration</a:t>
-            </a:r>
-            <a:endParaRPr lang="en-US" sz="3400" dirty="0"/>
-          </a:p>
-        </p:txBody>
-      </p:sp>
-      <p:sp>
-        <p:nvSpPr>
-          <p:cNvPr id="4" name="honest"/>
-          <p:cNvSpPr/>
-          <p:nvPr/>
-        </p:nvSpPr>
-        <p:spPr>
-          <a:xfrm>
-            <a:off x="457200" y="1280160"/>
-            <a:ext cx="11274552" cy="685800"/>
-          </a:xfrm>
-          <a:prstGeom prst="roundRect">
-            <a:avLst>
-              <a:gd name="adj" fmla="val 16000"/>
-            </a:avLst>
-          </a:prstGeom>
-          <a:solidFill>
-            <a:srgbClr val="FDF1DC"/>
-          </a:solidFill>
-          <a:ln/>
-        </p:spPr>
-      </p:sp>
-      <p:sp>
-        <p:nvSpPr>
-          <p:cNvPr id="5" name="Text 2"/>
-          <p:cNvSpPr txBox="1"/>
-          <p:nvPr/>
-        </p:nvSpPr>
-        <p:spPr>
-          <a:xfrm>
-            <a:off x="640080" y="1280160"/>
-            <a:ext cx="10881360" cy="685800"/>
-          </a:xfrm>
-          <a:prstGeom prst="rect">
-            <a:avLst/>
-          </a:prstGeom>
-          <a:noFill/>
-          <a:ln/>
-        </p:spPr>
-        <p:txBody>
-          <a:bodyPr wrap="square" lIns="0" tIns="0" rIns="0" bIns="0" rtlCol="0" anchor="ctr"/>
-          <a:lstStyle/>
-          <a:p>
-            <a:pPr algn="l" indent="0" marL="0">
-              <a:buNone/>
-            </a:pPr>
-            <a:r>
-              <a:rPr lang="en-US" sz="1600" b="1" dirty="0">
-                <a:solidFill>
-                  <a:schemeClr val="tx2"/>
-                </a:solidFill>
-                <a:latin typeface="Calibri" pitchFamily="34" charset="0"/>
-                <a:ea typeface="Calibri" pitchFamily="34" charset="-122"/>
-                <a:cs typeface="Calibri" pitchFamily="34" charset="-120"/>
-              </a:rPr>
-              <a:t>Database used: H2 (in memory). MySQL is not used. For a real system the README suggests PostgreSQL or MySQL.</a:t>
-            </a:r>
-            <a:endParaRPr lang="en-US" sz="1600" dirty="0"/>
-          </a:p>
-        </p:txBody>
-      </p:sp>
-      <p:sp>
-        <p:nvSpPr>
-          <p:cNvPr id="6" name="accounts table"/>
-          <p:cNvSpPr/>
-          <p:nvPr/>
-        </p:nvSpPr>
-        <p:spPr>
-          <a:xfrm>
-            <a:off x="457200" y="2148840"/>
-            <a:ext cx="4846320" cy="3108960"/>
-          </a:xfrm>
-          <a:prstGeom prst="roundRect">
-            <a:avLst>
-              <a:gd name="adj" fmla="val 3529"/>
-            </a:avLst>
-          </a:prstGeom>
-          <a:solidFill>
-            <a:schemeClr val="bg2"/>
-          </a:solidFill>
-          <a:ln/>
-        </p:spPr>
-      </p:sp>
-      <p:sp>
-        <p:nvSpPr>
-          <p:cNvPr id="7" name="Text 4"/>
-          <p:cNvSpPr txBox="1"/>
-          <p:nvPr/>
-        </p:nvSpPr>
-        <p:spPr>
-          <a:xfrm>
-            <a:off x="640080" y="2240280"/>
-            <a:ext cx="4480560" cy="365760"/>
-          </a:xfrm>
-          <a:prstGeom prst="rect">
-            <a:avLst/>
-          </a:prstGeom>
-          <a:noFill/>
-          <a:ln/>
-        </p:spPr>
-        <p:txBody>
-          <a:bodyPr wrap="square" lIns="0" tIns="0" rIns="0" bIns="0" rtlCol="0" anchor="t"/>
-          <a:lstStyle/>
-          <a:p>
-            <a:pPr algn="l" indent="0" marL="0">
-              <a:buNone/>
-            </a:pPr>
-            <a:r>
-              <a:rPr lang="en-US" sz="1800" b="1" dirty="0">
-                <a:solidFill>
-                  <a:schemeClr val="accent4"/>
-                </a:solidFill>
-                <a:latin typeface="Courier New" pitchFamily="34" charset="0"/>
-                <a:ea typeface="Courier New" pitchFamily="34" charset="-122"/>
-                <a:cs typeface="Courier New" pitchFamily="34" charset="-120"/>
-              </a:rPr>
-              <a:t>accounts</a:t>
-            </a:r>
-            <a:endParaRPr lang="en-US" sz="1800" dirty="0"/>
-          </a:p>
-        </p:txBody>
-      </p:sp>
-      <p:sp>
-        <p:nvSpPr>
-          <p:cNvPr id="8" name="Text 5"/>
-          <p:cNvSpPr txBox="1"/>
-          <p:nvPr/>
-        </p:nvSpPr>
-        <p:spPr>
-          <a:xfrm>
-            <a:off x="640080" y="2697480"/>
-            <a:ext cx="4480560" cy="1645920"/>
-          </a:xfrm>
-          <a:prstGeom prst="rect">
-            <a:avLst/>
-          </a:prstGeom>
-          <a:noFill/>
-          <a:ln/>
-        </p:spPr>
-        <p:txBody>
-          <a:bodyPr wrap="square" lIns="0" tIns="0" rIns="0" bIns="0" rtlCol="0" anchor="t"/>
-          <a:lstStyle/>
-          <a:p>
-            <a:pPr algn="l" indent="0" marL="0">
-              <a:spcAft>
-                <a:spcPts val="400"/>
-              </a:spcAft>
-              <a:buNone/>
-            </a:pPr>
-            <a:r>
-              <a:rPr lang="en-US" sz="1400" b="1" dirty="0">
-                <a:solidFill>
-                  <a:schemeClr val="accent4"/>
-                </a:solidFill>
-                <a:latin typeface="Courier New" pitchFamily="34" charset="0"/>
-                <a:ea typeface="Courier New" pitchFamily="34" charset="-122"/>
-                <a:cs typeface="Courier New" pitchFamily="34" charset="-120"/>
-              </a:rPr>
-              <a:t>vpa</a:t>
-            </a:r>
-            <a:pPr algn="l" indent="0" marL="0">
-              <a:spcAft>
-                <a:spcPts val="400"/>
-              </a:spcAft>
-              <a:buNone/>
-            </a:pPr>
-            <a:r>
-              <a:rPr lang="en-US" sz="1400" dirty="0">
-                <a:solidFill>
-                  <a:schemeClr val="tx1"/>
-                </a:solidFill>
-                <a:latin typeface="Calibri" pitchFamily="34" charset="0"/>
-                <a:ea typeface="Calibri" pitchFamily="34" charset="-122"/>
-                <a:cs typeface="Calibri" pitchFamily="34" charset="-120"/>
-              </a:rPr>
-              <a:t>  main ID, like alice@demo</a:t>
-            </a:r>
-            <a:endParaRPr lang="en-US" sz="1400" dirty="0"/>
-          </a:p>
-          <a:p>
-            <a:pPr algn="l" indent="0" marL="0">
-              <a:spcAft>
-                <a:spcPts val="400"/>
-              </a:spcAft>
-              <a:buNone/>
-            </a:pPr>
-            <a:r>
-              <a:rPr lang="en-US" sz="1400" b="1" dirty="0">
-                <a:solidFill>
-                  <a:schemeClr val="accent4"/>
-                </a:solidFill>
-                <a:latin typeface="Courier New" pitchFamily="34" charset="0"/>
-                <a:ea typeface="Courier New" pitchFamily="34" charset="-122"/>
-                <a:cs typeface="Courier New" pitchFamily="34" charset="-120"/>
-              </a:rPr>
-              <a:t>holderName</a:t>
-            </a:r>
-            <a:pPr algn="l" indent="0" marL="0">
-              <a:spcAft>
-                <a:spcPts val="400"/>
-              </a:spcAft>
-              <a:buNone/>
-            </a:pPr>
-            <a:r>
-              <a:rPr lang="en-US" sz="1400" dirty="0">
-                <a:solidFill>
-                  <a:schemeClr val="tx1"/>
-                </a:solidFill>
-                <a:latin typeface="Calibri" pitchFamily="34" charset="0"/>
-                <a:ea typeface="Calibri" pitchFamily="34" charset="-122"/>
-                <a:cs typeface="Calibri" pitchFamily="34" charset="-120"/>
-              </a:rPr>
-              <a:t>  who owns it</a:t>
-            </a:r>
-            <a:endParaRPr lang="en-US" sz="1400" dirty="0"/>
-          </a:p>
-          <a:p>
-            <a:pPr algn="l" indent="0" marL="0">
-              <a:spcAft>
-                <a:spcPts val="400"/>
-              </a:spcAft>
-              <a:buNone/>
-            </a:pPr>
-            <a:r>
-              <a:rPr lang="en-US" sz="1400" b="1" dirty="0">
-                <a:solidFill>
-                  <a:schemeClr val="accent4"/>
-                </a:solidFill>
-                <a:latin typeface="Courier New" pitchFamily="34" charset="0"/>
-                <a:ea typeface="Courier New" pitchFamily="34" charset="-122"/>
-                <a:cs typeface="Courier New" pitchFamily="34" charset="-120"/>
-              </a:rPr>
-              <a:t>balance</a:t>
-            </a:r>
-            <a:pPr algn="l" indent="0" marL="0">
-              <a:spcAft>
-                <a:spcPts val="400"/>
-              </a:spcAft>
-              <a:buNone/>
-            </a:pPr>
-            <a:r>
-              <a:rPr lang="en-US" sz="1400" dirty="0">
-                <a:solidFill>
-                  <a:schemeClr val="tx1"/>
-                </a:solidFill>
-                <a:latin typeface="Calibri" pitchFamily="34" charset="0"/>
-                <a:ea typeface="Calibri" pitchFamily="34" charset="-122"/>
-                <a:cs typeface="Calibri" pitchFamily="34" charset="-120"/>
-              </a:rPr>
-              <a:t>  money, exact decimal</a:t>
-            </a:r>
-            <a:endParaRPr lang="en-US" sz="1400" dirty="0"/>
-          </a:p>
-          <a:p>
-            <a:pPr algn="l" indent="0" marL="0">
-              <a:spcAft>
-                <a:spcPts val="400"/>
-              </a:spcAft>
-              <a:buNone/>
-            </a:pPr>
-            <a:r>
-              <a:rPr lang="en-US" sz="1400" b="1" dirty="0">
-                <a:solidFill>
-                  <a:schemeClr val="accent4"/>
-                </a:solidFill>
-                <a:latin typeface="Courier New" pitchFamily="34" charset="0"/>
-                <a:ea typeface="Courier New" pitchFamily="34" charset="-122"/>
-                <a:cs typeface="Courier New" pitchFamily="34" charset="-120"/>
-              </a:rPr>
-              <a:t>version</a:t>
-            </a:r>
-            <a:pPr algn="l" indent="0" marL="0">
-              <a:spcAft>
-                <a:spcPts val="400"/>
-              </a:spcAft>
-              <a:buNone/>
-            </a:pPr>
-            <a:r>
-              <a:rPr lang="en-US" sz="1400" dirty="0">
-                <a:solidFill>
-                  <a:schemeClr val="tx1"/>
-                </a:solidFill>
-                <a:latin typeface="Calibri" pitchFamily="34" charset="0"/>
-                <a:ea typeface="Calibri" pitchFamily="34" charset="-122"/>
-                <a:cs typeface="Calibri" pitchFamily="34" charset="-120"/>
-              </a:rPr>
-              <a:t>  catches two updates at once</a:t>
-            </a:r>
-            <a:endParaRPr lang="en-US" sz="1400" dirty="0"/>
-          </a:p>
-        </p:txBody>
-      </p:sp>
-      <p:sp>
-        <p:nvSpPr>
-          <p:cNvPr id="9" name="Text 6"/>
-          <p:cNvSpPr txBox="1"/>
-          <p:nvPr/>
-        </p:nvSpPr>
-        <p:spPr>
-          <a:xfrm>
-            <a:off x="640080" y="4434840"/>
-            <a:ext cx="4480560" cy="731520"/>
-          </a:xfrm>
-          <a:prstGeom prst="rect">
-            <a:avLst/>
-          </a:prstGeom>
-          <a:noFill/>
-          <a:ln/>
-        </p:spPr>
-        <p:txBody>
-          <a:bodyPr wrap="square" lIns="0" tIns="0" rIns="0" bIns="0" rtlCol="0" anchor="t"/>
-          <a:lstStyle/>
-          <a:p>
-            <a:pPr algn="l" indent="0" marL="0">
-              <a:buNone/>
-            </a:pPr>
-            <a:r>
-              <a:rPr lang="en-US" sz="1400" i="1" dirty="0">
-                <a:solidFill>
-                  <a:schemeClr val="accent5"/>
-                </a:solidFill>
-                <a:latin typeface="Calibri" pitchFamily="34" charset="0"/>
-                <a:ea typeface="Calibri" pitchFamily="34" charset="-122"/>
-                <a:cs typeface="Calibri" pitchFamily="34" charset="-120"/>
-              </a:rPr>
-              <a:t>4 demo accounts: alice ₹5000, bob ₹1000, carol ₹2500, dave ₹500</a:t>
-            </a:r>
-            <a:endParaRPr lang="en-US" sz="1400" dirty="0"/>
-          </a:p>
-        </p:txBody>
-      </p:sp>
-      <p:sp>
-        <p:nvSpPr>
-          <p:cNvPr id="10" name="transactions table"/>
-          <p:cNvSpPr/>
-          <p:nvPr/>
-        </p:nvSpPr>
-        <p:spPr>
-          <a:xfrm>
-            <a:off x="5513832" y="2148840"/>
-            <a:ext cx="6217920" cy="3108960"/>
-          </a:xfrm>
-          <a:prstGeom prst="roundRect">
-            <a:avLst>
-              <a:gd name="adj" fmla="val 3529"/>
-            </a:avLst>
-          </a:prstGeom>
-          <a:solidFill>
-            <a:schemeClr val="bg2"/>
-          </a:solidFill>
-          <a:ln/>
-        </p:spPr>
-      </p:sp>
-      <p:sp>
-        <p:nvSpPr>
-          <p:cNvPr id="11" name="Text 8"/>
-          <p:cNvSpPr txBox="1"/>
-          <p:nvPr/>
-        </p:nvSpPr>
-        <p:spPr>
-          <a:xfrm>
-            <a:off x="5696712" y="2240280"/>
-            <a:ext cx="5852160" cy="365760"/>
-          </a:xfrm>
-          <a:prstGeom prst="rect">
-            <a:avLst/>
-          </a:prstGeom>
-          <a:noFill/>
-          <a:ln/>
-        </p:spPr>
-        <p:txBody>
-          <a:bodyPr wrap="square" lIns="0" tIns="0" rIns="0" bIns="0" rtlCol="0" anchor="t"/>
-          <a:lstStyle/>
-          <a:p>
-            <a:pPr algn="l" indent="0" marL="0">
-              <a:buNone/>
-            </a:pPr>
-            <a:r>
-              <a:rPr lang="en-US" sz="1800" b="1" dirty="0">
-                <a:solidFill>
-                  <a:schemeClr val="accent4"/>
-                </a:solidFill>
-                <a:latin typeface="Courier New" pitchFamily="34" charset="0"/>
-                <a:ea typeface="Courier New" pitchFamily="34" charset="-122"/>
-                <a:cs typeface="Courier New" pitchFamily="34" charset="-120"/>
-              </a:rPr>
-              <a:t>transactions  (one row per payment)</a:t>
-            </a:r>
-            <a:endParaRPr lang="en-US" sz="1800" dirty="0"/>
-          </a:p>
-        </p:txBody>
-      </p:sp>
-      <p:sp>
-        <p:nvSpPr>
-          <p:cNvPr id="12" name="Text 9"/>
-          <p:cNvSpPr txBox="1"/>
-          <p:nvPr/>
-        </p:nvSpPr>
-        <p:spPr>
-          <a:xfrm>
-            <a:off x="5696712" y="2697480"/>
-            <a:ext cx="5852160" cy="2377440"/>
-          </a:xfrm>
-          <a:prstGeom prst="rect">
-            <a:avLst/>
-          </a:prstGeom>
-          <a:noFill/>
-          <a:ln/>
-        </p:spPr>
-        <p:txBody>
-          <a:bodyPr wrap="square" lIns="0" tIns="0" rIns="0" bIns="0" rtlCol="0" anchor="t"/>
-          <a:lstStyle/>
-          <a:p>
-            <a:pPr algn="l" indent="0" marL="0">
-              <a:spcAft>
-                <a:spcPts val="400"/>
-              </a:spcAft>
-              <a:buNone/>
-            </a:pPr>
-            <a:r>
-              <a:rPr lang="en-US" sz="1400" b="1" dirty="0">
-                <a:solidFill>
-                  <a:schemeClr val="accent4"/>
-                </a:solidFill>
-                <a:latin typeface="Courier New" pitchFamily="34" charset="0"/>
-                <a:ea typeface="Courier New" pitchFamily="34" charset="-122"/>
-                <a:cs typeface="Courier New" pitchFamily="34" charset="-120"/>
-              </a:rPr>
-              <a:t>id, packetHash</a:t>
-            </a:r>
-            <a:pPr algn="l" indent="0" marL="0">
-              <a:spcAft>
-                <a:spcPts val="400"/>
-              </a:spcAft>
-              <a:buNone/>
-            </a:pPr>
-            <a:r>
-              <a:rPr lang="en-US" sz="1400" dirty="0">
-                <a:solidFill>
-                  <a:schemeClr val="tx1"/>
-                </a:solidFill>
-                <a:latin typeface="Calibri" pitchFamily="34" charset="0"/>
-                <a:ea typeface="Calibri" pitchFamily="34" charset="-122"/>
-                <a:cs typeface="Calibri" pitchFamily="34" charset="-120"/>
-              </a:rPr>
-              <a:t>  hash is UNIQUE (the fingerprint)</a:t>
-            </a:r>
-            <a:endParaRPr lang="en-US" sz="1400" dirty="0"/>
-          </a:p>
-          <a:p>
-            <a:pPr algn="l" indent="0" marL="0">
-              <a:spcAft>
-                <a:spcPts val="400"/>
-              </a:spcAft>
-              <a:buNone/>
-            </a:pPr>
-            <a:r>
-              <a:rPr lang="en-US" sz="1400" b="1" dirty="0">
-                <a:solidFill>
-                  <a:schemeClr val="accent4"/>
-                </a:solidFill>
-                <a:latin typeface="Courier New" pitchFamily="34" charset="0"/>
-                <a:ea typeface="Courier New" pitchFamily="34" charset="-122"/>
-                <a:cs typeface="Courier New" pitchFamily="34" charset="-120"/>
-              </a:rPr>
-              <a:t>senderVpa, receiverVpa, amount</a:t>
-            </a:r>
-            <a:pPr algn="l" indent="0" marL="0">
-              <a:spcAft>
-                <a:spcPts val="400"/>
-              </a:spcAft>
-              <a:buNone/>
-            </a:pPr>
-            <a:r>
-              <a:rPr lang="en-US" sz="1400" dirty="0">
-                <a:solidFill>
-                  <a:schemeClr val="tx1"/>
-                </a:solidFill>
-                <a:latin typeface="Calibri" pitchFamily="34" charset="0"/>
-                <a:ea typeface="Calibri" pitchFamily="34" charset="-122"/>
-                <a:cs typeface="Calibri" pitchFamily="34" charset="-120"/>
-              </a:rPr>
-              <a:t>  who paid whom</a:t>
-            </a:r>
-            <a:endParaRPr lang="en-US" sz="1400" dirty="0"/>
-          </a:p>
-          <a:p>
-            <a:pPr algn="l" indent="0" marL="0">
-              <a:spcAft>
-                <a:spcPts val="400"/>
-              </a:spcAft>
-              <a:buNone/>
-            </a:pPr>
-            <a:r>
-              <a:rPr lang="en-US" sz="1400" b="1" dirty="0">
-                <a:solidFill>
-                  <a:schemeClr val="accent4"/>
-                </a:solidFill>
-                <a:latin typeface="Courier New" pitchFamily="34" charset="0"/>
-                <a:ea typeface="Courier New" pitchFamily="34" charset="-122"/>
-                <a:cs typeface="Courier New" pitchFamily="34" charset="-120"/>
-              </a:rPr>
-              <a:t>signedAt, settledAt</a:t>
-            </a:r>
-            <a:pPr algn="l" indent="0" marL="0">
-              <a:spcAft>
-                <a:spcPts val="400"/>
-              </a:spcAft>
-              <a:buNone/>
-            </a:pPr>
-            <a:r>
-              <a:rPr lang="en-US" sz="1400" dirty="0">
-                <a:solidFill>
-                  <a:schemeClr val="tx1"/>
-                </a:solidFill>
-                <a:latin typeface="Calibri" pitchFamily="34" charset="0"/>
-                <a:ea typeface="Calibri" pitchFamily="34" charset="-122"/>
-                <a:cs typeface="Calibri" pitchFamily="34" charset="-120"/>
-              </a:rPr>
-              <a:t>  when signed / when settled</a:t>
-            </a:r>
-            <a:endParaRPr lang="en-US" sz="1400" dirty="0"/>
-          </a:p>
-          <a:p>
-            <a:pPr algn="l" indent="0" marL="0">
-              <a:spcAft>
-                <a:spcPts val="400"/>
-              </a:spcAft>
-              <a:buNone/>
-            </a:pPr>
-            <a:r>
-              <a:rPr lang="en-US" sz="1400" b="1" dirty="0">
-                <a:solidFill>
-                  <a:schemeClr val="accent4"/>
-                </a:solidFill>
-                <a:latin typeface="Courier New" pitchFamily="34" charset="0"/>
-                <a:ea typeface="Courier New" pitchFamily="34" charset="-122"/>
-                <a:cs typeface="Courier New" pitchFamily="34" charset="-120"/>
-              </a:rPr>
-              <a:t>bridgeNodeId, hopCount</a:t>
-            </a:r>
-            <a:pPr algn="l" indent="0" marL="0">
-              <a:spcAft>
-                <a:spcPts val="400"/>
-              </a:spcAft>
-              <a:buNone/>
-            </a:pPr>
-            <a:r>
-              <a:rPr lang="en-US" sz="1400" dirty="0">
-                <a:solidFill>
-                  <a:schemeClr val="tx1"/>
-                </a:solidFill>
-                <a:latin typeface="Calibri" pitchFamily="34" charset="0"/>
-                <a:ea typeface="Calibri" pitchFamily="34" charset="-122"/>
-                <a:cs typeface="Calibri" pitchFamily="34" charset="-120"/>
-              </a:rPr>
-              <a:t>  how it arrived</a:t>
-            </a:r>
-            <a:endParaRPr lang="en-US" sz="1400" dirty="0"/>
-          </a:p>
-          <a:p>
-            <a:pPr algn="l" indent="0" marL="0">
-              <a:spcAft>
-                <a:spcPts val="400"/>
-              </a:spcAft>
-              <a:buNone/>
-            </a:pPr>
-            <a:r>
-              <a:rPr lang="en-US" sz="1400" b="1" dirty="0">
-                <a:solidFill>
-                  <a:schemeClr val="accent4"/>
-                </a:solidFill>
-                <a:latin typeface="Courier New" pitchFamily="34" charset="0"/>
-                <a:ea typeface="Courier New" pitchFamily="34" charset="-122"/>
-                <a:cs typeface="Courier New" pitchFamily="34" charset="-120"/>
-              </a:rPr>
-              <a:t>status</a:t>
-            </a:r>
-            <a:pPr algn="l" indent="0" marL="0">
-              <a:spcAft>
-                <a:spcPts val="400"/>
-              </a:spcAft>
-              <a:buNone/>
-            </a:pPr>
-            <a:r>
-              <a:rPr lang="en-US" sz="1400" dirty="0">
-                <a:solidFill>
-                  <a:schemeClr val="tx1"/>
-                </a:solidFill>
-                <a:latin typeface="Calibri" pitchFamily="34" charset="0"/>
-                <a:ea typeface="Calibri" pitchFamily="34" charset="-122"/>
-                <a:cs typeface="Calibri" pitchFamily="34" charset="-120"/>
-              </a:rPr>
-              <a:t>  SETTLED or REJECTED</a:t>
-            </a:r>
-            <a:endParaRPr lang="en-US" sz="1400" dirty="0"/>
-          </a:p>
-        </p:txBody>
-      </p:sp>
-      <p:sp>
-        <p:nvSpPr>
-          <p:cNvPr id="13" name="node Application"/>
-          <p:cNvSpPr/>
-          <p:nvPr/>
-        </p:nvSpPr>
-        <p:spPr>
-          <a:xfrm>
-            <a:off x="457200" y="5440680"/>
-            <a:ext cx="2560320" cy="640080"/>
-          </a:xfrm>
-          <a:prstGeom prst="roundRect">
-            <a:avLst>
-              <a:gd name="adj" fmla="val 14286"/>
-            </a:avLst>
-          </a:prstGeom>
-          <a:solidFill>
-            <a:schemeClr val="accent1"/>
-          </a:solidFill>
-          <a:ln/>
-        </p:spPr>
-      </p:sp>
-      <p:sp>
-        <p:nvSpPr>
-          <p:cNvPr id="14" name="Text 11"/>
-          <p:cNvSpPr txBox="1"/>
-          <p:nvPr/>
-        </p:nvSpPr>
-        <p:spPr>
-          <a:xfrm>
-            <a:off x="530352" y="5440680"/>
-            <a:ext cx="2414016" cy="640080"/>
-          </a:xfrm>
-          <a:prstGeom prst="rect">
-            <a:avLst/>
-          </a:prstGeom>
-          <a:noFill/>
-          <a:ln/>
-        </p:spPr>
-        <p:txBody>
-          <a:bodyPr wrap="square" lIns="0" tIns="0" rIns="0" bIns="0" rtlCol="0" anchor="ctr"/>
-          <a:lstStyle/>
-          <a:p>
-            <a:pPr algn="ctr" indent="0" marL="0">
-              <a:buNone/>
-            </a:pPr>
-            <a:r>
-              <a:rPr lang="en-US" sz="1600" b="1" dirty="0">
-                <a:solidFill>
-                  <a:schemeClr val="bg1"/>
-                </a:solidFill>
-                <a:latin typeface="Calibri" pitchFamily="34" charset="0"/>
-                <a:ea typeface="Calibri" pitchFamily="34" charset="-122"/>
-                <a:cs typeface="Calibri" pitchFamily="34" charset="-120"/>
-              </a:rPr>
-              <a:t>Application</a:t>
-            </a:r>
-            <a:endParaRPr lang="en-US" sz="1600" dirty="0"/>
-          </a:p>
-        </p:txBody>
-      </p:sp>
-      <p:sp>
-        <p:nvSpPr>
-          <p:cNvPr id="15" name="arrow"/>
-          <p:cNvSpPr/>
-          <p:nvPr/>
-        </p:nvSpPr>
-        <p:spPr>
-          <a:xfrm>
-            <a:off x="3063240" y="5760720"/>
-            <a:ext cx="457200" cy="0"/>
-          </a:xfrm>
-          <a:prstGeom prst="line">
-            <a:avLst/>
-          </a:prstGeom>
-          <a:noFill/>
-          <a:ln w="28575">
-            <a:solidFill>
-              <a:schemeClr val="accent5"/>
-            </a:solidFill>
-            <a:prstDash val="solid"/>
-            <a:tailEnd type="triangle"/>
-          </a:ln>
-        </p:spPr>
-      </p:sp>
-      <p:sp>
-        <p:nvSpPr>
-          <p:cNvPr id="16" name="node JPA / JDBC"/>
-          <p:cNvSpPr/>
-          <p:nvPr/>
-        </p:nvSpPr>
-        <p:spPr>
-          <a:xfrm>
-            <a:off x="3566160" y="5440680"/>
-            <a:ext cx="2560320" cy="640080"/>
-          </a:xfrm>
-          <a:prstGeom prst="roundRect">
-            <a:avLst>
-              <a:gd name="adj" fmla="val 14286"/>
-            </a:avLst>
-          </a:prstGeom>
-          <a:solidFill>
-            <a:schemeClr val="accent4"/>
-          </a:solidFill>
-          <a:ln/>
-        </p:spPr>
-      </p:sp>
-      <p:sp>
-        <p:nvSpPr>
-          <p:cNvPr id="17" name="Text 14"/>
-          <p:cNvSpPr txBox="1"/>
-          <p:nvPr/>
-        </p:nvSpPr>
-        <p:spPr>
-          <a:xfrm>
-            <a:off x="3639312" y="5440680"/>
-            <a:ext cx="2414016" cy="640080"/>
-          </a:xfrm>
-          <a:prstGeom prst="rect">
-            <a:avLst/>
-          </a:prstGeom>
-          <a:noFill/>
-          <a:ln/>
-        </p:spPr>
-        <p:txBody>
-          <a:bodyPr wrap="square" lIns="0" tIns="0" rIns="0" bIns="0" rtlCol="0" anchor="ctr"/>
-          <a:lstStyle/>
-          <a:p>
-            <a:pPr algn="ctr" indent="0" marL="0">
-              <a:buNone/>
-            </a:pPr>
-            <a:r>
-              <a:rPr lang="en-US" sz="1600" b="1" dirty="0">
-                <a:solidFill>
-                  <a:schemeClr val="bg1"/>
-                </a:solidFill>
-                <a:latin typeface="Calibri" pitchFamily="34" charset="0"/>
-                <a:ea typeface="Calibri" pitchFamily="34" charset="-122"/>
-                <a:cs typeface="Calibri" pitchFamily="34" charset="-120"/>
-              </a:rPr>
-              <a:t>JPA / JDBC</a:t>
-            </a:r>
-            <a:endParaRPr lang="en-US" sz="1600" dirty="0"/>
-          </a:p>
-        </p:txBody>
-      </p:sp>
-      <p:sp>
-        <p:nvSpPr>
-          <p:cNvPr id="18" name="arrow"/>
-          <p:cNvSpPr/>
-          <p:nvPr/>
-        </p:nvSpPr>
-        <p:spPr>
-          <a:xfrm>
-            <a:off x="6172200" y="5760720"/>
-            <a:ext cx="457200" cy="0"/>
-          </a:xfrm>
-          <a:prstGeom prst="line">
-            <a:avLst/>
-          </a:prstGeom>
-          <a:noFill/>
-          <a:ln w="28575">
-            <a:solidFill>
-              <a:schemeClr val="accent5"/>
-            </a:solidFill>
-            <a:prstDash val="solid"/>
-            <a:tailEnd type="triangle"/>
-          </a:ln>
-        </p:spPr>
-      </p:sp>
-      <p:sp>
-        <p:nvSpPr>
-          <p:cNvPr id="19" name="node H2 database"/>
-          <p:cNvSpPr/>
-          <p:nvPr/>
-        </p:nvSpPr>
-        <p:spPr>
-          <a:xfrm>
-            <a:off x="6675120" y="5440680"/>
-            <a:ext cx="2194560" cy="640080"/>
-          </a:xfrm>
-          <a:prstGeom prst="roundRect">
-            <a:avLst>
-              <a:gd name="adj" fmla="val 14286"/>
-            </a:avLst>
-          </a:prstGeom>
-          <a:solidFill>
-            <a:schemeClr val="accent6"/>
-          </a:solidFill>
-          <a:ln/>
-        </p:spPr>
-      </p:sp>
-      <p:sp>
-        <p:nvSpPr>
-          <p:cNvPr id="20" name="Text 17"/>
-          <p:cNvSpPr txBox="1"/>
-          <p:nvPr/>
-        </p:nvSpPr>
-        <p:spPr>
-          <a:xfrm>
-            <a:off x="6748272" y="5440680"/>
-            <a:ext cx="2048256" cy="640080"/>
-          </a:xfrm>
-          <a:prstGeom prst="rect">
-            <a:avLst/>
-          </a:prstGeom>
-          <a:noFill/>
-          <a:ln/>
-        </p:spPr>
-        <p:txBody>
-          <a:bodyPr wrap="square" lIns="0" tIns="0" rIns="0" bIns="0" rtlCol="0" anchor="ctr"/>
-          <a:lstStyle/>
-          <a:p>
-            <a:pPr algn="ctr" indent="0" marL="0">
-              <a:buNone/>
-            </a:pPr>
-            <a:r>
-              <a:rPr lang="en-US" sz="1600" b="1" dirty="0">
-                <a:solidFill>
-                  <a:schemeClr val="bg1"/>
-                </a:solidFill>
-                <a:latin typeface="Calibri" pitchFamily="34" charset="0"/>
-                <a:ea typeface="Calibri" pitchFamily="34" charset="-122"/>
-                <a:cs typeface="Calibri" pitchFamily="34" charset="-120"/>
-              </a:rPr>
-              <a:t>H2 database</a:t>
-            </a:r>
-            <a:endParaRPr lang="en-US" sz="1600" dirty="0"/>
-          </a:p>
-        </p:txBody>
-      </p:sp>
-      <p:sp>
-        <p:nvSpPr>
-          <p:cNvPr id="21" name="Text 18"/>
-          <p:cNvSpPr txBox="1"/>
-          <p:nvPr/>
-        </p:nvSpPr>
-        <p:spPr>
-          <a:xfrm>
-            <a:off x="9006840" y="5394960"/>
-            <a:ext cx="2743200" cy="822960"/>
-          </a:xfrm>
-          <a:prstGeom prst="rect">
-            <a:avLst/>
-          </a:prstGeom>
-          <a:noFill/>
-          <a:ln/>
-        </p:spPr>
-        <p:txBody>
-          <a:bodyPr wrap="square" lIns="0" tIns="0" rIns="0" bIns="0" rtlCol="0" anchor="t"/>
-          <a:lstStyle/>
-          <a:p>
-            <a:pPr algn="l" indent="0" marL="0">
-              <a:buNone/>
-            </a:pPr>
-            <a:r>
-              <a:rPr lang="en-US" sz="1250" i="1" dirty="0">
-                <a:solidFill>
-                  <a:schemeClr val="accent3"/>
-                </a:solidFill>
-                <a:latin typeface="Calibri" pitchFamily="34" charset="0"/>
-                <a:ea typeface="Calibri" pitchFamily="34" charset="-122"/>
-                <a:cs typeface="Calibri" pitchFamily="34" charset="-120"/>
-              </a:rPr>
-              <a:t>Data is lost when the server stops (create-drop). Switching to MySQL is mostly a configuration change.</a:t>
-            </a:r>
-            <a:endParaRPr lang="en-US" sz="1250" dirty="0"/>
-          </a:p>
-        </p:txBody>
-      </p:sp>
-      <p:sp>
-        <p:nvSpPr>
-          <p:cNvPr id="25" name="Slide Number Placeholder 0"/>
-          <p:cNvSpPr>
-            <a:spLocks noGrp="1"/>
-          </p:cNvSpPr>
-          <p:nvPr>
-            <p:ph type="sldNum" sz="quarter" idx="4294967295"/>
-          </p:nvPr>
-        </p:nvSpPr>
-        <p:spPr>
-          <a:xfrm>
-            <a:off x="11247120" y="6428232"/>
-            <a:ext cx="502920" cy="274320"/>
-          </a:xfrm>
-          <a:prstGeom prst="rect">
-            <a:avLst/>
-          </a:prstGeom>
-          <a:extLst>
-            <a:ext uri="{C572A759-6A51-4108-AA02-DFA0A04FC94B}">
-              <ma14:wrappingTextBoxFlag xmlns:ma14="http://schemas.microsoft.com/office/mac/drawingml/2011/main" val="0"/>
-            </a:ext>
-          </a:extLst>
-        </p:spPr>
-        <p:txBody>
-          <a:bodyPr/>
-          <a:lstStyle>
-            <a:lvl1pPr>
-              <a:defRPr sz="1000">
-                <a:solidFill>
-                  <a:schemeClr val="accent5"/>
-                </a:solidFill>
-                <a:latin typeface="Calibri"/>
-                <a:ea typeface="Calibri"/>
-                <a:cs typeface="Calibri"/>
-              </a:defRPr>
-            </a:lvl1pPr>
-          </a:lstStyle>
-          <a:p>
-            <a:pPr algn="r"/>
-            <a:fld id="{F7021451-1387-4CA6-816F-3879F97B5CBC}" type="slidenum">
-              <a:rPr b="0" lang="en-US"/>
-              <a:t>25</a:t>
-            </a:fld>
-            <a:endParaRPr lang="en-US"/>
-          </a:p>
-        </p:txBody>
-      </p:sp>
-    </p:spTree>
-  </p:cSld>
-  <p:clrMapOvr>
-    <a:masterClrMapping/>
-  </p:clrMapOvr>
-</p:sld>
-</file>
-
-<file path=ppt/slides/slide26.xml><?xml version="1.0" encoding="utf-8"?>
-<p:sld xmlns:a="http://schemas.openxmlformats.org/drawingml/2006/main" xmlns:r="http://schemas.openxmlformats.org/officeDocument/2006/relationships" xmlns:p="http://schemas.openxmlformats.org/presentationml/2006/main">
-  <p:cSld name="Slide 26">
-    <p:spTree>
-      <p:nvGrpSpPr>
-        <p:cNvPr id="1" name=""/>
-        <p:cNvGrpSpPr/>
-        <p:nvPr/>
-      </p:nvGrpSpPr>
-      <p:grpSpPr>
-        <a:xfrm>
-          <a:off x="0" y="0"/>
-          <a:ext cx="0" cy="0"/>
-          <a:chOff x="0" y="0"/>
-          <a:chExt cx="0" cy="0"/>
-        </a:xfrm>
-      </p:grpSpPr>
-      <p:sp>
-        <p:nvSpPr>
-          <p:cNvPr id="2" name="Text 1"/>
-          <p:cNvSpPr/>
-          <p:nvPr>
-            <p:ph idx="101" type="title" hasCustomPrompt="1"/>
-          </p:nvPr>
-        </p:nvSpPr>
-        <p:spPr>
-          <a:xfrm>
-            <a:off x="457200" y="274320"/>
-            <a:ext cx="11247120" cy="777240"/>
-          </a:xfrm>
-          <a:prstGeom prst="rect">
-            <a:avLst/>
-          </a:prstGeom>
-          <a:noFill/>
-          <a:ln/>
-        </p:spPr>
-        <p:txBody>
-          <a:bodyPr wrap="square" lIns="0" tIns="0" rIns="0" bIns="0" rtlCol="0" anchor="ctr"/>
-          <a:lstStyle/>
-          <a:p>
-            <a:pPr algn="l" indent="0" marL="0">
-              <a:buNone/>
-            </a:pPr>
-            <a:r>
-              <a:rPr lang="en-US" sz="3400" b="1" dirty="0">
-                <a:solidFill>
-                  <a:schemeClr val="tx2"/>
-                </a:solidFill>
-              </a:rPr>
-              <a:t>Servlets: how a request reaches our code</a:t>
-            </a:r>
-            <a:endParaRPr lang="en-US" sz="3400" dirty="0"/>
-          </a:p>
-        </p:txBody>
-      </p:sp>
-      <p:sp>
-        <p:nvSpPr>
-          <p:cNvPr id="4" name="honest"/>
-          <p:cNvSpPr/>
-          <p:nvPr/>
-        </p:nvSpPr>
-        <p:spPr>
-          <a:xfrm>
-            <a:off x="457200" y="1280160"/>
-            <a:ext cx="11274552" cy="685800"/>
-          </a:xfrm>
-          <a:prstGeom prst="roundRect">
-            <a:avLst>
-              <a:gd name="adj" fmla="val 16000"/>
-            </a:avLst>
-          </a:prstGeom>
-          <a:solidFill>
-            <a:srgbClr val="FDF1DC"/>
-          </a:solidFill>
-          <a:ln/>
-        </p:spPr>
-      </p:sp>
-      <p:sp>
-        <p:nvSpPr>
-          <p:cNvPr id="5" name="Text 2"/>
-          <p:cNvSpPr txBox="1"/>
-          <p:nvPr/>
-        </p:nvSpPr>
-        <p:spPr>
-          <a:xfrm>
-            <a:off x="640080" y="1280160"/>
-            <a:ext cx="10881360" cy="685800"/>
-          </a:xfrm>
-          <a:prstGeom prst="rect">
-            <a:avLst/>
-          </a:prstGeom>
-          <a:noFill/>
-          <a:ln/>
-        </p:spPr>
-        <p:txBody>
-          <a:bodyPr wrap="square" lIns="0" tIns="0" rIns="0" bIns="0" rtlCol="0" anchor="ctr"/>
-          <a:lstStyle/>
-          <a:p>
-            <a:pPr algn="l" indent="0" marL="0">
-              <a:buNone/>
-            </a:pPr>
-            <a:r>
-              <a:rPr lang="en-US" sz="1600" b="1" dirty="0">
-                <a:solidFill>
-                  <a:schemeClr val="tx2"/>
-                </a:solidFill>
-                <a:latin typeface="Calibri" pitchFamily="34" charset="0"/>
-                <a:ea typeface="Calibri" pitchFamily="34" charset="-122"/>
-                <a:cs typeface="Calibri" pitchFamily="34" charset="-120"/>
-              </a:rPr>
-              <a:t>We do not write Servlet classes. Spring Boot's built-in servlet receives each request and hands it to our controller.</a:t>
-            </a:r>
-            <a:endParaRPr lang="en-US" sz="1600" dirty="0"/>
-          </a:p>
-        </p:txBody>
-      </p:sp>
-      <p:sp>
-        <p:nvSpPr>
-          <p:cNvPr id="6" name="node User / bridge phone"/>
-          <p:cNvSpPr/>
-          <p:nvPr/>
-        </p:nvSpPr>
-        <p:spPr>
-          <a:xfrm>
-            <a:off x="457200" y="2148840"/>
-            <a:ext cx="1920240" cy="1051560"/>
-          </a:xfrm>
-          <a:prstGeom prst="roundRect">
-            <a:avLst>
-              <a:gd name="adj" fmla="val 8696"/>
-            </a:avLst>
-          </a:prstGeom>
-          <a:solidFill>
-            <a:schemeClr val="accent5"/>
-          </a:solidFill>
-          <a:ln/>
-        </p:spPr>
-      </p:sp>
-      <p:sp>
-        <p:nvSpPr>
-          <p:cNvPr id="7" name="Text 4"/>
-          <p:cNvSpPr txBox="1"/>
-          <p:nvPr/>
-        </p:nvSpPr>
-        <p:spPr>
-          <a:xfrm>
-            <a:off x="530352" y="2148840"/>
-            <a:ext cx="1773936" cy="1051560"/>
-          </a:xfrm>
-          <a:prstGeom prst="rect">
-            <a:avLst/>
-          </a:prstGeom>
-          <a:noFill/>
-          <a:ln/>
-        </p:spPr>
-        <p:txBody>
-          <a:bodyPr wrap="square" lIns="0" tIns="0" rIns="0" bIns="0" rtlCol="0" anchor="ctr"/>
-          <a:lstStyle/>
-          <a:p>
-            <a:pPr algn="ctr" indent="0" marL="0">
-              <a:buNone/>
-            </a:pPr>
-            <a:r>
-              <a:rPr lang="en-US" sz="1500" b="1" dirty="0">
-                <a:solidFill>
-                  <a:schemeClr val="bg1"/>
-                </a:solidFill>
-                <a:latin typeface="Calibri" pitchFamily="34" charset="0"/>
-                <a:ea typeface="Calibri" pitchFamily="34" charset="-122"/>
-                <a:cs typeface="Calibri" pitchFamily="34" charset="-120"/>
-              </a:rPr>
-              <a:t>User / bridge</a:t>
-            </a:r>
-            <a:endParaRPr lang="en-US" sz="1500" dirty="0"/>
-          </a:p>
-          <a:p>
-            <a:pPr algn="ctr" indent="0" marL="0">
-              <a:buNone/>
-            </a:pPr>
-            <a:r>
-              <a:rPr lang="en-US" sz="1500" b="1" dirty="0">
-                <a:solidFill>
-                  <a:schemeClr val="bg1"/>
-                </a:solidFill>
-                <a:latin typeface="Calibri" pitchFamily="34" charset="0"/>
-                <a:ea typeface="Calibri" pitchFamily="34" charset="-122"/>
-                <a:cs typeface="Calibri" pitchFamily="34" charset="-120"/>
-              </a:rPr>
-              <a:t>phone</a:t>
-            </a:r>
-            <a:endParaRPr lang="en-US" sz="1500" dirty="0"/>
-          </a:p>
-        </p:txBody>
-      </p:sp>
-      <p:sp>
-        <p:nvSpPr>
-          <p:cNvPr id="8" name="arrow"/>
-          <p:cNvSpPr/>
-          <p:nvPr/>
-        </p:nvSpPr>
-        <p:spPr>
-          <a:xfrm>
-            <a:off x="2404872" y="2670048"/>
-            <a:ext cx="310896" cy="0"/>
-          </a:xfrm>
-          <a:prstGeom prst="line">
-            <a:avLst/>
-          </a:prstGeom>
-          <a:noFill/>
-          <a:ln w="28575">
-            <a:solidFill>
-              <a:schemeClr val="accent5"/>
-            </a:solidFill>
-            <a:prstDash val="solid"/>
-            <a:tailEnd type="triangle"/>
-          </a:ln>
-        </p:spPr>
-      </p:sp>
-      <p:sp>
-        <p:nvSpPr>
-          <p:cNvPr id="9" name="node Web server + DispatcherServlet (built in)"/>
-          <p:cNvSpPr/>
-          <p:nvPr/>
-        </p:nvSpPr>
-        <p:spPr>
-          <a:xfrm>
-            <a:off x="2743200" y="2148840"/>
-            <a:ext cx="1920240" cy="1051560"/>
-          </a:xfrm>
-          <a:prstGeom prst="roundRect">
-            <a:avLst>
-              <a:gd name="adj" fmla="val 8696"/>
-            </a:avLst>
-          </a:prstGeom>
-          <a:solidFill>
-            <a:schemeClr val="accent2"/>
-          </a:solidFill>
-          <a:ln/>
-        </p:spPr>
-      </p:sp>
-      <p:sp>
-        <p:nvSpPr>
-          <p:cNvPr id="10" name="Text 7"/>
-          <p:cNvSpPr txBox="1"/>
-          <p:nvPr/>
-        </p:nvSpPr>
-        <p:spPr>
-          <a:xfrm>
-            <a:off x="2816352" y="2148840"/>
-            <a:ext cx="1773936" cy="1051560"/>
-          </a:xfrm>
-          <a:prstGeom prst="rect">
-            <a:avLst/>
-          </a:prstGeom>
-          <a:noFill/>
-          <a:ln/>
-        </p:spPr>
-        <p:txBody>
-          <a:bodyPr wrap="square" lIns="0" tIns="0" rIns="0" bIns="0" rtlCol="0" anchor="ctr"/>
-          <a:lstStyle/>
-          <a:p>
-            <a:pPr algn="ctr" indent="0" marL="0">
-              <a:buNone/>
-            </a:pPr>
-            <a:r>
-              <a:rPr lang="en-US" sz="1500" b="1" dirty="0">
-                <a:solidFill>
-                  <a:schemeClr val="tx1"/>
-                </a:solidFill>
-                <a:latin typeface="Calibri" pitchFamily="34" charset="0"/>
-                <a:ea typeface="Calibri" pitchFamily="34" charset="-122"/>
-                <a:cs typeface="Calibri" pitchFamily="34" charset="-120"/>
-              </a:rPr>
-              <a:t>Web server +</a:t>
-            </a:r>
-            <a:endParaRPr lang="en-US" sz="1500" dirty="0"/>
-          </a:p>
-          <a:p>
-            <a:pPr algn="ctr" indent="0" marL="0">
-              <a:buNone/>
-            </a:pPr>
-            <a:r>
-              <a:rPr lang="en-US" sz="1500" b="1" dirty="0">
-                <a:solidFill>
-                  <a:schemeClr val="tx1"/>
-                </a:solidFill>
-                <a:latin typeface="Calibri" pitchFamily="34" charset="0"/>
-                <a:ea typeface="Calibri" pitchFamily="34" charset="-122"/>
-                <a:cs typeface="Calibri" pitchFamily="34" charset="-120"/>
-              </a:rPr>
-              <a:t>DispatcherServlet</a:t>
-            </a:r>
-            <a:endParaRPr lang="en-US" sz="1500" dirty="0"/>
-          </a:p>
-          <a:p>
-            <a:pPr algn="ctr" indent="0" marL="0">
-              <a:buNone/>
-            </a:pPr>
-            <a:r>
-              <a:rPr lang="en-US" sz="1500" b="1" dirty="0">
-                <a:solidFill>
-                  <a:schemeClr val="tx1"/>
-                </a:solidFill>
-                <a:latin typeface="Calibri" pitchFamily="34" charset="0"/>
-                <a:ea typeface="Calibri" pitchFamily="34" charset="-122"/>
-                <a:cs typeface="Calibri" pitchFamily="34" charset="-120"/>
-              </a:rPr>
-              <a:t>(built in)</a:t>
-            </a:r>
-            <a:endParaRPr lang="en-US" sz="1500" dirty="0"/>
-          </a:p>
-        </p:txBody>
-      </p:sp>
-      <p:sp>
-        <p:nvSpPr>
-          <p:cNvPr id="11" name="arrow"/>
-          <p:cNvSpPr/>
-          <p:nvPr/>
-        </p:nvSpPr>
-        <p:spPr>
-          <a:xfrm>
-            <a:off x="4690872" y="2670048"/>
-            <a:ext cx="310896" cy="0"/>
-          </a:xfrm>
-          <a:prstGeom prst="line">
-            <a:avLst/>
-          </a:prstGeom>
-          <a:noFill/>
-          <a:ln w="28575">
-            <a:solidFill>
-              <a:schemeClr val="accent5"/>
-            </a:solidFill>
-            <a:prstDash val="solid"/>
-            <a:tailEnd type="triangle"/>
-          </a:ln>
-        </p:spPr>
-      </p:sp>
-      <p:sp>
-        <p:nvSpPr>
-          <p:cNvPr id="12" name="node ApiController .ingest()"/>
-          <p:cNvSpPr/>
-          <p:nvPr/>
-        </p:nvSpPr>
-        <p:spPr>
-          <a:xfrm>
-            <a:off x="5029200" y="2148840"/>
-            <a:ext cx="1920240" cy="1051560"/>
-          </a:xfrm>
-          <a:prstGeom prst="roundRect">
-            <a:avLst>
-              <a:gd name="adj" fmla="val 8696"/>
-            </a:avLst>
-          </a:prstGeom>
-          <a:solidFill>
-            <a:schemeClr val="accent1"/>
-          </a:solidFill>
-          <a:ln/>
-        </p:spPr>
-      </p:sp>
-      <p:sp>
-        <p:nvSpPr>
-          <p:cNvPr id="13" name="Text 10"/>
-          <p:cNvSpPr txBox="1"/>
-          <p:nvPr/>
-        </p:nvSpPr>
-        <p:spPr>
-          <a:xfrm>
-            <a:off x="5102352" y="2148840"/>
-            <a:ext cx="1773936" cy="1051560"/>
-          </a:xfrm>
-          <a:prstGeom prst="rect">
-            <a:avLst/>
-          </a:prstGeom>
-          <a:noFill/>
-          <a:ln/>
-        </p:spPr>
-        <p:txBody>
-          <a:bodyPr wrap="square" lIns="0" tIns="0" rIns="0" bIns="0" rtlCol="0" anchor="ctr"/>
-          <a:lstStyle/>
-          <a:p>
-            <a:pPr algn="ctr" indent="0" marL="0">
-              <a:buNone/>
-            </a:pPr>
-            <a:r>
-              <a:rPr lang="en-US" sz="1500" b="1" dirty="0">
-                <a:solidFill>
-                  <a:schemeClr val="bg1"/>
-                </a:solidFill>
-                <a:latin typeface="Calibri" pitchFamily="34" charset="0"/>
-                <a:ea typeface="Calibri" pitchFamily="34" charset="-122"/>
-                <a:cs typeface="Calibri" pitchFamily="34" charset="-120"/>
-              </a:rPr>
-              <a:t>ApiController</a:t>
-            </a:r>
-            <a:endParaRPr lang="en-US" sz="1500" dirty="0"/>
-          </a:p>
-          <a:p>
-            <a:pPr algn="ctr" indent="0" marL="0">
-              <a:buNone/>
-            </a:pPr>
-            <a:r>
-              <a:rPr lang="en-US" sz="1500" b="1" dirty="0">
-                <a:solidFill>
-                  <a:schemeClr val="bg1"/>
-                </a:solidFill>
-                <a:latin typeface="Calibri" pitchFamily="34" charset="0"/>
-                <a:ea typeface="Calibri" pitchFamily="34" charset="-122"/>
-                <a:cs typeface="Calibri" pitchFamily="34" charset="-120"/>
-              </a:rPr>
-              <a:t>.ingest()</a:t>
-            </a:r>
-            <a:endParaRPr lang="en-US" sz="1500" dirty="0"/>
-          </a:p>
-        </p:txBody>
-      </p:sp>
-      <p:sp>
-        <p:nvSpPr>
-          <p:cNvPr id="14" name="arrow"/>
-          <p:cNvSpPr/>
-          <p:nvPr/>
-        </p:nvSpPr>
-        <p:spPr>
-          <a:xfrm>
-            <a:off x="6976872" y="2670048"/>
-            <a:ext cx="310896" cy="0"/>
-          </a:xfrm>
-          <a:prstGeom prst="line">
-            <a:avLst/>
-          </a:prstGeom>
-          <a:noFill/>
-          <a:ln w="28575">
-            <a:solidFill>
-              <a:schemeClr val="accent5"/>
-            </a:solidFill>
-            <a:prstDash val="solid"/>
-            <a:tailEnd type="triangle"/>
-          </a:ln>
-        </p:spPr>
-      </p:sp>
-      <p:sp>
-        <p:nvSpPr>
-          <p:cNvPr id="15" name="node BridgeIngestion Service"/>
-          <p:cNvSpPr/>
-          <p:nvPr/>
-        </p:nvSpPr>
-        <p:spPr>
-          <a:xfrm>
-            <a:off x="7315200" y="2148840"/>
-            <a:ext cx="1920240" cy="1051560"/>
-          </a:xfrm>
-          <a:prstGeom prst="roundRect">
-            <a:avLst>
-              <a:gd name="adj" fmla="val 8696"/>
-            </a:avLst>
-          </a:prstGeom>
-          <a:solidFill>
-            <a:schemeClr val="accent4"/>
-          </a:solidFill>
-          <a:ln/>
-        </p:spPr>
-      </p:sp>
-      <p:sp>
-        <p:nvSpPr>
-          <p:cNvPr id="16" name="Text 13"/>
-          <p:cNvSpPr txBox="1"/>
-          <p:nvPr/>
-        </p:nvSpPr>
-        <p:spPr>
-          <a:xfrm>
-            <a:off x="7388352" y="2148840"/>
-            <a:ext cx="1773936" cy="1051560"/>
-          </a:xfrm>
-          <a:prstGeom prst="rect">
-            <a:avLst/>
-          </a:prstGeom>
-          <a:noFill/>
-          <a:ln/>
-        </p:spPr>
-        <p:txBody>
-          <a:bodyPr wrap="square" lIns="0" tIns="0" rIns="0" bIns="0" rtlCol="0" anchor="ctr"/>
-          <a:lstStyle/>
-          <a:p>
-            <a:pPr algn="ctr" indent="0" marL="0">
-              <a:buNone/>
-            </a:pPr>
-            <a:r>
-              <a:rPr lang="en-US" sz="1500" b="1" dirty="0">
-                <a:solidFill>
-                  <a:schemeClr val="bg1"/>
-                </a:solidFill>
-                <a:latin typeface="Calibri" pitchFamily="34" charset="0"/>
-                <a:ea typeface="Calibri" pitchFamily="34" charset="-122"/>
-                <a:cs typeface="Calibri" pitchFamily="34" charset="-120"/>
-              </a:rPr>
-              <a:t>BridgeIngestion</a:t>
-            </a:r>
-            <a:endParaRPr lang="en-US" sz="1500" dirty="0"/>
-          </a:p>
-          <a:p>
-            <a:pPr algn="ctr" indent="0" marL="0">
-              <a:buNone/>
-            </a:pPr>
-            <a:r>
-              <a:rPr lang="en-US" sz="1500" b="1" dirty="0">
-                <a:solidFill>
-                  <a:schemeClr val="bg1"/>
-                </a:solidFill>
-                <a:latin typeface="Calibri" pitchFamily="34" charset="0"/>
-                <a:ea typeface="Calibri" pitchFamily="34" charset="-122"/>
-                <a:cs typeface="Calibri" pitchFamily="34" charset="-120"/>
-              </a:rPr>
-              <a:t>Service</a:t>
-            </a:r>
-            <a:endParaRPr lang="en-US" sz="1500" dirty="0"/>
-          </a:p>
-        </p:txBody>
-      </p:sp>
-      <p:sp>
-        <p:nvSpPr>
-          <p:cNvPr id="17" name="arrow"/>
-          <p:cNvSpPr/>
-          <p:nvPr/>
-        </p:nvSpPr>
-        <p:spPr>
-          <a:xfrm>
-            <a:off x="9262872" y="2670048"/>
-            <a:ext cx="310896" cy="0"/>
-          </a:xfrm>
-          <a:prstGeom prst="line">
-            <a:avLst/>
-          </a:prstGeom>
-          <a:noFill/>
-          <a:ln w="28575">
-            <a:solidFill>
-              <a:schemeClr val="accent5"/>
-            </a:solidFill>
-            <a:prstDash val="solid"/>
-            <a:tailEnd type="triangle"/>
-          </a:ln>
-        </p:spPr>
-      </p:sp>
-      <p:sp>
-        <p:nvSpPr>
-          <p:cNvPr id="18" name="node Database"/>
-          <p:cNvSpPr/>
-          <p:nvPr/>
-        </p:nvSpPr>
-        <p:spPr>
-          <a:xfrm>
-            <a:off x="9601200" y="2148840"/>
-            <a:ext cx="1920240" cy="1051560"/>
-          </a:xfrm>
-          <a:prstGeom prst="roundRect">
-            <a:avLst>
-              <a:gd name="adj" fmla="val 8696"/>
-            </a:avLst>
-          </a:prstGeom>
-          <a:solidFill>
-            <a:schemeClr val="accent6"/>
-          </a:solidFill>
-          <a:ln/>
-        </p:spPr>
-      </p:sp>
-      <p:sp>
-        <p:nvSpPr>
-          <p:cNvPr id="19" name="Text 16"/>
-          <p:cNvSpPr txBox="1"/>
-          <p:nvPr/>
-        </p:nvSpPr>
-        <p:spPr>
-          <a:xfrm>
-            <a:off x="9674352" y="2148840"/>
-            <a:ext cx="1773936" cy="1051560"/>
-          </a:xfrm>
-          <a:prstGeom prst="rect">
-            <a:avLst/>
-          </a:prstGeom>
-          <a:noFill/>
-          <a:ln/>
-        </p:spPr>
-        <p:txBody>
-          <a:bodyPr wrap="square" lIns="0" tIns="0" rIns="0" bIns="0" rtlCol="0" anchor="ctr"/>
-          <a:lstStyle/>
-          <a:p>
-            <a:pPr algn="ctr" indent="0" marL="0">
-              <a:buNone/>
-            </a:pPr>
-            <a:r>
-              <a:rPr lang="en-US" sz="1500" b="1" dirty="0">
-                <a:solidFill>
-                  <a:schemeClr val="bg1"/>
-                </a:solidFill>
-                <a:latin typeface="Calibri" pitchFamily="34" charset="0"/>
-                <a:ea typeface="Calibri" pitchFamily="34" charset="-122"/>
-                <a:cs typeface="Calibri" pitchFamily="34" charset="-120"/>
-              </a:rPr>
-              <a:t>Database</a:t>
-            </a:r>
-            <a:endParaRPr lang="en-US" sz="1500" dirty="0"/>
-          </a:p>
-        </p:txBody>
-      </p:sp>
-      <p:sp>
-        <p:nvSpPr>
-          <p:cNvPr id="20" name="Text 17"/>
-          <p:cNvSpPr txBox="1"/>
-          <p:nvPr/>
-        </p:nvSpPr>
-        <p:spPr>
-          <a:xfrm>
-            <a:off x="457200" y="3291840"/>
-            <a:ext cx="11247120" cy="320040"/>
-          </a:xfrm>
-          <a:prstGeom prst="rect">
-            <a:avLst/>
-          </a:prstGeom>
-          <a:noFill/>
-          <a:ln/>
-        </p:spPr>
-        <p:txBody>
-          <a:bodyPr wrap="square" lIns="0" tIns="0" rIns="0" bIns="0" rtlCol="0" anchor="t"/>
-          <a:lstStyle/>
-          <a:p>
-            <a:pPr algn="l" indent="0" marL="0">
-              <a:buNone/>
-            </a:pPr>
-            <a:r>
-              <a:rPr lang="en-US" sz="1400" i="1" dirty="0">
-                <a:solidFill>
-                  <a:schemeClr val="accent5"/>
-                </a:solidFill>
-                <a:latin typeface="Calibri" pitchFamily="34" charset="0"/>
-                <a:ea typeface="Calibri" pitchFamily="34" charset="-122"/>
-                <a:cs typeface="Calibri" pitchFamily="34" charset="-120"/>
-              </a:rPr>
-              <a:t>Request goes in →   Response (JSON) comes back ←</a:t>
-            </a:r>
-            <a:endParaRPr lang="en-US" sz="1400" dirty="0"/>
-          </a:p>
-        </p:txBody>
-      </p:sp>
-      <p:graphicFrame>
-        <p:nvGraphicFramePr>
-          <p:cNvPr id="27" name="servlet table"/>
-          <p:cNvGraphicFramePr>
-            <a:graphicFrameLocks noGrp="1"/>
-          </p:cNvGraphicFramePr>
-          <p:nvPr>
-            <p:extLst>
-              <p:ext uri="{D42A27DB-BD31-4B8C-83A1-F6EECF244321}">
-                <p14:modId xmlns:p14="http://schemas.microsoft.com/office/powerpoint/2010/main" val="1579011935"/>
-              </p:ext>
-            </p:extLst>
-          </p:nvPr>
-        </p:nvGraphicFramePr>
-        <p:xfrm>
-          <a:off x="457200" y="3703320"/>
-          <a:ext cx="11274552" cy="914400"/>
-        </p:xfrm>
-        <a:graphic>
-          <a:graphicData uri="http://schemas.openxmlformats.org/drawingml/2006/table">
-            <a:tbl>
-              <a:tblPr/>
-              <a:tblGrid>
-                <a:gridCol w="5486400"/>
-                <a:gridCol w="5788152"/>
-              </a:tblGrid>
-              <a:tr h="365760">
-                <a:tc>
-                  <a:txBody>
-                    <a:bodyPr/>
-                    <a:lstStyle/>
-                    <a:p>
-                      <a:pPr indent="0" marL="0">
-                        <a:buNone/>
-                      </a:pPr>
-                      <a:r>
-                        <a:rPr lang="en-US" sz="1400" b="1" dirty="0">
-                          <a:solidFill>
-                            <a:schemeClr val="bg1"/>
-                          </a:solidFill>
-                          <a:latin typeface="Calibri" pitchFamily="34" charset="0"/>
-                          <a:ea typeface="Calibri" pitchFamily="34" charset="-122"/>
-                          <a:cs typeface="Calibri" pitchFamily="34" charset="-120"/>
-                        </a:rPr>
-                        <a:t>Plain servlet world</a:t>
+                        <a:t>Method</a:t>
                       </a:r>
                       <a:endParaRPr lang="en-US" sz="1400" dirty="0">
                         <a:latin typeface="Calibri" charset="0"/>
@@ -27366,7 +26800,7 @@
                           <a:ea typeface="Calibri" pitchFamily="34" charset="-122"/>
                           <a:cs typeface="Calibri" pitchFamily="34" charset="-120"/>
                         </a:rPr>
-                        <a:t>What we write instead</a:t>
+                        <a:t>What it does</a:t>
                       </a:r>
                       <a:endParaRPr lang="en-US" sz="1400" dirty="0">
                         <a:latin typeface="Calibri" charset="0"/>
@@ -27430,13 +26864,13 @@
                       <a:r>
                         <a:rPr lang="en-US" sz="1250" dirty="0">
                           <a:solidFill>
-                            <a:schemeClr val="tx1"/>
+                            <a:schemeClr val="accent4"/>
                           </a:solidFill>
                           <a:latin typeface="Courier New" pitchFamily="34" charset="0"/>
                           <a:ea typeface="Courier New" pitchFamily="34" charset="-122"/>
                           <a:cs typeface="Courier New" pitchFamily="34" charset="-120"/>
                         </a:rPr>
-                        <a:t>doPost(request, response)</a:t>
+                        <a:t>/servlet/health</a:t>
                       </a:r>
                       <a:endParaRPr lang="en-US" sz="1250" dirty="0">
                         <a:latin typeface="Courier New" charset="0"/>
@@ -27504,12 +26938,148 @@
                           <a:ea typeface="Courier New" pitchFamily="34" charset="-122"/>
                           <a:cs typeface="Courier New" pitchFamily="34" charset="-120"/>
                         </a:rPr>
-                        <a:t>@PostMapping("/bridge/ingest")</a:t>
+                        <a:t>HealthServlet</a:t>
                       </a:r>
                       <a:endParaRPr lang="en-US" sz="1250" dirty="0">
                         <a:latin typeface="Courier New" charset="0"/>
                         <a:ea typeface="Courier New" charset="0"/>
                         <a:cs typeface="Courier New" charset="0"/>
+                      </a:endParaRPr>
+                    </a:p>
+                  </a:txBody>
+                  <a:tcPr marL="109728" marR="109728" marT="0" marB="0" anchor="ctr">
+                    <a:lnL w="6350" cap="flat" cmpd="sng" algn="ctr">
+                      <a:solidFill>
+                        <a:srgbClr val="C9D3DC"/>
+                      </a:solidFill>
+                      <a:prstDash val="solid"/>
+                      <a:round/>
+                      <a:headEnd type="none" w="med" len="med"/>
+                      <a:tailEnd type="none" w="med" len="med"/>
+                    </a:lnL>
+                    <a:lnR w="6350" cap="flat" cmpd="sng" algn="ctr">
+                      <a:solidFill>
+                        <a:srgbClr val="C9D3DC"/>
+                      </a:solidFill>
+                      <a:prstDash val="solid"/>
+                      <a:round/>
+                      <a:headEnd type="none" w="med" len="med"/>
+                      <a:tailEnd type="none" w="med" len="med"/>
+                    </a:lnR>
+                    <a:lnT w="6350" cap="flat" cmpd="sng" algn="ctr">
+                      <a:solidFill>
+                        <a:srgbClr val="C9D3DC"/>
+                      </a:solidFill>
+                      <a:prstDash val="solid"/>
+                      <a:round/>
+                      <a:headEnd type="none" w="med" len="med"/>
+                      <a:tailEnd type="none" w="med" len="med"/>
+                    </a:lnT>
+                    <a:lnB w="6350" cap="flat" cmpd="sng" algn="ctr">
+                      <a:solidFill>
+                        <a:srgbClr val="C9D3DC"/>
+                      </a:solidFill>
+                      <a:prstDash val="solid"/>
+                      <a:round/>
+                      <a:headEnd type="none" w="med" len="med"/>
+                      <a:tailEnd type="none" w="med" len="med"/>
+                    </a:lnB>
+                    <a:solidFill>
+                      <a:srgbClr val="FFFFFF"/>
+                    </a:solidFill>
+                  </a:tcPr>
+                </a:tc>
+                <a:tc>
+                  <a:txBody>
+                    <a:bodyPr/>
+                    <a:lstStyle/>
+                    <a:p>
+                      <a:pPr indent="0" marL="0">
+                        <a:buNone/>
+                      </a:pPr>
+                      <a:r>
+                        <a:rPr lang="en-US" sz="1250" dirty="0">
+                          <a:solidFill>
+                            <a:schemeClr val="accent4"/>
+                          </a:solidFill>
+                          <a:latin typeface="Courier New" pitchFamily="34" charset="0"/>
+                          <a:ea typeface="Courier New" pitchFamily="34" charset="-122"/>
+                          <a:cs typeface="Courier New" pitchFamily="34" charset="-120"/>
+                        </a:rPr>
+                        <a:t>doGet</a:t>
+                      </a:r>
+                      <a:endParaRPr lang="en-US" sz="1250" dirty="0">
+                        <a:latin typeface="Courier New" charset="0"/>
+                        <a:ea typeface="Courier New" charset="0"/>
+                        <a:cs typeface="Courier New" charset="0"/>
+                      </a:endParaRPr>
+                    </a:p>
+                  </a:txBody>
+                  <a:tcPr marL="109728" marR="109728" marT="0" marB="0" anchor="ctr">
+                    <a:lnL w="6350" cap="flat" cmpd="sng" algn="ctr">
+                      <a:solidFill>
+                        <a:srgbClr val="C9D3DC"/>
+                      </a:solidFill>
+                      <a:prstDash val="solid"/>
+                      <a:round/>
+                      <a:headEnd type="none" w="med" len="med"/>
+                      <a:tailEnd type="none" w="med" len="med"/>
+                    </a:lnL>
+                    <a:lnR w="6350" cap="flat" cmpd="sng" algn="ctr">
+                      <a:solidFill>
+                        <a:srgbClr val="C9D3DC"/>
+                      </a:solidFill>
+                      <a:prstDash val="solid"/>
+                      <a:round/>
+                      <a:headEnd type="none" w="med" len="med"/>
+                      <a:tailEnd type="none" w="med" len="med"/>
+                    </a:lnR>
+                    <a:lnT w="6350" cap="flat" cmpd="sng" algn="ctr">
+                      <a:solidFill>
+                        <a:srgbClr val="C9D3DC"/>
+                      </a:solidFill>
+                      <a:prstDash val="solid"/>
+                      <a:round/>
+                      <a:headEnd type="none" w="med" len="med"/>
+                      <a:tailEnd type="none" w="med" len="med"/>
+                    </a:lnT>
+                    <a:lnB w="6350" cap="flat" cmpd="sng" algn="ctr">
+                      <a:solidFill>
+                        <a:srgbClr val="C9D3DC"/>
+                      </a:solidFill>
+                      <a:prstDash val="solid"/>
+                      <a:round/>
+                      <a:headEnd type="none" w="med" len="med"/>
+                      <a:tailEnd type="none" w="med" len="med"/>
+                    </a:lnB>
+                    <a:solidFill>
+                      <a:srgbClr val="FFFFFF"/>
+                    </a:solidFill>
+                  </a:tcPr>
+                </a:tc>
+                <a:tc>
+                  <a:txBody>
+                    <a:bodyPr/>
+                    <a:lstStyle/>
+                    <a:p>
+                      <a:pPr indent="0" marL="0">
+                        <a:buNone/>
+                      </a:pPr>
+                      <a:r>
+                        <a:rPr lang="en-US" sz="1350" dirty="0">
+                          <a:solidFill>
+                            <a:schemeClr val="tx1"/>
+                          </a:solidFill>
+                          <a:latin typeface="Calibri" pitchFamily="34" charset="0"/>
+                          <a:ea typeface="Calibri" pitchFamily="34" charset="-122"/>
+                          <a:cs typeface="Calibri" pitchFamily="34" charset="-120"/>
+                        </a:rPr>
+                        <a:t>Database in use + ledger totals (JSON)</a:t>
+                      </a:r>
+                      <a:endParaRPr lang="en-US" sz="1350" dirty="0">
+                        <a:latin typeface="Calibri" charset="0"/>
+                        <a:ea typeface="Calibri" charset="0"/>
+                        <a:cs typeface="Calibri" charset="0"/>
                       </a:endParaRPr>
                     </a:p>
                   </a:txBody>
@@ -27568,13 +27138,13 @@
                       <a:r>
                         <a:rPr lang="en-US" sz="1250" dirty="0">
                           <a:solidFill>
-                            <a:schemeClr val="tx1"/>
+                            <a:schemeClr val="accent4"/>
                           </a:solidFill>
                           <a:latin typeface="Courier New" pitchFamily="34" charset="0"/>
                           <a:ea typeface="Courier New" pitchFamily="34" charset="-122"/>
                           <a:cs typeface="Courier New" pitchFamily="34" charset="-120"/>
                         </a:rPr>
-                        <a:t>doGet(request, response)</a:t>
+                        <a:t>/servlet/export</a:t>
                       </a:r>
                       <a:endParaRPr lang="en-US" sz="1250" dirty="0">
                         <a:latin typeface="Courier New" charset="0"/>
@@ -27642,12 +27212,148 @@
                           <a:ea typeface="Courier New" pitchFamily="34" charset="-122"/>
                           <a:cs typeface="Courier New" pitchFamily="34" charset="-120"/>
                         </a:rPr>
-                        <a:t>@GetMapping("/accounts")</a:t>
+                        <a:t>LedgerExportServlet</a:t>
                       </a:r>
                       <a:endParaRPr lang="en-US" sz="1250" dirty="0">
                         <a:latin typeface="Courier New" charset="0"/>
                         <a:ea typeface="Courier New" charset="0"/>
                         <a:cs typeface="Courier New" charset="0"/>
+                      </a:endParaRPr>
+                    </a:p>
+                  </a:txBody>
+                  <a:tcPr marL="109728" marR="109728" marT="0" marB="0" anchor="ctr">
+                    <a:lnL w="6350" cap="flat" cmpd="sng" algn="ctr">
+                      <a:solidFill>
+                        <a:srgbClr val="C9D3DC"/>
+                      </a:solidFill>
+                      <a:prstDash val="solid"/>
+                      <a:round/>
+                      <a:headEnd type="none" w="med" len="med"/>
+                      <a:tailEnd type="none" w="med" len="med"/>
+                    </a:lnL>
+                    <a:lnR w="6350" cap="flat" cmpd="sng" algn="ctr">
+                      <a:solidFill>
+                        <a:srgbClr val="C9D3DC"/>
+                      </a:solidFill>
+                      <a:prstDash val="solid"/>
+                      <a:round/>
+                      <a:headEnd type="none" w="med" len="med"/>
+                      <a:tailEnd type="none" w="med" len="med"/>
+                    </a:lnR>
+                    <a:lnT w="6350" cap="flat" cmpd="sng" algn="ctr">
+                      <a:solidFill>
+                        <a:srgbClr val="C9D3DC"/>
+                      </a:solidFill>
+                      <a:prstDash val="solid"/>
+                      <a:round/>
+                      <a:headEnd type="none" w="med" len="med"/>
+                      <a:tailEnd type="none" w="med" len="med"/>
+                    </a:lnT>
+                    <a:lnB w="6350" cap="flat" cmpd="sng" algn="ctr">
+                      <a:solidFill>
+                        <a:srgbClr val="C9D3DC"/>
+                      </a:solidFill>
+                      <a:prstDash val="solid"/>
+                      <a:round/>
+                      <a:headEnd type="none" w="med" len="med"/>
+                      <a:tailEnd type="none" w="med" len="med"/>
+                    </a:lnB>
+                    <a:solidFill>
+                      <a:srgbClr val="F4F8F7"/>
+                    </a:solidFill>
+                  </a:tcPr>
+                </a:tc>
+                <a:tc>
+                  <a:txBody>
+                    <a:bodyPr/>
+                    <a:lstStyle/>
+                    <a:p>
+                      <a:pPr indent="0" marL="0">
+                        <a:buNone/>
+                      </a:pPr>
+                      <a:r>
+                        <a:rPr lang="en-US" sz="1250" dirty="0">
+                          <a:solidFill>
+                            <a:schemeClr val="accent4"/>
+                          </a:solidFill>
+                          <a:latin typeface="Courier New" pitchFamily="34" charset="0"/>
+                          <a:ea typeface="Courier New" pitchFamily="34" charset="-122"/>
+                          <a:cs typeface="Courier New" pitchFamily="34" charset="-120"/>
+                        </a:rPr>
+                        <a:t>doGet</a:t>
+                      </a:r>
+                      <a:endParaRPr lang="en-US" sz="1250" dirty="0">
+                        <a:latin typeface="Courier New" charset="0"/>
+                        <a:ea typeface="Courier New" charset="0"/>
+                        <a:cs typeface="Courier New" charset="0"/>
+                      </a:endParaRPr>
+                    </a:p>
+                  </a:txBody>
+                  <a:tcPr marL="109728" marR="109728" marT="0" marB="0" anchor="ctr">
+                    <a:lnL w="6350" cap="flat" cmpd="sng" algn="ctr">
+                      <a:solidFill>
+                        <a:srgbClr val="C9D3DC"/>
+                      </a:solidFill>
+                      <a:prstDash val="solid"/>
+                      <a:round/>
+                      <a:headEnd type="none" w="med" len="med"/>
+                      <a:tailEnd type="none" w="med" len="med"/>
+                    </a:lnL>
+                    <a:lnR w="6350" cap="flat" cmpd="sng" algn="ctr">
+                      <a:solidFill>
+                        <a:srgbClr val="C9D3DC"/>
+                      </a:solidFill>
+                      <a:prstDash val="solid"/>
+                      <a:round/>
+                      <a:headEnd type="none" w="med" len="med"/>
+                      <a:tailEnd type="none" w="med" len="med"/>
+                    </a:lnR>
+                    <a:lnT w="6350" cap="flat" cmpd="sng" algn="ctr">
+                      <a:solidFill>
+                        <a:srgbClr val="C9D3DC"/>
+                      </a:solidFill>
+                      <a:prstDash val="solid"/>
+                      <a:round/>
+                      <a:headEnd type="none" w="med" len="med"/>
+                      <a:tailEnd type="none" w="med" len="med"/>
+                    </a:lnT>
+                    <a:lnB w="6350" cap="flat" cmpd="sng" algn="ctr">
+                      <a:solidFill>
+                        <a:srgbClr val="C9D3DC"/>
+                      </a:solidFill>
+                      <a:prstDash val="solid"/>
+                      <a:round/>
+                      <a:headEnd type="none" w="med" len="med"/>
+                      <a:tailEnd type="none" w="med" len="med"/>
+                    </a:lnB>
+                    <a:solidFill>
+                      <a:srgbClr val="F4F8F7"/>
+                    </a:solidFill>
+                  </a:tcPr>
+                </a:tc>
+                <a:tc>
+                  <a:txBody>
+                    <a:bodyPr/>
+                    <a:lstStyle/>
+                    <a:p>
+                      <a:pPr indent="0" marL="0">
+                        <a:buNone/>
+                      </a:pPr>
+                      <a:r>
+                        <a:rPr lang="en-US" sz="1350" dirty="0">
+                          <a:solidFill>
+                            <a:schemeClr val="tx1"/>
+                          </a:solidFill>
+                          <a:latin typeface="Calibri" pitchFamily="34" charset="0"/>
+                          <a:ea typeface="Calibri" pitchFamily="34" charset="-122"/>
+                          <a:cs typeface="Calibri" pitchFamily="34" charset="-120"/>
+                        </a:rPr>
+                        <a:t>Live ledger as a CSV download</a:t>
+                      </a:r>
+                      <a:endParaRPr lang="en-US" sz="1350" dirty="0">
+                        <a:latin typeface="Calibri" charset="0"/>
+                        <a:ea typeface="Calibri" charset="0"/>
+                        <a:cs typeface="Calibri" charset="0"/>
                       </a:endParaRPr>
                     </a:p>
                   </a:txBody>
@@ -27706,13 +27412,13 @@
                       <a:r>
                         <a:rPr lang="en-US" sz="1250" dirty="0">
                           <a:solidFill>
-                            <a:schemeClr val="tx1"/>
+                            <a:schemeClr val="accent4"/>
                           </a:solidFill>
                           <a:latin typeface="Courier New" pitchFamily="34" charset="0"/>
                           <a:ea typeface="Courier New" pitchFamily="34" charset="-122"/>
                           <a:cs typeface="Courier New" pitchFamily="34" charset="-120"/>
                         </a:rPr>
-                        <a:t>request.getHeader("X-Bridge-Node-Id")</a:t>
+                        <a:t>/servlet/export</a:t>
                       </a:r>
                       <a:endParaRPr lang="en-US" sz="1250" dirty="0">
                         <a:latin typeface="Courier New" charset="0"/>
@@ -27780,12 +27486,148 @@
                           <a:ea typeface="Courier New" pitchFamily="34" charset="-122"/>
                           <a:cs typeface="Courier New" pitchFamily="34" charset="-120"/>
                         </a:rPr>
-                        <a:t>@RequestHeader("X-Bridge-Node-Id")</a:t>
+                        <a:t>LedgerExportServlet</a:t>
                       </a:r>
                       <a:endParaRPr lang="en-US" sz="1250" dirty="0">
                         <a:latin typeface="Courier New" charset="0"/>
                         <a:ea typeface="Courier New" charset="0"/>
                         <a:cs typeface="Courier New" charset="0"/>
+                      </a:endParaRPr>
+                    </a:p>
+                  </a:txBody>
+                  <a:tcPr marL="109728" marR="109728" marT="0" marB="0" anchor="ctr">
+                    <a:lnL w="6350" cap="flat" cmpd="sng" algn="ctr">
+                      <a:solidFill>
+                        <a:srgbClr val="C9D3DC"/>
+                      </a:solidFill>
+                      <a:prstDash val="solid"/>
+                      <a:round/>
+                      <a:headEnd type="none" w="med" len="med"/>
+                      <a:tailEnd type="none" w="med" len="med"/>
+                    </a:lnL>
+                    <a:lnR w="6350" cap="flat" cmpd="sng" algn="ctr">
+                      <a:solidFill>
+                        <a:srgbClr val="C9D3DC"/>
+                      </a:solidFill>
+                      <a:prstDash val="solid"/>
+                      <a:round/>
+                      <a:headEnd type="none" w="med" len="med"/>
+                      <a:tailEnd type="none" w="med" len="med"/>
+                    </a:lnR>
+                    <a:lnT w="6350" cap="flat" cmpd="sng" algn="ctr">
+                      <a:solidFill>
+                        <a:srgbClr val="C9D3DC"/>
+                      </a:solidFill>
+                      <a:prstDash val="solid"/>
+                      <a:round/>
+                      <a:headEnd type="none" w="med" len="med"/>
+                      <a:tailEnd type="none" w="med" len="med"/>
+                    </a:lnT>
+                    <a:lnB w="6350" cap="flat" cmpd="sng" algn="ctr">
+                      <a:solidFill>
+                        <a:srgbClr val="C9D3DC"/>
+                      </a:solidFill>
+                      <a:prstDash val="solid"/>
+                      <a:round/>
+                      <a:headEnd type="none" w="med" len="med"/>
+                      <a:tailEnd type="none" w="med" len="med"/>
+                    </a:lnB>
+                    <a:solidFill>
+                      <a:srgbClr val="FFFFFF"/>
+                    </a:solidFill>
+                  </a:tcPr>
+                </a:tc>
+                <a:tc>
+                  <a:txBody>
+                    <a:bodyPr/>
+                    <a:lstStyle/>
+                    <a:p>
+                      <a:pPr indent="0" marL="0">
+                        <a:buNone/>
+                      </a:pPr>
+                      <a:r>
+                        <a:rPr lang="en-US" sz="1250" dirty="0">
+                          <a:solidFill>
+                            <a:schemeClr val="accent4"/>
+                          </a:solidFill>
+                          <a:latin typeface="Courier New" pitchFamily="34" charset="0"/>
+                          <a:ea typeface="Courier New" pitchFamily="34" charset="-122"/>
+                          <a:cs typeface="Courier New" pitchFamily="34" charset="-120"/>
+                        </a:rPr>
+                        <a:t>doPost</a:t>
+                      </a:r>
+                      <a:endParaRPr lang="en-US" sz="1250" dirty="0">
+                        <a:latin typeface="Courier New" charset="0"/>
+                        <a:ea typeface="Courier New" charset="0"/>
+                        <a:cs typeface="Courier New" charset="0"/>
+                      </a:endParaRPr>
+                    </a:p>
+                  </a:txBody>
+                  <a:tcPr marL="109728" marR="109728" marT="0" marB="0" anchor="ctr">
+                    <a:lnL w="6350" cap="flat" cmpd="sng" algn="ctr">
+                      <a:solidFill>
+                        <a:srgbClr val="C9D3DC"/>
+                      </a:solidFill>
+                      <a:prstDash val="solid"/>
+                      <a:round/>
+                      <a:headEnd type="none" w="med" len="med"/>
+                      <a:tailEnd type="none" w="med" len="med"/>
+                    </a:lnL>
+                    <a:lnR w="6350" cap="flat" cmpd="sng" algn="ctr">
+                      <a:solidFill>
+                        <a:srgbClr val="C9D3DC"/>
+                      </a:solidFill>
+                      <a:prstDash val="solid"/>
+                      <a:round/>
+                      <a:headEnd type="none" w="med" len="med"/>
+                      <a:tailEnd type="none" w="med" len="med"/>
+                    </a:lnR>
+                    <a:lnT w="6350" cap="flat" cmpd="sng" algn="ctr">
+                      <a:solidFill>
+                        <a:srgbClr val="C9D3DC"/>
+                      </a:solidFill>
+                      <a:prstDash val="solid"/>
+                      <a:round/>
+                      <a:headEnd type="none" w="med" len="med"/>
+                      <a:tailEnd type="none" w="med" len="med"/>
+                    </a:lnT>
+                    <a:lnB w="6350" cap="flat" cmpd="sng" algn="ctr">
+                      <a:solidFill>
+                        <a:srgbClr val="C9D3DC"/>
+                      </a:solidFill>
+                      <a:prstDash val="solid"/>
+                      <a:round/>
+                      <a:headEnd type="none" w="med" len="med"/>
+                      <a:tailEnd type="none" w="med" len="med"/>
+                    </a:lnB>
+                    <a:solidFill>
+                      <a:srgbClr val="FFFFFF"/>
+                    </a:solidFill>
+                  </a:tcPr>
+                </a:tc>
+                <a:tc>
+                  <a:txBody>
+                    <a:bodyPr/>
+                    <a:lstStyle/>
+                    <a:p>
+                      <a:pPr indent="0" marL="0">
+                        <a:buNone/>
+                      </a:pPr>
+                      <a:r>
+                        <a:rPr lang="en-US" sz="1350" dirty="0">
+                          <a:solidFill>
+                            <a:schemeClr val="tx1"/>
+                          </a:solidFill>
+                          <a:latin typeface="Calibri" pitchFamily="34" charset="0"/>
+                          <a:ea typeface="Calibri" pitchFamily="34" charset="-122"/>
+                          <a:cs typeface="Calibri" pitchFamily="34" charset="-120"/>
+                        </a:rPr>
+                        <a:t>Save a CSV file on the server (201)</a:t>
+                      </a:r>
+                      <a:endParaRPr lang="en-US" sz="1350" dirty="0">
+                        <a:latin typeface="Calibri" charset="0"/>
+                        <a:ea typeface="Calibri" charset="0"/>
+                        <a:cs typeface="Calibri" charset="0"/>
                       </a:endParaRPr>
                     </a:p>
                   </a:txBody>
@@ -27844,13 +27686,13 @@
                       <a:r>
                         <a:rPr lang="en-US" sz="1250" dirty="0">
                           <a:solidFill>
-                            <a:schemeClr val="tx1"/>
+                            <a:schemeClr val="accent4"/>
                           </a:solidFill>
                           <a:latin typeface="Courier New" pitchFamily="34" charset="0"/>
                           <a:ea typeface="Courier New" pitchFamily="34" charset="-122"/>
                           <a:cs typeface="Courier New" pitchFamily="34" charset="-120"/>
                         </a:rPr>
-                        <a:t>read and parse the request body</a:t>
+                        <a:t>/servlet/audit</a:t>
                       </a:r>
                       <a:endParaRPr lang="en-US" sz="1250" dirty="0">
                         <a:latin typeface="Courier New" charset="0"/>
@@ -27918,7 +27760,7 @@
                           <a:ea typeface="Courier New" pitchFamily="34" charset="-122"/>
                           <a:cs typeface="Courier New" pitchFamily="34" charset="-120"/>
                         </a:rPr>
-                        <a:t>@RequestBody MeshPacket packet</a:t>
+                        <a:t>AuditLogServlet</a:t>
                       </a:r>
                       <a:endParaRPr lang="en-US" sz="1250" dirty="0">
                         <a:latin typeface="Courier New" charset="0"/>
@@ -27969,8 +27811,6 @@
                     </a:solidFill>
                   </a:tcPr>
                 </a:tc>
-              </a:tr>
-              <a:tr h="365760">
                 <a:tc>
                   <a:txBody>
                     <a:bodyPr/>
@@ -27982,13 +27822,13 @@
                       <a:r>
                         <a:rPr lang="en-US" sz="1250" dirty="0">
                           <a:solidFill>
-                            <a:schemeClr val="tx1"/>
+                            <a:schemeClr val="accent4"/>
                           </a:solidFill>
                           <a:latin typeface="Courier New" pitchFamily="34" charset="0"/>
                           <a:ea typeface="Courier New" pitchFamily="34" charset="-122"/>
                           <a:cs typeface="Courier New" pitchFamily="34" charset="-120"/>
                         </a:rPr>
-                        <a:t>write the response yourself</a:t>
+                        <a:t>doGet</a:t>
                       </a:r>
                       <a:endParaRPr lang="en-US" sz="1250" dirty="0">
                         <a:latin typeface="Courier New" charset="0"/>
@@ -28035,7 +27875,7 @@
                       <a:tailEnd type="none" w="med" len="med"/>
                     </a:lnB>
                     <a:solidFill>
-                      <a:srgbClr val="FFFFFF"/>
+                      <a:srgbClr val="F4F8F7"/>
                     </a:solidFill>
                   </a:tcPr>
                 </a:tc>
@@ -28048,20 +27888,20 @@
                         <a:buNone/>
                       </a:pPr>
                       <a:r>
-                        <a:rPr lang="en-US" sz="1250" dirty="0">
+                        <a:rPr lang="en-US" sz="1350" dirty="0">
                           <a:solidFill>
-                            <a:schemeClr val="accent4"/>
+                            <a:schemeClr val="tx1"/>
                           </a:solidFill>
-                          <a:latin typeface="Courier New" pitchFamily="34" charset="0"/>
-                          <a:ea typeface="Courier New" pitchFamily="34" charset="-122"/>
-                          <a:cs typeface="Courier New" pitchFamily="34" charset="-120"/>
+                          <a:latin typeface="Calibri" pitchFamily="34" charset="0"/>
+                          <a:ea typeface="Calibri" pitchFamily="34" charset="-122"/>
+                          <a:cs typeface="Calibri" pitchFamily="34" charset="-120"/>
                         </a:rPr>
-                        <a:t>return ResponseEntity.ok(result)</a:t>
+                        <a:t>Last lines of the audit log</a:t>
                       </a:r>
-                      <a:endParaRPr lang="en-US" sz="1250" dirty="0">
-                        <a:latin typeface="Courier New" charset="0"/>
-                        <a:ea typeface="Courier New" charset="0"/>
-                        <a:cs typeface="Courier New" charset="0"/>
+                      <a:endParaRPr lang="en-US" sz="1350" dirty="0">
+                        <a:latin typeface="Calibri" charset="0"/>
+                        <a:ea typeface="Calibri" charset="0"/>
+                        <a:cs typeface="Calibri" charset="0"/>
                       </a:endParaRPr>
                     </a:p>
                   </a:txBody>
@@ -28103,7 +27943,7 @@
                       <a:tailEnd type="none" w="med" len="med"/>
                     </a:lnB>
                     <a:solidFill>
-                      <a:srgbClr val="FFFFFF"/>
+                      <a:srgbClr val="F4F8F7"/>
                     </a:solidFill>
                   </a:tcPr>
                 </a:tc>
@@ -28120,8 +27960,8 @@
         </p:nvSpPr>
         <p:spPr>
           <a:xfrm>
-            <a:off x="457200" y="6035040"/>
-            <a:ext cx="11247120" cy="274320"/>
+            <a:off x="457200" y="5577840"/>
+            <a:ext cx="11247120" cy="640080"/>
           </a:xfrm>
           <a:prstGeom prst="rect">
             <a:avLst/>
@@ -28145,7 +27985,7 @@
                 <a:ea typeface="Calibri" pitchFamily="34" charset="-122"/>
                 <a:cs typeface="Calibri" pitchFamily="34" charset="-120"/>
               </a:rPr>
-              <a:t>Our controller has 9 API endpoints plus one that serves the dashboard page at /.</a:t>
+              <a:t>Registered in ServletConfig. RequestLogFilter adds an X-Request-Id header and logs time taken. The 9 /api endpoints go through Spring's DispatcherServlet to controllers.</a:t>
             </a:r>
             <a:endParaRPr lang="en-US" sz="1400" dirty="0"/>
           </a:p>
@@ -28731,7 +28571,7 @@
       </p:sp>
       <p:sp>
         <p:nvSpPr>
-          <p:cNvPr id="18" name="node ApiController (the entry point, replaces a hand-written servlet)"/>
+          <p:cNvPr id="18" name="node ApiController: entry point for /api/* requests"/>
           <p:cNvSpPr/>
           <p:nvPr/>
         </p:nvSpPr>
@@ -28784,7 +28624,7 @@
                 <a:ea typeface="Calibri" pitchFamily="34" charset="-122"/>
                 <a:cs typeface="Calibri" pitchFamily="34" charset="-120"/>
               </a:rPr>
-              <a:t>ApiController (the entry point, replaces a hand-written servlet)</a:t>
+              <a:t>ApiController: entry point for /api/* requests</a:t>
             </a:r>
             <a:endParaRPr lang="en-US" sz="1400" dirty="0"/>
           </a:p>
@@ -29159,7 +28999,7 @@
       </p:sp>
       <p:sp>
         <p:nvSpPr>
-          <p:cNvPr id="31" name="node Repositories (JPA / JDBC)"/>
+          <p:cNvPr id="31" name="node Repositories + JDBC DAO"/>
           <p:cNvSpPr/>
           <p:nvPr/>
         </p:nvSpPr>
@@ -29212,7 +29052,7 @@
                 <a:ea typeface="Calibri" pitchFamily="34" charset="-122"/>
                 <a:cs typeface="Calibri" pitchFamily="34" charset="-120"/>
               </a:rPr>
-              <a:t>Repositories (JPA / JDBC)</a:t>
+              <a:t>Repositories + JDBC DAO</a:t>
             </a:r>
             <a:endParaRPr lang="en-US" sz="1350" dirty="0"/>
           </a:p>
@@ -29244,7 +29084,7 @@
       </p:sp>
       <p:sp>
         <p:nvSpPr>
-          <p:cNvPr id="34" name="node H2 database"/>
+          <p:cNvPr id="34" name="node H2 or MySQL"/>
           <p:cNvSpPr/>
           <p:nvPr/>
         </p:nvSpPr>
@@ -29297,7 +29137,7 @@
                 <a:ea typeface="Calibri" pitchFamily="34" charset="-122"/>
                 <a:cs typeface="Calibri" pitchFamily="34" charset="-120"/>
               </a:rPr>
-              <a:t>H2 database</a:t>
+              <a:t>H2 or MySQL</a:t>
             </a:r>
             <a:endParaRPr lang="en-US" sz="1350" dirty="0"/>
           </a:p>
@@ -29305,59 +29145,25 @@
       </p:sp>
       <p:sp>
         <p:nvSpPr>
-          <p:cNvPr id="36" name="Text 33"/>
-          <p:cNvSpPr txBox="1"/>
-          <p:nvPr/>
-        </p:nvSpPr>
-        <p:spPr>
-          <a:xfrm>
-            <a:off x="3611880" y="4892040"/>
-            <a:ext cx="4206240" cy="640080"/>
-          </a:xfrm>
-          <a:prstGeom prst="rect">
-            <a:avLst/>
-          </a:prstGeom>
-          <a:noFill/>
-          <a:ln/>
-        </p:spPr>
-        <p:txBody>
-          <a:bodyPr wrap="square" lIns="0" tIns="0" rIns="0" bIns="0" rtlCol="0" anchor="t"/>
-          <a:lstStyle/>
-          <a:p>
-            <a:pPr algn="l" indent="0" marL="0">
-              <a:buNone/>
-            </a:pPr>
-            <a:r>
-              <a:rPr lang="en-US" sz="1350" dirty="0">
-                <a:solidFill>
-                  <a:schemeClr val="accent5"/>
-                </a:solidFill>
-                <a:latin typeface="Calibri" pitchFamily="34" charset="0"/>
-                <a:ea typeface="Calibri" pitchFamily="34" charset="-122"/>
-                <a:cs typeface="Calibri" pitchFamily="34" charset="-120"/>
-              </a:rPr>
-              <a:t>OOP classes: Account, Transaction,</a:t>
-            </a:r>
-            <a:endParaRPr lang="en-US" sz="1350" dirty="0"/>
-          </a:p>
-          <a:p>
-            <a:pPr algn="l" indent="0" marL="0">
-              <a:buNone/>
-            </a:pPr>
-            <a:r>
-              <a:rPr lang="en-US" sz="1350" dirty="0">
-                <a:solidFill>
-                  <a:schemeClr val="accent5"/>
-                </a:solidFill>
-                <a:latin typeface="Calibri" pitchFamily="34" charset="0"/>
-                <a:ea typeface="Calibri" pitchFamily="34" charset="-122"/>
-                <a:cs typeface="Calibri" pitchFamily="34" charset="-120"/>
-              </a:rPr>
-              <a:t>MeshPacket, PaymentInstruction</a:t>
-            </a:r>
-            <a:endParaRPr lang="en-US" sz="1350" dirty="0"/>
-          </a:p>
-        </p:txBody>
+          <p:cNvPr id="36" name="node Servlets + Filter  (/servlet/*) CSV export, health, audit log"/>
+          <p:cNvSpPr/>
+          <p:nvPr/>
+        </p:nvSpPr>
+        <p:spPr>
+          <a:xfrm>
+            <a:off x="3611880" y="4846320"/>
+            <a:ext cx="4480560" cy="640080"/>
+          </a:xfrm>
+          <a:prstGeom prst="roundRect">
+            <a:avLst>
+              <a:gd name="adj" fmla="val 14286"/>
+            </a:avLst>
+          </a:prstGeom>
+          <a:solidFill>
+            <a:schemeClr val="accent4"/>
+          </a:solidFill>
+          <a:ln/>
+        </p:spPr>
       </p:sp>
       <p:sp>
         <p:nvSpPr>
@@ -29367,8 +29173,88 @@
         </p:nvSpPr>
         <p:spPr>
           <a:xfrm>
-            <a:off x="3611880" y="5532120"/>
-            <a:ext cx="4754880" cy="594360"/>
+            <a:off x="3685032" y="4846320"/>
+            <a:ext cx="4334256" cy="640080"/>
+          </a:xfrm>
+          <a:prstGeom prst="rect">
+            <a:avLst/>
+          </a:prstGeom>
+          <a:noFill/>
+          <a:ln/>
+        </p:spPr>
+        <p:txBody>
+          <a:bodyPr wrap="square" lIns="0" tIns="0" rIns="0" bIns="0" rtlCol="0" anchor="ctr"/>
+          <a:lstStyle/>
+          <a:p>
+            <a:pPr algn="ctr" indent="0" marL="0">
+              <a:buNone/>
+            </a:pPr>
+            <a:r>
+              <a:rPr lang="en-US" sz="1300" b="1" dirty="0">
+                <a:solidFill>
+                  <a:schemeClr val="bg1"/>
+                </a:solidFill>
+                <a:latin typeface="Calibri" pitchFamily="34" charset="0"/>
+                <a:ea typeface="Calibri" pitchFamily="34" charset="-122"/>
+                <a:cs typeface="Calibri" pitchFamily="34" charset="-120"/>
+              </a:rPr>
+              <a:t>Servlets + Filter  (/servlet/*)</a:t>
+            </a:r>
+            <a:endParaRPr lang="en-US" sz="1300" dirty="0"/>
+          </a:p>
+          <a:p>
+            <a:pPr algn="ctr" indent="0" marL="0">
+              <a:buNone/>
+            </a:pPr>
+            <a:r>
+              <a:rPr lang="en-US" sz="1300" b="1" dirty="0">
+                <a:solidFill>
+                  <a:schemeClr val="bg1"/>
+                </a:solidFill>
+                <a:latin typeface="Calibri" pitchFamily="34" charset="0"/>
+                <a:ea typeface="Calibri" pitchFamily="34" charset="-122"/>
+                <a:cs typeface="Calibri" pitchFamily="34" charset="-120"/>
+              </a:rPr>
+              <a:t>CSV export, health, audit log</a:t>
+            </a:r>
+            <a:endParaRPr lang="en-US" sz="1300" dirty="0"/>
+          </a:p>
+        </p:txBody>
+      </p:sp>
+      <p:sp>
+        <p:nvSpPr>
+          <p:cNvPr id="38" name="arrow"/>
+          <p:cNvSpPr/>
+          <p:nvPr/>
+        </p:nvSpPr>
+        <p:spPr>
+          <a:xfrm>
+            <a:off x="8138160" y="5138928"/>
+            <a:ext cx="365760" cy="0"/>
+          </a:xfrm>
+          <a:prstGeom prst="line">
+            <a:avLst/>
+          </a:prstGeom>
+          <a:noFill/>
+          <a:ln w="28575">
+            <a:solidFill>
+              <a:schemeClr val="accent5"/>
+            </a:solidFill>
+            <a:prstDash val="solid"/>
+            <a:tailEnd type="triangle"/>
+          </a:ln>
+        </p:spPr>
+      </p:sp>
+      <p:sp>
+        <p:nvSpPr>
+          <p:cNvPr id="39" name="Text 36"/>
+          <p:cNvSpPr txBox="1"/>
+          <p:nvPr/>
+        </p:nvSpPr>
+        <p:spPr>
+          <a:xfrm>
+            <a:off x="3611880" y="5577840"/>
+            <a:ext cx="4892040" cy="594360"/>
           </a:xfrm>
           <a:prstGeom prst="rect">
             <a:avLst/>
@@ -29384,7 +29270,7 @@
               <a:buNone/>
             </a:pPr>
             <a:r>
-              <a:rPr lang="en-US" sz="1350" dirty="0">
+              <a:rPr lang="en-US" sz="1250" dirty="0">
                 <a:solidFill>
                   <a:schemeClr val="accent5"/>
                 </a:solidFill>
@@ -29392,16 +29278,16 @@
                 <a:ea typeface="Calibri" pitchFamily="34" charset="-122"/>
                 <a:cs typeface="Calibri" pitchFamily="34" charset="-120"/>
               </a:rPr>
-              <a:t>Multithreading: many requests handled at the same time.</a:t>
-            </a:r>
-            <a:endParaRPr lang="en-US" sz="1350" dirty="0"/>
+              <a:t>Classes: Account, Transaction, MeshPacket, PaymentInstruction.</a:t>
+            </a:r>
+            <a:endParaRPr lang="en-US" sz="1250" dirty="0"/>
           </a:p>
           <a:p>
             <a:pPr algn="l" indent="0" marL="0">
               <a:buNone/>
             </a:pPr>
             <a:r>
-              <a:rPr lang="en-US" sz="1350" dirty="0">
+              <a:rPr lang="en-US" sz="1250" dirty="0">
                 <a:solidFill>
                   <a:schemeClr val="accent5"/>
                 </a:solidFill>
@@ -29409,9 +29295,9 @@
                 <a:ea typeface="Calibri" pitchFamily="34" charset="-122"/>
                 <a:cs typeface="Calibri" pitchFamily="34" charset="-120"/>
               </a:rPr>
-              <a:t>Response (JSON) goes back to the bridge / dashboard.</a:t>
-            </a:r>
-            <a:endParaRPr lang="en-US" sz="1350" dirty="0"/>
+              <a:t>Many requests run at once. Responses go back as JSON or CSV.</a:t>
+            </a:r>
+            <a:endParaRPr lang="en-US" sz="1250" dirty="0"/>
           </a:p>
         </p:txBody>
       </p:sp>
@@ -31699,7 +31585,7 @@
                 <a:ea typeface="Calibri" pitchFamily="34" charset="-122"/>
                 <a:cs typeface="Calibri" pitchFamily="34" charset="-120"/>
               </a:rPr>
-              <a:t>JPA + H2 with accounts and a permanent ledger.</a:t>
+              <a:t>JPA and plain JDBC on H2 or MySQL, with a permanent ledger.</a:t>
             </a:r>
             <a:endParaRPr lang="en-US" sz="1600" dirty="0"/>
           </a:p>
@@ -32026,7 +31912,7 @@
                 <a:ea typeface="Calibri" pitchFamily="34" charset="-122"/>
                 <a:cs typeface="Calibri" pitchFamily="34" charset="-120"/>
               </a:rPr>
-              <a:t>Plus: 4 automated tests, including a 3-thread race test, and automatic builds on GitHub Actions.</a:t>
+              <a:t>Plus: 18 automated tests (race test, JDBC, servlets, files), CSV export, an audit log, and GitHub Actions builds.</a:t>
             </a:r>
             <a:endParaRPr lang="en-US" sz="1500" dirty="0"/>
           </a:p>
@@ -33370,7 +33256,7 @@
                 <a:ea typeface="Calibri" pitchFamily="34" charset="-122"/>
                 <a:cs typeface="Calibri" pitchFamily="34" charset="-120"/>
               </a:rPr>
-              <a:t>H2 and the server keys reset on restart.</a:t>
+              <a:t>Server keys reset on restart. H2 data too, unless MySQL is used.</a:t>
             </a:r>
             <a:endParaRPr lang="en-US" sz="1700" dirty="0"/>
           </a:p>
@@ -33412,7 +33298,7 @@
                 <a:ea typeface="Calibri" pitchFamily="34" charset="-122"/>
                 <a:cs typeface="Calibri" pitchFamily="34" charset="-120"/>
               </a:rPr>
-              <a:t>The ingest endpoint has no login or rate limit.</a:t>
+              <a:t>Ingest and servlet endpoints have no login or rate limit.</a:t>
             </a:r>
             <a:endParaRPr lang="en-US" sz="1700" dirty="0"/>
           </a:p>
@@ -33558,7 +33444,7 @@
                 <a:ea typeface="Calibri" pitchFamily="34" charset="-122"/>
                 <a:cs typeface="Calibri" pitchFamily="34" charset="-120"/>
               </a:rPr>
-              <a:t>MySQL or PostgreSQL for permanent data.</a:t>
+              <a:t>Production database setup: backups, replicas, migrations.</a:t>
             </a:r>
             <a:endParaRPr lang="en-US" sz="1700" dirty="0"/>
           </a:p>
@@ -34044,7 +33930,7 @@
                 <a:ea typeface="Calibri" pitchFamily="34" charset="-122"/>
                 <a:cs typeface="Calibri" pitchFamily="34" charset="-120"/>
               </a:rPr>
-              <a:t>Spring Boot controllers and services, JPA with a database, and thread-safe collections.</a:t>
+              <a:t>Spring controllers and servlets, services, JPA and JDBC with H2 or MySQL, and thread-safe collections.</a:t>
             </a:r>
             <a:endParaRPr lang="en-US" sz="1900" dirty="0"/>
           </a:p>
